--- a/examples/catl-2025/deliverables/presentation.pptx
+++ b/examples/catl-2025/deliverables/presentation.pptx
@@ -14,9 +14,10 @@
     <p:sldId id="262" r:id="rId8"/>
     <p:sldId id="263" r:id="rId9"/>
     <p:sldId id="264" r:id="rId10"/>
+    <p:sldId id="265" r:id="rId11"/>
   </p:sldIdLst>
   <p:notesMasterIdLst>
-    <p:notesMasterId r:id="rId11"/>
+    <p:notesMasterId r:id="rId12"/>
   </p:notesMasterIdLst>
   <p:sldSz cx="12192000" cy="6858000"/>
   <p:notesSz cx="6858000" cy="12192000"/>
@@ -554,6 +555,96 @@
 </p:notes>
 </file>
 
+<file path=ppt/notesSlides/notesSlide10.xml><?xml version="1.0" encoding="utf-8"?>
+<p:notes xmlns:a="http://schemas.openxmlformats.org/drawingml/2006/main" xmlns:r="http://schemas.openxmlformats.org/officeDocument/2006/relationships" xmlns:p="http://schemas.openxmlformats.org/presentationml/2006/main">
+  <p:cSld>
+    <p:spTree>
+      <p:nvGrpSpPr>
+        <p:cNvPr id="1" name=""/>
+        <p:cNvGrpSpPr/>
+        <p:nvPr/>
+      </p:nvGrpSpPr>
+      <p:grpSpPr>
+        <a:xfrm>
+          <a:off x="0" y="0"/>
+          <a:ext cx="0" cy="0"/>
+          <a:chOff x="0" y="0"/>
+          <a:chExt cx="0" cy="0"/>
+        </a:xfrm>
+      </p:grpSpPr>
+      <p:sp>
+        <p:nvSpPr>
+          <p:cNvPr id="2" name="Slide Image Placeholder 1"/>
+          <p:cNvSpPr>
+            <a:spLocks noGrp="1" noRot="1" noChangeAspect="1"/>
+          </p:cNvSpPr>
+          <p:nvPr>
+            <p:ph type="sldImg"/>
+          </p:nvPr>
+        </p:nvSpPr>
+        <p:spPr/>
+      </p:sp>
+      <p:sp>
+        <p:nvSpPr>
+          <p:cNvPr id="3" name="Notes Placeholder 2"/>
+          <p:cNvSpPr>
+            <a:spLocks noGrp="1"/>
+          </p:cNvSpPr>
+          <p:nvPr>
+            <p:ph type="body" idx="1"/>
+          </p:nvPr>
+        </p:nvSpPr>
+        <p:spPr/>
+        <p:txBody>
+          <a:bodyPr/>
+          <a:lstStyle/>
+          <a:p>
+            <a:r>
+              <a:rPr lang="en-US" dirty="0"/>
+              <a:t>REQ_CASH: 集团现金汇总不能证明每个到期点的可用资金。
+Close when: 来源用途与期初现金逐月闭合，融资条件有证据，压力下最小现金和契约时点可重算。REQ_ESTIMATE: 仅年报余额不能验证全部减值及保修估计。
+Close when: 账面范围与模型一致，关键参数有证据，独立敏感性可复算，重大差异处理完成。</a:t>
+            </a:r>
+            <a:endParaRPr lang="en-US" dirty="0"/>
+          </a:p>
+        </p:txBody>
+      </p:sp>
+      <p:sp>
+        <p:nvSpPr>
+          <p:cNvPr id="4" name="Slide Number Placeholder 3"/>
+          <p:cNvSpPr>
+            <a:spLocks noGrp="1"/>
+          </p:cNvSpPr>
+          <p:nvPr>
+            <p:ph type="sldNum" sz="quarter" idx="10"/>
+          </p:nvPr>
+        </p:nvSpPr>
+        <p:spPr/>
+        <p:txBody>
+          <a:bodyPr/>
+          <a:lstStyle/>
+          <a:p>
+            <a:fld id="{F7021451-1387-4CA6-816F-3879F97B5CBC}" type="slidenum">
+              <a:rPr lang="en-US"/>
+              <a:t>10</a:t>
+            </a:fld>
+            <a:endParaRPr lang="en-US"/>
+          </a:p>
+        </p:txBody>
+      </p:sp>
+    </p:spTree>
+    <p:extLst>
+      <p:ext uri="{BB962C8B-B14F-4D97-AF65-F5344CB8AC3E}">
+        <p14:creationId xmlns:p14="http://schemas.microsoft.com/office/powerpoint/2010/main" val="1024086991"/>
+      </p:ext>
+    </p:extLst>
+  </p:cSld>
+  <p:clrMapOvr>
+    <a:masterClrMapping/>
+  </p:clrMapOvr>
+</p:notes>
+</file>
+
 <file path=ppt/notesSlides/notesSlide2.xml><?xml version="1.0" encoding="utf-8"?>
 <p:notes xmlns:a="http://schemas.openxmlformats.org/drawingml/2006/main" xmlns:r="http://schemas.openxmlformats.org/officeDocument/2006/relationships" xmlns:p="http://schemas.openxmlformats.org/presentationml/2006/main">
   <p:cSld>
@@ -600,13 +691,7 @@
           <a:p>
             <a:r>
               <a:rPr lang="en-US" dirty="0"/>
-              <a:t>F_GROWTH
-增长从何而来
-销量增长高于合并收入，但收入含非电池业务，销量单位与产品结构也不同，不能将两者之比直接称为电池降价。产能扩张与存货增加要求核对投产及订单兑现。
-产品结构和地区组合变化可能影响收入增速。
-并表变化也可能影响同比；未取得同范围量价明细。
-Evidence: E_BIZ, revenue_growth, volume_growth
-Counterevidence: </a:t>
+              <a:t/>
             </a:r>
             <a:endParaRPr lang="en-US" dirty="0"/>
           </a:p>
@@ -694,13 +779,13 @@
           <a:p>
             <a:r>
               <a:rPr lang="en-US" dirty="0"/>
-              <a:t>F_CASH
-利润为何低于CFO
-存货和经营应收占用被经营应付增加超过，需区分业务规模、客户预收、付款期和融资安排。CFO减现金资本支出为908.75 亿元人民币，尚不是自由可分配资金。
-采购规模和合同负债变化可能使经营应付增加，并不必然是延迟付款。
-期末余额差额受合并、非现金和重分类影响，不能替代现金流附注项目。
-Evidence: E_BRIDGE, cfo_bridge, working_capital_effect, fcf_simple
-Counterevidence: E_SUPPLY</a:t>
+              <a:t>F_GROWTH
+增长从何而来
+销量增长高于合并收入，但收入含非电池业务，销量单位与产品结构也不同，不能将两者之比直接称为电池降价。产能扩张与存货增加要求核对投产及订单兑现。
+产品结构和地区组合变化可能影响收入增速。
+并表变化也可能影响同比；未取得同范围量价明细。
+Evidence: E_BIZ, revenue_growth, volume_growth
+Counterevidence: All source records: E_PL, E_BIZ, revenue_growth, volume_growth</a:t>
             </a:r>
             <a:endParaRPr lang="en-US" dirty="0"/>
           </a:p>
@@ -788,13 +873,13 @@
           <a:p>
             <a:r>
               <a:rPr lang="en-US" dirty="0"/>
-              <a:t>F_SUPPLY
-是否把CFO改善全部归因于融资扩张
-余额下降反驳“全部现金改善来自供应链融资新增”的解释。把全部安排一次性纳入债务的敏感性口径为1,568.24 亿元人民币；需合同条款决定信用分类。
-余额下降仍可能同时伴随普通贸易应付款上升。
-供应商融资可替换其他资金，风险还取决于期限、集中度和终止条款。
-Evidence: E_SUPPLY, supply_components, supply_change
-Counterevidence: E_BRIDGE</a:t>
+              <a:t>F_CASH
+利润为何低于CFO
+存货和经营应收占用被经营应付增加超过，需区分业务规模、客户预收、付款期和融资安排。CFO减现金资本支出为908.75 亿元人民币，尚不是自由可分配资金。
+采购规模和合同负债变化可能使经营应付增加，并不必然是延迟付款。
+期末余额差额受合并、非现金和重分类影响，不能替代现金流附注项目。
+Evidence: E_BRIDGE, cfo_bridge, working_capital_effect, fcf_simple
+Counterevidence: E_SUPPLYAll source records: E_CF, E_BRIDGE, cfo_bridge, working_capital_effect, fcf_simple</a:t>
             </a:r>
             <a:endParaRPr lang="en-US" dirty="0"/>
           </a:p>
@@ -882,13 +967,13 @@
           <a:p>
             <a:r>
               <a:rPr lang="en-US" dirty="0"/>
-              <a:t>F_LIQUIDITY
-集团大额现金意味着怎样的流动性
-排除项目包含受限保证金、质押定存和不可随时支取定存及利息，各类限制不同。集团现金尚需法人、币种、地区、季节性及经营最低现金判断，不能直接抵销全部集团债务。
-部分定存到期后可用，但时间须匹配债务到期。
-境外现金可能受转移或税费限制；年报汇总不足以确认可调度数。
-Evidence: E_CASH, E_CF, cash_composition, debt
-Counterevidence: </a:t>
+              <a:t>F_SUPPLY
+是否把CFO改善全部归因于融资扩张
+余额下降反驳“全部现金改善来自供应链融资新增”的解释。把全部安排一次性纳入债务的敏感性口径为1,568.24 亿元人民币；需合同条款决定信用分类。
+余额下降仍可能同时伴随普通贸易应付款上升。
+供应商融资可替换其他资金，风险还取决于期限、集中度和终止条款。
+Evidence: E_SUPPLY, supply_components, supply_change
+Counterevidence: E_BRIDGEAll source records: E_SUPPLY, E_DEBT, supply_components, supply_change</a:t>
             </a:r>
             <a:endParaRPr lang="en-US" dirty="0"/>
           </a:p>
@@ -976,13 +1061,13 @@
           <a:p>
             <a:r>
               <a:rPr lang="en-US" dirty="0"/>
-              <a:t>F_ESTIMATES
-高增长是否证明资产和准备估计充足
-总体产能利用率不能推翻个别旧产线减值。转固606.16 亿元人民币与当期购建现金423.45 亿元人民币反映不同边界。售后预计负债依赖质保内销量、维修率与单位成本，余额增加不能替代费用与实际使用桥。
-技术迭代或客户迁移可使局部产线减值，即使集团需求增长。
-准备余额增加可能来自销量、维修率、成本或实际支出节奏，公开表无法分清。
-Evidence: E_PPE, E_WARRANTY, E_POLICY, ppe_imp_recalc
-Counterevidence: E_BIZ</a:t>
+              <a:t>F_LIQUIDITY
+集团大额现金意味着怎样的流动性
+排除项目包含受限保证金、质押定存和不可随时支取定存及利息，各类限制不同。集团现金尚需法人、币种、地区、季节性及经营最低现金判断，不能直接抵销全部集团债务。
+部分定存到期后可用，但时间须匹配债务到期。
+境外现金可能受转移或税费限制；年报汇总不足以确认可调度数。
+Evidence: E_CASH, E_CF, cash_composition, debt
+Counterevidence: All source records: E_BS, E_CASH, E_CF, cash_composition, debt</a:t>
             </a:r>
             <a:endParaRPr lang="en-US" dirty="0"/>
           </a:p>
@@ -1070,13 +1155,13 @@
           <a:p>
             <a:r>
               <a:rPr lang="en-US" dirty="0"/>
-              <a:t>F_EQUITY
-股东回报怎样复算
-集团权益增长由综合收益、股东投入与分配共同形成；集团盈利不能直接代表母公司可分红现金。简单平均ROE不是公司披露的加权ROE，香港发行新股也影响分母与资金。
-资本交易和其他综合收益会改变权益而不增加经营利润。
-母公司投资收益和子公司分红存在时间及可分配限制。
-Evidence: E_EQ, E_PL, equity_rollforward, roe_simple
-Counterevidence: </a:t>
+              <a:t>F_ESTIMATES
+高增长是否证明资产和准备估计充足
+总体产能利用率不能推翻个别旧产线减值。转固606.16 亿元人民币与当期购建现金423.45 亿元人民币反映不同边界。售后预计负债依赖质保内销量、维修率与单位成本，余额增加不能替代费用与实际使用桥。
+技术迭代或客户迁移可使局部产线减值，即使集团需求增长。
+准备余额增加可能来自销量、维修率、成本或实际支出节奏，公开表无法分清。
+Evidence: E_PPE, E_WARRANTY, E_POLICY, ppe_imp_recalc
+Counterevidence: E_BIZAll source records: E_PPE, E_WARRANTY, E_POLICY, ppe_imp_recalc</a:t>
             </a:r>
             <a:endParaRPr lang="en-US" dirty="0"/>
           </a:p>
@@ -1164,13 +1249,13 @@
           <a:p>
             <a:r>
               <a:rPr lang="en-US" dirty="0"/>
-              <a:t>F_AUDIT
-关键审计事项能说明什么
-关键审计事项说明原审计中的重要关注，不等于确认错报。本次需将收入截止、可变对价及资产组估计落实到合同与数据，不能复制原审计师程序为已完成。
-存在重要估计不等于估计错误。
-无保留意见也不意味着每项经营假设均经独立证实。
-Evidence: E_AUDIT, E_POLICY, E_PPE
-Counterevidence: </a:t>
+              <a:t>F_EQUITY
+股东回报怎样复算
+集团权益增长由综合收益、股东投入与分配共同形成；集团盈利不能直接代表母公司可分红现金。简单平均ROE不是公司披露的加权ROE，香港发行新股也影响分母与资金。
+资本交易和其他综合收益会改变权益而不增加经营利润。
+母公司投资收益和子公司分红存在时间及可分配限制。
+Evidence: E_EQ, E_PL, equity_rollforward, roe_simple
+Counterevidence: All source records: E_PL, E_BS, E_EQ, equity_rollforward, roe_simple</a:t>
             </a:r>
             <a:endParaRPr lang="en-US" dirty="0"/>
           </a:p>
@@ -1258,9 +1343,13 @@
           <a:p>
             <a:r>
               <a:rPr lang="en-US" dirty="0"/>
-              <a:t>REQ_CASH: 集团现金汇总不能证明每个到期点的可用资金。
-Close when: 来源用途与期初现金逐月闭合，融资条件有证据，压力下最小现金和契约时点可重算。REQ_ESTIMATE: 仅年报余额不能验证全部减值及保修估计。
-Close when: 账面范围与模型一致，关键参数有证据，独立敏感性可复算，重大差异处理完成。</a:t>
+              <a:t>F_AUDIT
+关键审计事项能说明什么
+关键审计事项说明原审计中的重要关注，不等于确认错报。本次需将收入截止、可变对价及资产组估计落实到合同与数据，不能复制原审计师程序为已完成。
+存在重要估计不等于估计错误。
+无保留意见也不意味着每项经营假设均经独立证实。
+Evidence: E_AUDIT, E_POLICY, E_PPE
+Counterevidence: All source records: E_AUDIT, E_POLICY, E_PPE</a:t>
             </a:r>
             <a:endParaRPr lang="en-US" dirty="0"/>
           </a:p>
@@ -1651,10 +1740,13 @@
           <a:ln/>
         </p:spPr>
         <p:txBody>
-          <a:bodyPr wrap="square" lIns="0" tIns="0" rIns="0" bIns="0" rtlCol="0" anchor="ctr"/>
-          <a:lstStyle/>
-          <a:p>
-            <a:pPr indent="0" marL="0">
+          <a:bodyPr wrap="square" lIns="0" tIns="0" rIns="0" bIns="0" rtlCol="0" anchor="t"/>
+          <a:lstStyle/>
+          <a:p>
+            <a:pPr indent="0" marL="0">
+              <a:lnSpc>
+                <a:spcPct val="100000"/>
+              </a:lnSpc>
               <a:buNone/>
             </a:pPr>
             <a:r>
@@ -1746,10 +1838,13 @@
           <a:ln/>
         </p:spPr>
         <p:txBody>
-          <a:bodyPr wrap="square" lIns="0" tIns="0" rIns="0" bIns="0" rtlCol="0" anchor="ctr"/>
-          <a:lstStyle/>
-          <a:p>
-            <a:pPr indent="0" marL="0">
+          <a:bodyPr wrap="square" lIns="0" tIns="0" rIns="0" bIns="0" rtlCol="0" anchor="t"/>
+          <a:lstStyle/>
+          <a:p>
+            <a:pPr indent="0" marL="0">
+              <a:lnSpc>
+                <a:spcPct val="100000"/>
+              </a:lnSpc>
               <a:buNone/>
             </a:pPr>
             <a:r>
@@ -1758,7 +1853,24 @@
                   <a:srgbClr val="FFFFFF"/>
                 </a:solidFill>
               </a:rPr>
-              <a:t>解释业务增长如何转为现金，识别资本扩张、供应商融资与资产估计需要进一步核查的事项，供研究员复核。</a:t>
+              <a:t>解释业务增长如何转为现金，识别资本扩张、供应商融资与资产估计需要</a:t>
+            </a:r>
+            <a:endParaRPr lang="en-US" sz="2400" dirty="0"/>
+          </a:p>
+          <a:p>
+            <a:pPr indent="0" marL="0">
+              <a:lnSpc>
+                <a:spcPct val="100000"/>
+              </a:lnSpc>
+              <a:buNone/>
+            </a:pPr>
+            <a:r>
+              <a:rPr lang="en-US" sz="2400" dirty="0">
+                <a:solidFill>
+                  <a:srgbClr val="FFFFFF"/>
+                </a:solidFill>
+              </a:rPr>
+              <a:t>进一步核查的事项，供研究员复核。</a:t>
             </a:r>
             <a:endParaRPr lang="en-US" sz="2400" dirty="0"/>
           </a:p>
@@ -1825,6 +1937,392 @@
               <a:t>信息截止 2026-03-10</a:t>
             </a:r>
             <a:endParaRPr lang="en-US" sz="1900" dirty="0"/>
+          </a:p>
+        </p:txBody>
+      </p:sp>
+    </p:spTree>
+  </p:cSld>
+  <p:clrMapOvr>
+    <a:masterClrMapping/>
+  </p:clrMapOvr>
+</p:sld>
+</file>
+
+<file path=ppt/slides/slide10.xml><?xml version="1.0" encoding="utf-8"?>
+<p:sld xmlns:a="http://schemas.openxmlformats.org/drawingml/2006/main" xmlns:r="http://schemas.openxmlformats.org/officeDocument/2006/relationships" xmlns:p="http://schemas.openxmlformats.org/presentationml/2006/main">
+  <p:cSld name="Slide 10">
+    <p:bg>
+      <p:bgPr>
+        <a:solidFill>
+          <a:srgbClr val="F5F7F6"/>
+        </a:solidFill>
+      </p:bgPr>
+    </p:bg>
+    <p:spTree>
+      <p:nvGrpSpPr>
+        <p:cNvPr id="1" name=""/>
+        <p:cNvGrpSpPr/>
+        <p:nvPr/>
+      </p:nvGrpSpPr>
+      <p:grpSpPr>
+        <a:xfrm>
+          <a:off x="0" y="0"/>
+          <a:ext cx="0" cy="0"/>
+          <a:chOff x="0" y="0"/>
+          <a:chExt cx="0" cy="0"/>
+        </a:xfrm>
+      </p:grpSpPr>
+      <p:sp>
+        <p:nvSpPr>
+          <p:cNvPr id="2" name="Text 0"/>
+          <p:cNvSpPr/>
+          <p:nvPr/>
+        </p:nvSpPr>
+        <p:spPr>
+          <a:xfrm>
+            <a:off x="548640" y="365760"/>
+            <a:ext cx="11064240" cy="731520"/>
+          </a:xfrm>
+          <a:prstGeom prst="rect">
+            <a:avLst/>
+          </a:prstGeom>
+          <a:noFill/>
+          <a:ln/>
+        </p:spPr>
+        <p:txBody>
+          <a:bodyPr wrap="square" lIns="0" tIns="0" rIns="0" bIns="0" rtlCol="0" anchor="t"/>
+          <a:lstStyle/>
+          <a:p>
+            <a:pPr indent="0" marL="0">
+              <a:lnSpc>
+                <a:spcPct val="100000"/>
+              </a:lnSpc>
+              <a:buNone/>
+            </a:pPr>
+            <a:r>
+              <a:rPr lang="en-US" sz="2700" b="1" dirty="0">
+                <a:solidFill>
+                  <a:srgbClr val="213B45"/>
+                </a:solidFill>
+              </a:rPr>
+              <a:t>下一步核查</a:t>
+            </a:r>
+            <a:endParaRPr lang="en-US" sz="2700" dirty="0"/>
+          </a:p>
+        </p:txBody>
+      </p:sp>
+      <p:sp>
+        <p:nvSpPr>
+          <p:cNvPr id="3" name="Shape 1"/>
+          <p:cNvSpPr/>
+          <p:nvPr/>
+        </p:nvSpPr>
+        <p:spPr>
+          <a:xfrm>
+            <a:off x="548640" y="1188720"/>
+            <a:ext cx="11064240" cy="0"/>
+          </a:xfrm>
+          <a:prstGeom prst="line">
+            <a:avLst/>
+          </a:prstGeom>
+          <a:noFill/>
+          <a:ln w="25400">
+            <a:solidFill>
+              <a:srgbClr val="237F72"/>
+            </a:solidFill>
+            <a:prstDash val="solid"/>
+          </a:ln>
+        </p:spPr>
+      </p:sp>
+      <p:sp>
+        <p:nvSpPr>
+          <p:cNvPr id="4" name="Text 2"/>
+          <p:cNvSpPr/>
+          <p:nvPr/>
+        </p:nvSpPr>
+        <p:spPr>
+          <a:xfrm>
+            <a:off x="548640" y="6473952"/>
+            <a:ext cx="11064240" cy="182880"/>
+          </a:xfrm>
+          <a:prstGeom prst="rect">
+            <a:avLst/>
+          </a:prstGeom>
+          <a:noFill/>
+          <a:ln/>
+        </p:spPr>
+        <p:txBody>
+          <a:bodyPr wrap="square" lIns="0" tIns="0" rIns="0" bIns="0" rtlCol="0" anchor="ctr"/>
+          <a:lstStyle/>
+          <a:p>
+            <a:pPr indent="0" marL="0">
+              <a:buNone/>
+            </a:pPr>
+            <a:r>
+              <a:rPr lang="en-US" sz="900" dirty="0">
+                <a:solidFill>
+                  <a:srgbClr val="586874"/>
+                </a:solidFill>
+              </a:rPr>
+              <a:t>宁德时代集团  |  2025-12-31  |  catl-2025-example-v1  |  10</a:t>
+            </a:r>
+            <a:endParaRPr lang="en-US" sz="900" dirty="0"/>
+          </a:p>
+        </p:txBody>
+      </p:sp>
+      <p:sp>
+        <p:nvSpPr>
+          <p:cNvPr id="5" name="Text 3"/>
+          <p:cNvSpPr/>
+          <p:nvPr/>
+        </p:nvSpPr>
+        <p:spPr>
+          <a:xfrm>
+            <a:off x="594360" y="1508760"/>
+            <a:ext cx="914400" cy="365760"/>
+          </a:xfrm>
+          <a:prstGeom prst="rect">
+            <a:avLst/>
+          </a:prstGeom>
+          <a:noFill/>
+          <a:ln/>
+        </p:spPr>
+        <p:txBody>
+          <a:bodyPr wrap="square" lIns="0" tIns="0" rIns="0" bIns="0" rtlCol="0" anchor="ctr"/>
+          <a:lstStyle/>
+          <a:p>
+            <a:pPr indent="0" marL="0">
+              <a:buNone/>
+            </a:pPr>
+            <a:r>
+              <a:rPr lang="en-US" sz="2000" b="1" dirty="0">
+                <a:solidFill>
+                  <a:srgbClr val="237F72"/>
+                </a:solidFill>
+              </a:rPr>
+              <a:t>01</a:t>
+            </a:r>
+            <a:endParaRPr lang="en-US" sz="2000" dirty="0"/>
+          </a:p>
+        </p:txBody>
+      </p:sp>
+      <p:sp>
+        <p:nvSpPr>
+          <p:cNvPr id="6" name="Text 4"/>
+          <p:cNvSpPr/>
+          <p:nvPr/>
+        </p:nvSpPr>
+        <p:spPr>
+          <a:xfrm>
+            <a:off x="1645920" y="1508760"/>
+            <a:ext cx="9692640" cy="777240"/>
+          </a:xfrm>
+          <a:prstGeom prst="rect">
+            <a:avLst/>
+          </a:prstGeom>
+          <a:noFill/>
+          <a:ln/>
+        </p:spPr>
+        <p:txBody>
+          <a:bodyPr wrap="square" lIns="0" tIns="0" rIns="0" bIns="0" rtlCol="0" anchor="t"/>
+          <a:lstStyle/>
+          <a:p>
+            <a:pPr indent="0" marL="0">
+              <a:lnSpc>
+                <a:spcPct val="100000"/>
+              </a:lnSpc>
+              <a:buNone/>
+            </a:pPr>
+            <a:r>
+              <a:rPr lang="en-US" sz="1800" dirty="0">
+                <a:solidFill>
+                  <a:srgbClr val="1F2933"/>
+                </a:solidFill>
+              </a:rPr>
+              <a:t>取得逐法人、币种、月份的债务本金利息、受限现金、承诺额度到期与提款条件，以及未来</a:t>
+            </a:r>
+            <a:endParaRPr lang="en-US" sz="1800" dirty="0"/>
+          </a:p>
+          <a:p>
+            <a:pPr indent="0" marL="0">
+              <a:lnSpc>
+                <a:spcPct val="100000"/>
+              </a:lnSpc>
+              <a:buNone/>
+            </a:pPr>
+            <a:r>
+              <a:rPr lang="en-US" sz="1800" dirty="0">
+                <a:solidFill>
+                  <a:srgbClr val="1F2933"/>
+                </a:solidFill>
+              </a:rPr>
+              <a:t>经营/投资/分红预算。</a:t>
+            </a:r>
+            <a:endParaRPr lang="en-US" sz="1800" dirty="0"/>
+          </a:p>
+        </p:txBody>
+      </p:sp>
+      <p:sp>
+        <p:nvSpPr>
+          <p:cNvPr id="7" name="Text 5"/>
+          <p:cNvSpPr/>
+          <p:nvPr/>
+        </p:nvSpPr>
+        <p:spPr>
+          <a:xfrm>
+            <a:off x="1645920" y="2304288"/>
+            <a:ext cx="9692640" cy="274320"/>
+          </a:xfrm>
+          <a:prstGeom prst="rect">
+            <a:avLst/>
+          </a:prstGeom>
+          <a:noFill/>
+          <a:ln/>
+        </p:spPr>
+        <p:txBody>
+          <a:bodyPr wrap="square" lIns="0" tIns="0" rIns="0" bIns="0" rtlCol="0" anchor="ctr"/>
+          <a:lstStyle/>
+          <a:p>
+            <a:pPr indent="0" marL="0">
+              <a:buNone/>
+            </a:pPr>
+            <a:r>
+              <a:rPr lang="en-US" sz="1200" dirty="0">
+                <a:solidFill>
+                  <a:srgbClr val="586874"/>
+                </a:solidFill>
+              </a:rPr>
+              <a:t>资金负责人及信用分析师</a:t>
+            </a:r>
+            <a:endParaRPr lang="en-US" sz="1200" dirty="0"/>
+          </a:p>
+        </p:txBody>
+      </p:sp>
+      <p:sp>
+        <p:nvSpPr>
+          <p:cNvPr id="9" name="Text 6"/>
+          <p:cNvSpPr/>
+          <p:nvPr/>
+        </p:nvSpPr>
+        <p:spPr>
+          <a:xfrm>
+            <a:off x="594360" y="2880360"/>
+            <a:ext cx="914400" cy="365760"/>
+          </a:xfrm>
+          <a:prstGeom prst="rect">
+            <a:avLst/>
+          </a:prstGeom>
+          <a:noFill/>
+          <a:ln/>
+        </p:spPr>
+        <p:txBody>
+          <a:bodyPr wrap="square" lIns="0" tIns="0" rIns="0" bIns="0" rtlCol="0" anchor="ctr"/>
+          <a:lstStyle/>
+          <a:p>
+            <a:pPr indent="0" marL="0">
+              <a:buNone/>
+            </a:pPr>
+            <a:r>
+              <a:rPr lang="en-US" sz="2000" b="1" dirty="0">
+                <a:solidFill>
+                  <a:srgbClr val="237F72"/>
+                </a:solidFill>
+              </a:rPr>
+              <a:t>02</a:t>
+            </a:r>
+            <a:endParaRPr lang="en-US" sz="2000" dirty="0"/>
+          </a:p>
+        </p:txBody>
+      </p:sp>
+      <p:sp>
+        <p:nvSpPr>
+          <p:cNvPr id="10" name="Text 7"/>
+          <p:cNvSpPr/>
+          <p:nvPr/>
+        </p:nvSpPr>
+        <p:spPr>
+          <a:xfrm>
+            <a:off x="1645920" y="2880360"/>
+            <a:ext cx="9692640" cy="777240"/>
+          </a:xfrm>
+          <a:prstGeom prst="rect">
+            <a:avLst/>
+          </a:prstGeom>
+          <a:noFill/>
+          <a:ln/>
+        </p:spPr>
+        <p:txBody>
+          <a:bodyPr wrap="square" lIns="0" tIns="0" rIns="0" bIns="0" rtlCol="0" anchor="t"/>
+          <a:lstStyle/>
+          <a:p>
+            <a:pPr indent="0" marL="0">
+              <a:lnSpc>
+                <a:spcPct val="100000"/>
+              </a:lnSpc>
+              <a:buNone/>
+            </a:pPr>
+            <a:r>
+              <a:rPr lang="en-US" sz="1800" dirty="0">
+                <a:solidFill>
+                  <a:srgbClr val="1F2933"/>
+                </a:solidFill>
+              </a:rPr>
+              <a:t>取得资产组范围与完整减值预测、折现率依据、历史预算兑现，以及售后准备新增/使用/</a:t>
+            </a:r>
+            <a:endParaRPr lang="en-US" sz="1800" dirty="0"/>
+          </a:p>
+          <a:p>
+            <a:pPr indent="0" marL="0">
+              <a:lnSpc>
+                <a:spcPct val="100000"/>
+              </a:lnSpc>
+              <a:buNone/>
+            </a:pPr>
+            <a:r>
+              <a:rPr lang="en-US" sz="1800" dirty="0">
+                <a:solidFill>
+                  <a:srgbClr val="1F2933"/>
+                </a:solidFill>
+              </a:rPr>
+              <a:t>冲回和质保批次数据。</a:t>
+            </a:r>
+            <a:endParaRPr lang="en-US" sz="1800" dirty="0"/>
+          </a:p>
+        </p:txBody>
+      </p:sp>
+      <p:sp>
+        <p:nvSpPr>
+          <p:cNvPr id="11" name="Text 8"/>
+          <p:cNvSpPr/>
+          <p:nvPr/>
+        </p:nvSpPr>
+        <p:spPr>
+          <a:xfrm>
+            <a:off x="1645920" y="3675888"/>
+            <a:ext cx="9692640" cy="274320"/>
+          </a:xfrm>
+          <a:prstGeom prst="rect">
+            <a:avLst/>
+          </a:prstGeom>
+          <a:noFill/>
+          <a:ln/>
+        </p:spPr>
+        <p:txBody>
+          <a:bodyPr wrap="square" lIns="0" tIns="0" rIns="0" bIns="0" rtlCol="0" anchor="ctr"/>
+          <a:lstStyle/>
+          <a:p>
+            <a:pPr indent="0" marL="0">
+              <a:buNone/>
+            </a:pPr>
+            <a:r>
+              <a:rPr lang="en-US" sz="1200" dirty="0">
+                <a:solidFill>
+                  <a:srgbClr val="586874"/>
+                </a:solidFill>
+              </a:rPr>
+              <a:t>资产/售后财务负责人及审计估计负责人</a:t>
+            </a:r>
+            <a:endParaRPr lang="en-US" sz="1200" dirty="0"/>
           </a:p>
         </p:txBody>
       </p:sp>
@@ -1878,10 +2376,13 @@
           <a:ln/>
         </p:spPr>
         <p:txBody>
-          <a:bodyPr wrap="square" lIns="0" tIns="0" rIns="0" bIns="0" rtlCol="0" anchor="ctr"/>
-          <a:lstStyle/>
-          <a:p>
-            <a:pPr indent="0" marL="0">
+          <a:bodyPr wrap="square" lIns="0" tIns="0" rIns="0" bIns="0" rtlCol="0" anchor="t"/>
+          <a:lstStyle/>
+          <a:p>
+            <a:pPr indent="0" marL="0">
+              <a:lnSpc>
+                <a:spcPct val="100000"/>
+              </a:lnSpc>
               <a:buNone/>
             </a:pPr>
             <a:r>
@@ -1890,7 +2391,7 @@
                   <a:srgbClr val="213B45"/>
                 </a:solidFill>
               </a:rPr>
-              <a:t>业务增长与量价结构</a:t>
+              <a:t>分析范围与限制</a:t>
             </a:r>
             <a:endParaRPr lang="en-US" sz="2700" dirty="0"/>
           </a:p>
@@ -1963,555 +2464,103 @@
         </p:nvSpPr>
         <p:spPr>
           <a:xfrm>
-            <a:off x="594360" y="1444752"/>
-            <a:ext cx="6995160" cy="685800"/>
-          </a:xfrm>
-          <a:prstGeom prst="rect">
-            <a:avLst/>
-          </a:prstGeom>
-          <a:noFill/>
-          <a:ln/>
-        </p:spPr>
-        <p:txBody>
-          <a:bodyPr wrap="square" lIns="0" tIns="0" rIns="0" bIns="0" rtlCol="0" anchor="ctr"/>
-          <a:lstStyle/>
-          <a:p>
-            <a:pPr indent="0" marL="0">
-              <a:buNone/>
-            </a:pPr>
-            <a:r>
-              <a:rPr lang="en-US" sz="2200" b="1" dirty="0">
-                <a:solidFill>
-                  <a:srgbClr val="213B45"/>
-                </a:solidFill>
-              </a:rPr>
-              <a:t>增长集中于动力电池且需要解释量价结构</a:t>
-            </a:r>
-            <a:endParaRPr lang="en-US" sz="2200" dirty="0"/>
-          </a:p>
-        </p:txBody>
-      </p:sp>
-      <p:sp>
-        <p:nvSpPr>
-          <p:cNvPr id="6" name="Text 4"/>
-          <p:cNvSpPr/>
-          <p:nvPr/>
-        </p:nvSpPr>
-        <p:spPr>
-          <a:xfrm>
-            <a:off x="594360" y="2331720"/>
-            <a:ext cx="6995160" cy="1828800"/>
-          </a:xfrm>
-          <a:prstGeom prst="rect">
-            <a:avLst/>
-          </a:prstGeom>
-          <a:noFill/>
-          <a:ln/>
-        </p:spPr>
-        <p:txBody>
-          <a:bodyPr wrap="square" lIns="0" tIns="0" rIns="0" bIns="0" rtlCol="0" anchor="ctr">
-            <a:normAutofit/>
-          </a:bodyPr>
-          <a:lstStyle/>
-          <a:p>
-            <a:pPr indent="0" marL="0">
-              <a:buNone/>
-            </a:pPr>
-            <a:r>
-              <a:rPr lang="en-US" sz="1900" dirty="0">
+            <a:off x="594360" y="1463040"/>
+            <a:ext cx="10972800" cy="4480560"/>
+          </a:xfrm>
+          <a:prstGeom prst="rect">
+            <a:avLst/>
+          </a:prstGeom>
+          <a:noFill/>
+          <a:ln/>
+        </p:spPr>
+        <p:txBody>
+          <a:bodyPr wrap="square" lIns="0" tIns="0" rIns="0" bIns="0" rtlCol="0" anchor="t"/>
+          <a:lstStyle/>
+          <a:p>
+            <a:pPr indent="0" marL="0">
+              <a:lnSpc>
+                <a:spcPct val="100000"/>
+              </a:lnSpc>
+              <a:buNone/>
+            </a:pPr>
+            <a:r>
+              <a:rPr lang="en-US" sz="1600" dirty="0">
                 <a:solidFill>
                   <a:srgbClr val="1F2933"/>
                 </a:solidFill>
               </a:rPr>
-              <a:t>收入增长17.04%，动力系统增长25.08%，储能增长8.99%，材料回收同比-23.83%。</a:t>
-            </a:r>
-            <a:endParaRPr lang="en-US" sz="1900" dirty="0"/>
-          </a:p>
-        </p:txBody>
-      </p:sp>
-      <p:sp>
-        <p:nvSpPr>
-          <p:cNvPr id="7" name="Text 5"/>
-          <p:cNvSpPr/>
-          <p:nvPr/>
-        </p:nvSpPr>
-        <p:spPr>
-          <a:xfrm>
-            <a:off x="594360" y="4434840"/>
-            <a:ext cx="6995160" cy="1325880"/>
-          </a:xfrm>
-          <a:prstGeom prst="rect">
-            <a:avLst/>
-          </a:prstGeom>
-          <a:noFill/>
-          <a:ln/>
-        </p:spPr>
-        <p:txBody>
-          <a:bodyPr wrap="square" lIns="0" tIns="0" rIns="0" bIns="0" rtlCol="0" anchor="ctr">
-            <a:normAutofit/>
-          </a:bodyPr>
-          <a:lstStyle/>
-          <a:p>
-            <a:pPr indent="0" marL="0">
+              <a:t>本例为选定公开资料的专业研究示范，不是整本年报全部披露的完整审计。</a:t>
+            </a:r>
+            <a:endParaRPr lang="en-US" sz="1600" dirty="0"/>
+          </a:p>
+          <a:p>
+            <a:pPr indent="0" marL="0">
+              <a:lnSpc>
+                <a:spcPct val="100000"/>
+              </a:lnSpc>
+              <a:buNone/>
+            </a:pPr>
+            <a:endParaRPr lang="en-US" sz="1600" dirty="0"/>
+          </a:p>
+          <a:p>
+            <a:pPr indent="0" marL="0">
+              <a:lnSpc>
+                <a:spcPct val="100000"/>
+              </a:lnSpc>
               <a:buNone/>
             </a:pPr>
             <a:r>
               <a:rPr lang="en-US" sz="1600" dirty="0">
                 <a:solidFill>
-                  <a:srgbClr val="56646C"/>
-                </a:solidFill>
-              </a:rPr>
-              <a:t>判断改变条件</a:t>
+                  <a:srgbClr val="1F2933"/>
+                </a:solidFill>
+              </a:rPr>
+              <a:t>未取得银行/授信合同、按法人可调度现金、逐月预算、保修明细及资产组原始预测，不出具正式信用等级或审计鉴</a:t>
             </a:r>
             <a:endParaRPr lang="en-US" sz="1600" dirty="0"/>
           </a:p>
           <a:p>
             <a:pPr indent="0" marL="0">
+              <a:lnSpc>
+                <a:spcPct val="100000"/>
+              </a:lnSpc>
               <a:buNone/>
             </a:pPr>
             <a:r>
               <a:rPr lang="en-US" sz="1600" dirty="0">
                 <a:solidFill>
-                  <a:srgbClr val="56646C"/>
-                </a:solidFill>
-              </a:rPr>
-              <a:t>取得同产品同范围的数量、单价、并购及汇率桥后，重新判断有机增长与单位经济性。</a:t>
+                  <a:srgbClr val="1F2933"/>
+                </a:solidFill>
+              </a:rPr>
+              <a:t>证。</a:t>
             </a:r>
             <a:endParaRPr lang="en-US" sz="1600" dirty="0"/>
           </a:p>
-        </p:txBody>
-      </p:sp>
-      <p:sp>
-        <p:nvSpPr>
-          <p:cNvPr id="9" name="Shape 6"/>
-          <p:cNvSpPr/>
-          <p:nvPr/>
-        </p:nvSpPr>
-        <p:spPr>
-          <a:xfrm>
-            <a:off x="7955280" y="1508760"/>
-            <a:ext cx="3657600" cy="950976"/>
-          </a:xfrm>
-          <a:prstGeom prst="rect">
-            <a:avLst/>
-          </a:prstGeom>
-          <a:solidFill>
-            <a:srgbClr val="E6EFEC"/>
-          </a:solidFill>
-          <a:ln w="12700">
-            <a:solidFill>
-              <a:srgbClr val="E6EFEC"/>
-            </a:solidFill>
-            <a:prstDash val="solid"/>
-          </a:ln>
-        </p:spPr>
-      </p:sp>
-      <p:sp>
-        <p:nvSpPr>
-          <p:cNvPr id="10" name="Text 7"/>
-          <p:cNvSpPr/>
-          <p:nvPr/>
-        </p:nvSpPr>
-        <p:spPr>
-          <a:xfrm>
-            <a:off x="8138160" y="1591056"/>
-            <a:ext cx="3291840" cy="228600"/>
-          </a:xfrm>
-          <a:prstGeom prst="rect">
-            <a:avLst/>
-          </a:prstGeom>
-          <a:noFill/>
-          <a:ln/>
-        </p:spPr>
-        <p:txBody>
-          <a:bodyPr wrap="square" lIns="0" tIns="0" rIns="0" bIns="0" rtlCol="0" anchor="ctr"/>
-          <a:lstStyle/>
-          <a:p>
-            <a:pPr indent="0" marL="0">
-              <a:buNone/>
-            </a:pPr>
-            <a:r>
-              <a:rPr lang="en-US" sz="1200" dirty="0">
-                <a:solidFill>
-                  <a:srgbClr val="213B45"/>
-                </a:solidFill>
-              </a:rPr>
-              <a:t>营业收入</a:t>
-            </a:r>
-            <a:endParaRPr lang="en-US" sz="1200" dirty="0"/>
-          </a:p>
-        </p:txBody>
-      </p:sp>
-      <p:sp>
-        <p:nvSpPr>
-          <p:cNvPr id="11" name="Text 8"/>
-          <p:cNvSpPr/>
-          <p:nvPr/>
-        </p:nvSpPr>
-        <p:spPr>
-          <a:xfrm>
-            <a:off x="8138160" y="1892808"/>
-            <a:ext cx="3291840" cy="365760"/>
-          </a:xfrm>
-          <a:prstGeom prst="rect">
-            <a:avLst/>
-          </a:prstGeom>
-          <a:noFill/>
-          <a:ln/>
-        </p:spPr>
-        <p:txBody>
-          <a:bodyPr wrap="square" lIns="0" tIns="0" rIns="0" bIns="0" rtlCol="0" anchor="ctr">
-            <a:normAutofit/>
-          </a:bodyPr>
-          <a:lstStyle/>
-          <a:p>
-            <a:pPr indent="0" marL="0">
-              <a:buNone/>
-            </a:pPr>
-            <a:r>
-              <a:rPr lang="en-US" sz="1800" b="1" dirty="0">
-                <a:solidFill>
-                  <a:srgbClr val="237F72"/>
-                </a:solidFill>
-              </a:rPr>
-              <a:t>4,237.02 亿元人民币</a:t>
-            </a:r>
-            <a:endParaRPr lang="en-US" sz="1800" dirty="0"/>
-          </a:p>
-        </p:txBody>
-      </p:sp>
-      <p:sp>
-        <p:nvSpPr>
-          <p:cNvPr id="12" name="Shape 9"/>
-          <p:cNvSpPr/>
-          <p:nvPr/>
-        </p:nvSpPr>
-        <p:spPr>
-          <a:xfrm>
-            <a:off x="7955280" y="2587752"/>
-            <a:ext cx="3657600" cy="950976"/>
-          </a:xfrm>
-          <a:prstGeom prst="rect">
-            <a:avLst/>
-          </a:prstGeom>
-          <a:solidFill>
-            <a:srgbClr val="E6EFEC"/>
-          </a:solidFill>
-          <a:ln w="12700">
-            <a:solidFill>
-              <a:srgbClr val="E6EFEC"/>
-            </a:solidFill>
-            <a:prstDash val="solid"/>
-          </a:ln>
-        </p:spPr>
-      </p:sp>
-      <p:sp>
-        <p:nvSpPr>
-          <p:cNvPr id="13" name="Text 10"/>
-          <p:cNvSpPr/>
-          <p:nvPr/>
-        </p:nvSpPr>
-        <p:spPr>
-          <a:xfrm>
-            <a:off x="8138160" y="2670048"/>
-            <a:ext cx="3291840" cy="228600"/>
-          </a:xfrm>
-          <a:prstGeom prst="rect">
-            <a:avLst/>
-          </a:prstGeom>
-          <a:noFill/>
-          <a:ln/>
-        </p:spPr>
-        <p:txBody>
-          <a:bodyPr wrap="square" lIns="0" tIns="0" rIns="0" bIns="0" rtlCol="0" anchor="ctr"/>
-          <a:lstStyle/>
-          <a:p>
-            <a:pPr indent="0" marL="0">
-              <a:buNone/>
-            </a:pPr>
-            <a:r>
-              <a:rPr lang="en-US" sz="1200" dirty="0">
-                <a:solidFill>
-                  <a:srgbClr val="213B45"/>
-                </a:solidFill>
-              </a:rPr>
-              <a:t>收入同比</a:t>
-            </a:r>
-            <a:endParaRPr lang="en-US" sz="1200" dirty="0"/>
-          </a:p>
-        </p:txBody>
-      </p:sp>
-      <p:sp>
-        <p:nvSpPr>
-          <p:cNvPr id="14" name="Text 11"/>
-          <p:cNvSpPr/>
-          <p:nvPr/>
-        </p:nvSpPr>
-        <p:spPr>
-          <a:xfrm>
-            <a:off x="8138160" y="2971800"/>
-            <a:ext cx="3291840" cy="365760"/>
-          </a:xfrm>
-          <a:prstGeom prst="rect">
-            <a:avLst/>
-          </a:prstGeom>
-          <a:noFill/>
-          <a:ln/>
-        </p:spPr>
-        <p:txBody>
-          <a:bodyPr wrap="square" lIns="0" tIns="0" rIns="0" bIns="0" rtlCol="0" anchor="ctr">
-            <a:normAutofit/>
-          </a:bodyPr>
-          <a:lstStyle/>
-          <a:p>
-            <a:pPr indent="0" marL="0">
-              <a:buNone/>
-            </a:pPr>
-            <a:r>
-              <a:rPr lang="en-US" sz="1800" b="1" dirty="0">
-                <a:solidFill>
-                  <a:srgbClr val="237F72"/>
-                </a:solidFill>
-              </a:rPr>
-              <a:t>17.04%</a:t>
-            </a:r>
-            <a:endParaRPr lang="en-US" sz="1800" dirty="0"/>
-          </a:p>
-        </p:txBody>
-      </p:sp>
-      <p:sp>
-        <p:nvSpPr>
-          <p:cNvPr id="15" name="Shape 12"/>
-          <p:cNvSpPr/>
-          <p:nvPr/>
-        </p:nvSpPr>
-        <p:spPr>
-          <a:xfrm>
-            <a:off x="7955280" y="3666744"/>
-            <a:ext cx="3657600" cy="950976"/>
-          </a:xfrm>
-          <a:prstGeom prst="rect">
-            <a:avLst/>
-          </a:prstGeom>
-          <a:solidFill>
-            <a:srgbClr val="E6EFEC"/>
-          </a:solidFill>
-          <a:ln w="12700">
-            <a:solidFill>
-              <a:srgbClr val="E6EFEC"/>
-            </a:solidFill>
-            <a:prstDash val="solid"/>
-          </a:ln>
-        </p:spPr>
-      </p:sp>
-      <p:sp>
-        <p:nvSpPr>
-          <p:cNvPr id="16" name="Text 13"/>
-          <p:cNvSpPr/>
-          <p:nvPr/>
-        </p:nvSpPr>
-        <p:spPr>
-          <a:xfrm>
-            <a:off x="8138160" y="3749040"/>
-            <a:ext cx="3291840" cy="228600"/>
-          </a:xfrm>
-          <a:prstGeom prst="rect">
-            <a:avLst/>
-          </a:prstGeom>
-          <a:noFill/>
-          <a:ln/>
-        </p:spPr>
-        <p:txBody>
-          <a:bodyPr wrap="square" lIns="0" tIns="0" rIns="0" bIns="0" rtlCol="0" anchor="ctr"/>
-          <a:lstStyle/>
-          <a:p>
-            <a:pPr indent="0" marL="0">
-              <a:buNone/>
-            </a:pPr>
-            <a:r>
-              <a:rPr lang="en-US" sz="1200" dirty="0">
-                <a:solidFill>
-                  <a:srgbClr val="213B45"/>
-                </a:solidFill>
-              </a:rPr>
-              <a:t>动力系统收入同比</a:t>
-            </a:r>
-            <a:endParaRPr lang="en-US" sz="1200" dirty="0"/>
-          </a:p>
-        </p:txBody>
-      </p:sp>
-      <p:sp>
-        <p:nvSpPr>
-          <p:cNvPr id="17" name="Text 14"/>
-          <p:cNvSpPr/>
-          <p:nvPr/>
-        </p:nvSpPr>
-        <p:spPr>
-          <a:xfrm>
-            <a:off x="8138160" y="4050792"/>
-            <a:ext cx="3291840" cy="365760"/>
-          </a:xfrm>
-          <a:prstGeom prst="rect">
-            <a:avLst/>
-          </a:prstGeom>
-          <a:noFill/>
-          <a:ln/>
-        </p:spPr>
-        <p:txBody>
-          <a:bodyPr wrap="square" lIns="0" tIns="0" rIns="0" bIns="0" rtlCol="0" anchor="ctr">
-            <a:normAutofit/>
-          </a:bodyPr>
-          <a:lstStyle/>
-          <a:p>
-            <a:pPr indent="0" marL="0">
-              <a:buNone/>
-            </a:pPr>
-            <a:r>
-              <a:rPr lang="en-US" sz="1800" b="1" dirty="0">
-                <a:solidFill>
-                  <a:srgbClr val="237F72"/>
-                </a:solidFill>
-              </a:rPr>
-              <a:t>25.08%</a:t>
-            </a:r>
-            <a:endParaRPr lang="en-US" sz="1800" dirty="0"/>
-          </a:p>
-        </p:txBody>
-      </p:sp>
-      <p:sp>
-        <p:nvSpPr>
-          <p:cNvPr id="18" name="Shape 15"/>
-          <p:cNvSpPr/>
-          <p:nvPr/>
-        </p:nvSpPr>
-        <p:spPr>
-          <a:xfrm>
-            <a:off x="7955280" y="4745736"/>
-            <a:ext cx="3657600" cy="950976"/>
-          </a:xfrm>
-          <a:prstGeom prst="rect">
-            <a:avLst/>
-          </a:prstGeom>
-          <a:solidFill>
-            <a:srgbClr val="E6EFEC"/>
-          </a:solidFill>
-          <a:ln w="12700">
-            <a:solidFill>
-              <a:srgbClr val="E6EFEC"/>
-            </a:solidFill>
-            <a:prstDash val="solid"/>
-          </a:ln>
-        </p:spPr>
-      </p:sp>
-      <p:sp>
-        <p:nvSpPr>
-          <p:cNvPr id="19" name="Text 16"/>
-          <p:cNvSpPr/>
-          <p:nvPr/>
-        </p:nvSpPr>
-        <p:spPr>
-          <a:xfrm>
-            <a:off x="8138160" y="4828032"/>
-            <a:ext cx="3291840" cy="228600"/>
-          </a:xfrm>
-          <a:prstGeom prst="rect">
-            <a:avLst/>
-          </a:prstGeom>
-          <a:noFill/>
-          <a:ln/>
-        </p:spPr>
-        <p:txBody>
-          <a:bodyPr wrap="square" lIns="0" tIns="0" rIns="0" bIns="0" rtlCol="0" anchor="ctr"/>
-          <a:lstStyle/>
-          <a:p>
-            <a:pPr indent="0" marL="0">
-              <a:buNone/>
-            </a:pPr>
-            <a:r>
-              <a:rPr lang="en-US" sz="1200" dirty="0">
-                <a:solidFill>
-                  <a:srgbClr val="213B45"/>
-                </a:solidFill>
-              </a:rPr>
-              <a:t>销售量同比</a:t>
-            </a:r>
-            <a:endParaRPr lang="en-US" sz="1200" dirty="0"/>
-          </a:p>
-        </p:txBody>
-      </p:sp>
-      <p:sp>
-        <p:nvSpPr>
-          <p:cNvPr id="20" name="Text 17"/>
-          <p:cNvSpPr/>
-          <p:nvPr/>
-        </p:nvSpPr>
-        <p:spPr>
-          <a:xfrm>
-            <a:off x="8138160" y="5129784"/>
-            <a:ext cx="3291840" cy="365760"/>
-          </a:xfrm>
-          <a:prstGeom prst="rect">
-            <a:avLst/>
-          </a:prstGeom>
-          <a:noFill/>
-          <a:ln/>
-        </p:spPr>
-        <p:txBody>
-          <a:bodyPr wrap="square" lIns="0" tIns="0" rIns="0" bIns="0" rtlCol="0" anchor="ctr">
-            <a:normAutofit/>
-          </a:bodyPr>
-          <a:lstStyle/>
-          <a:p>
-            <a:pPr indent="0" marL="0">
-              <a:buNone/>
-            </a:pPr>
-            <a:r>
-              <a:rPr lang="en-US" sz="1800" b="1" dirty="0">
-                <a:solidFill>
-                  <a:srgbClr val="237F72"/>
-                </a:solidFill>
-              </a:rPr>
-              <a:t>39.16%</a:t>
-            </a:r>
-            <a:endParaRPr lang="en-US" sz="1800" dirty="0"/>
-          </a:p>
-        </p:txBody>
-      </p:sp>
-      <p:sp>
-        <p:nvSpPr>
-          <p:cNvPr id="21" name="Text 18"/>
-          <p:cNvSpPr/>
-          <p:nvPr/>
-        </p:nvSpPr>
-        <p:spPr>
-          <a:xfrm>
-            <a:off x="594360" y="6007608"/>
-            <a:ext cx="10972800" cy="274320"/>
-          </a:xfrm>
-          <a:prstGeom prst="rect">
-            <a:avLst/>
-          </a:prstGeom>
-          <a:noFill/>
-          <a:ln/>
-        </p:spPr>
-        <p:txBody>
-          <a:bodyPr wrap="square" lIns="0" tIns="0" rIns="0" bIns="0" rtlCol="0" anchor="ctr">
-            <a:normAutofit/>
-          </a:bodyPr>
-          <a:lstStyle/>
-          <a:p>
-            <a:pPr indent="0" marL="0">
-              <a:buNone/>
-            </a:pPr>
-            <a:r>
-              <a:rPr lang="en-US" sz="900" dirty="0">
-                <a:solidFill>
-                  <a:srgbClr val="586874"/>
-                </a:solidFill>
-              </a:rPr>
-              <a:t>来源记录 E_PL / E_BIZ / revenue_growth / volume_growth；完整位置见报告与底稿</a:t>
-            </a:r>
-            <a:endParaRPr lang="en-US" sz="900" dirty="0"/>
+          <a:p>
+            <a:pPr indent="0" marL="0">
+              <a:lnSpc>
+                <a:spcPct val="100000"/>
+              </a:lnSpc>
+              <a:buNone/>
+            </a:pPr>
+            <a:endParaRPr lang="en-US" sz="1600" dirty="0"/>
+          </a:p>
+          <a:p>
+            <a:pPr indent="0" marL="0">
+              <a:lnSpc>
+                <a:spcPct val="100000"/>
+              </a:lnSpc>
+              <a:buNone/>
+            </a:pPr>
+            <a:r>
+              <a:rPr lang="en-US" sz="1600" dirty="0">
+                <a:solidFill>
+                  <a:srgbClr val="1F2933"/>
+                </a:solidFill>
+              </a:rPr>
+              <a:t>事实以2026年3月10日已公开的2025年报为界；假设与实际披露分列。</a:t>
+            </a:r>
+            <a:endParaRPr lang="en-US" sz="1600" dirty="0"/>
           </a:p>
         </p:txBody>
       </p:sp>
@@ -2565,10 +2614,13 @@
           <a:ln/>
         </p:spPr>
         <p:txBody>
-          <a:bodyPr wrap="square" lIns="0" tIns="0" rIns="0" bIns="0" rtlCol="0" anchor="ctr"/>
-          <a:lstStyle/>
-          <a:p>
-            <a:pPr indent="0" marL="0">
+          <a:bodyPr wrap="square" lIns="0" tIns="0" rIns="0" bIns="0" rtlCol="0" anchor="t"/>
+          <a:lstStyle/>
+          <a:p>
+            <a:pPr indent="0" marL="0">
+              <a:lnSpc>
+                <a:spcPct val="100000"/>
+              </a:lnSpc>
               <a:buNone/>
             </a:pPr>
             <a:r>
@@ -2577,7 +2629,7 @@
                   <a:srgbClr val="213B45"/>
                 </a:solidFill>
               </a:rPr>
-              <a:t>利润与经营现金质量</a:t>
+              <a:t>业务增长与量价结构</a:t>
             </a:r>
             <a:endParaRPr lang="en-US" sz="2700" dirty="0"/>
           </a:p>
@@ -2651,19 +2703,22 @@
         <p:spPr>
           <a:xfrm>
             <a:off x="594360" y="1444752"/>
-            <a:ext cx="6995160" cy="685800"/>
-          </a:xfrm>
-          <a:prstGeom prst="rect">
-            <a:avLst/>
-          </a:prstGeom>
-          <a:noFill/>
-          <a:ln/>
-        </p:spPr>
-        <p:txBody>
-          <a:bodyPr wrap="square" lIns="0" tIns="0" rIns="0" bIns="0" rtlCol="0" anchor="ctr"/>
-          <a:lstStyle/>
-          <a:p>
-            <a:pPr indent="0" marL="0">
+            <a:ext cx="6995160" cy="1005840"/>
+          </a:xfrm>
+          <a:prstGeom prst="rect">
+            <a:avLst/>
+          </a:prstGeom>
+          <a:noFill/>
+          <a:ln/>
+        </p:spPr>
+        <p:txBody>
+          <a:bodyPr wrap="square" lIns="0" tIns="0" rIns="0" bIns="0" rtlCol="0" anchor="t"/>
+          <a:lstStyle/>
+          <a:p>
+            <a:pPr indent="0" marL="0">
+              <a:lnSpc>
+                <a:spcPct val="100000"/>
+              </a:lnSpc>
               <a:buNone/>
             </a:pPr>
             <a:r>
@@ -2672,7 +2727,7 @@
                   <a:srgbClr val="213B45"/>
                 </a:solidFill>
               </a:rPr>
-              <a:t>现金表现强但依赖经营负债提供资金</a:t>
+              <a:t>增长集中于动力电池且需要解释量价结构</a:t>
             </a:r>
             <a:endParaRPr lang="en-US" sz="2200" dirty="0"/>
           </a:p>
@@ -2686,91 +2741,117 @@
         </p:nvSpPr>
         <p:spPr>
           <a:xfrm>
-            <a:off x="594360" y="2331720"/>
-            <a:ext cx="6995160" cy="1828800"/>
-          </a:xfrm>
-          <a:prstGeom prst="rect">
-            <a:avLst/>
-          </a:prstGeom>
-          <a:noFill/>
-          <a:ln/>
-        </p:spPr>
-        <p:txBody>
-          <a:bodyPr wrap="square" lIns="0" tIns="0" rIns="0" bIns="0" rtlCol="0" anchor="ctr">
-            <a:normAutofit/>
-          </a:bodyPr>
-          <a:lstStyle/>
-          <a:p>
-            <a:pPr indent="0" marL="0">
-              <a:buNone/>
-            </a:pPr>
-            <a:r>
-              <a:rPr lang="en-US" sz="1900" dirty="0">
+            <a:off x="594360" y="2624328"/>
+            <a:ext cx="6995160" cy="3063240"/>
+          </a:xfrm>
+          <a:prstGeom prst="rect">
+            <a:avLst/>
+          </a:prstGeom>
+          <a:noFill/>
+          <a:ln/>
+        </p:spPr>
+        <p:txBody>
+          <a:bodyPr wrap="square" lIns="0" tIns="0" rIns="0" bIns="0" rtlCol="0" anchor="t"/>
+          <a:lstStyle/>
+          <a:p>
+            <a:pPr indent="0" marL="0">
+              <a:lnSpc>
+                <a:spcPct val="100000"/>
+              </a:lnSpc>
+              <a:buNone/>
+            </a:pPr>
+            <a:r>
+              <a:rPr lang="en-US" sz="1800" dirty="0">
                 <a:solidFill>
                   <a:srgbClr val="1F2933"/>
                 </a:solidFill>
               </a:rPr>
-              <a:t>CFO为1,332.20 亿元人民币，与总净利润之比173.49%；营运资本三项合计贡献332.16 亿元人民币。</a:t>
-            </a:r>
-            <a:endParaRPr lang="en-US" sz="1900" dirty="0"/>
-          </a:p>
-        </p:txBody>
-      </p:sp>
-      <p:sp>
-        <p:nvSpPr>
-          <p:cNvPr id="7" name="Text 5"/>
-          <p:cNvSpPr/>
-          <p:nvPr/>
-        </p:nvSpPr>
-        <p:spPr>
-          <a:xfrm>
-            <a:off x="594360" y="4434840"/>
-            <a:ext cx="6995160" cy="1325880"/>
-          </a:xfrm>
-          <a:prstGeom prst="rect">
-            <a:avLst/>
-          </a:prstGeom>
-          <a:noFill/>
-          <a:ln/>
-        </p:spPr>
-        <p:txBody>
-          <a:bodyPr wrap="square" lIns="0" tIns="0" rIns="0" bIns="0" rtlCol="0" anchor="ctr">
-            <a:normAutofit/>
-          </a:bodyPr>
-          <a:lstStyle/>
-          <a:p>
-            <a:pPr indent="0" marL="0">
-              <a:buNone/>
-            </a:pPr>
-            <a:r>
-              <a:rPr lang="en-US" sz="1600" dirty="0">
-                <a:solidFill>
-                  <a:srgbClr val="56646C"/>
+              <a:t>收入增长17.04%，动力系统增长25.08%，储能增长</a:t>
+            </a:r>
+            <a:endParaRPr lang="en-US" sz="1800" dirty="0"/>
+          </a:p>
+          <a:p>
+            <a:pPr indent="0" marL="0">
+              <a:lnSpc>
+                <a:spcPct val="100000"/>
+              </a:lnSpc>
+              <a:buNone/>
+            </a:pPr>
+            <a:r>
+              <a:rPr lang="en-US" sz="1800" dirty="0">
+                <a:solidFill>
+                  <a:srgbClr val="1F2933"/>
+                </a:solidFill>
+              </a:rPr>
+              <a:t>8.99%，材料回收同比-23.83%。</a:t>
+            </a:r>
+            <a:endParaRPr lang="en-US" sz="1800" dirty="0"/>
+          </a:p>
+          <a:p>
+            <a:pPr indent="0" marL="0">
+              <a:lnSpc>
+                <a:spcPct val="100000"/>
+              </a:lnSpc>
+              <a:buNone/>
+            </a:pPr>
+            <a:endParaRPr lang="en-US" sz="1800" dirty="0"/>
+          </a:p>
+          <a:p>
+            <a:pPr indent="0" marL="0">
+              <a:lnSpc>
+                <a:spcPct val="100000"/>
+              </a:lnSpc>
+              <a:buNone/>
+            </a:pPr>
+            <a:r>
+              <a:rPr lang="en-US" sz="1800" dirty="0">
+                <a:solidFill>
+                  <a:srgbClr val="1F2933"/>
                 </a:solidFill>
               </a:rPr>
               <a:t>判断改变条件</a:t>
             </a:r>
-            <a:endParaRPr lang="en-US" sz="1600" dirty="0"/>
-          </a:p>
-          <a:p>
-            <a:pPr indent="0" marL="0">
-              <a:buNone/>
-            </a:pPr>
-            <a:r>
-              <a:rPr lang="en-US" sz="1600" dirty="0">
-                <a:solidFill>
-                  <a:srgbClr val="56646C"/>
-                </a:solidFill>
-              </a:rPr>
-              <a:t>逐月回款付款、客户预收和供应商账期桥显示资金贡献不可持续时，下调可持续现金假设。</a:t>
-            </a:r>
-            <a:endParaRPr lang="en-US" sz="1600" dirty="0"/>
-          </a:p>
-        </p:txBody>
-      </p:sp>
-      <p:sp>
-        <p:nvSpPr>
-          <p:cNvPr id="9" name="Shape 6"/>
+            <a:endParaRPr lang="en-US" sz="1800" dirty="0"/>
+          </a:p>
+          <a:p>
+            <a:pPr indent="0" marL="0">
+              <a:lnSpc>
+                <a:spcPct val="100000"/>
+              </a:lnSpc>
+              <a:buNone/>
+            </a:pPr>
+            <a:r>
+              <a:rPr lang="en-US" sz="1800" dirty="0">
+                <a:solidFill>
+                  <a:srgbClr val="1F2933"/>
+                </a:solidFill>
+              </a:rPr>
+              <a:t>取得同产品同范围的数量、单价、并购及汇率桥后，重新判断有机</a:t>
+            </a:r>
+            <a:endParaRPr lang="en-US" sz="1800" dirty="0"/>
+          </a:p>
+          <a:p>
+            <a:pPr indent="0" marL="0">
+              <a:lnSpc>
+                <a:spcPct val="100000"/>
+              </a:lnSpc>
+              <a:buNone/>
+            </a:pPr>
+            <a:r>
+              <a:rPr lang="en-US" sz="1800" dirty="0">
+                <a:solidFill>
+                  <a:srgbClr val="1F2933"/>
+                </a:solidFill>
+              </a:rPr>
+              <a:t>增长与单位经济性。</a:t>
+            </a:r>
+            <a:endParaRPr lang="en-US" sz="1800" dirty="0"/>
+          </a:p>
+        </p:txBody>
+      </p:sp>
+      <p:sp>
+        <p:nvSpPr>
+          <p:cNvPr id="8" name="Shape 5"/>
           <p:cNvSpPr/>
           <p:nvPr/>
         </p:nvSpPr>
@@ -2795,81 +2876,85 @@
       </p:sp>
       <p:sp>
         <p:nvSpPr>
+          <p:cNvPr id="9" name="Text 6"/>
+          <p:cNvSpPr/>
+          <p:nvPr/>
+        </p:nvSpPr>
+        <p:spPr>
+          <a:xfrm>
+            <a:off x="8138160" y="1591056"/>
+            <a:ext cx="3291840" cy="274320"/>
+          </a:xfrm>
+          <a:prstGeom prst="rect">
+            <a:avLst/>
+          </a:prstGeom>
+          <a:noFill/>
+          <a:ln/>
+        </p:spPr>
+        <p:txBody>
+          <a:bodyPr wrap="square" lIns="0" tIns="0" rIns="0" bIns="0" rtlCol="0" anchor="t"/>
+          <a:lstStyle/>
+          <a:p>
+            <a:pPr indent="0" marL="0">
+              <a:lnSpc>
+                <a:spcPct val="100000"/>
+              </a:lnSpc>
+              <a:buNone/>
+            </a:pPr>
+            <a:r>
+              <a:rPr lang="en-US" sz="1200" dirty="0">
+                <a:solidFill>
+                  <a:srgbClr val="213B45"/>
+                </a:solidFill>
+              </a:rPr>
+              <a:t>营业收入</a:t>
+            </a:r>
+            <a:endParaRPr lang="en-US" sz="1200" dirty="0"/>
+          </a:p>
+        </p:txBody>
+      </p:sp>
+      <p:sp>
+        <p:nvSpPr>
           <p:cNvPr id="10" name="Text 7"/>
           <p:cNvSpPr/>
           <p:nvPr/>
         </p:nvSpPr>
         <p:spPr>
           <a:xfrm>
-            <a:off x="8138160" y="1591056"/>
-            <a:ext cx="3291840" cy="228600"/>
-          </a:xfrm>
-          <a:prstGeom prst="rect">
-            <a:avLst/>
-          </a:prstGeom>
-          <a:noFill/>
-          <a:ln/>
-        </p:spPr>
-        <p:txBody>
-          <a:bodyPr wrap="square" lIns="0" tIns="0" rIns="0" bIns="0" rtlCol="0" anchor="ctr"/>
-          <a:lstStyle/>
-          <a:p>
-            <a:pPr indent="0" marL="0">
-              <a:buNone/>
-            </a:pPr>
-            <a:r>
-              <a:rPr lang="en-US" sz="1200" dirty="0">
-                <a:solidFill>
-                  <a:srgbClr val="213B45"/>
-                </a:solidFill>
-              </a:rPr>
-              <a:t>经营活动现金净额</a:t>
-            </a:r>
-            <a:endParaRPr lang="en-US" sz="1200" dirty="0"/>
-          </a:p>
-        </p:txBody>
-      </p:sp>
-      <p:sp>
-        <p:nvSpPr>
-          <p:cNvPr id="11" name="Text 8"/>
-          <p:cNvSpPr/>
-          <p:nvPr/>
-        </p:nvSpPr>
-        <p:spPr>
-          <a:xfrm>
-            <a:off x="8138160" y="1892808"/>
-            <a:ext cx="3291840" cy="365760"/>
-          </a:xfrm>
-          <a:prstGeom prst="rect">
-            <a:avLst/>
-          </a:prstGeom>
-          <a:noFill/>
-          <a:ln/>
-        </p:spPr>
-        <p:txBody>
-          <a:bodyPr wrap="square" lIns="0" tIns="0" rIns="0" bIns="0" rtlCol="0" anchor="ctr">
-            <a:normAutofit/>
-          </a:bodyPr>
-          <a:lstStyle/>
-          <a:p>
-            <a:pPr indent="0" marL="0">
-              <a:buNone/>
-            </a:pPr>
-            <a:r>
-              <a:rPr lang="en-US" sz="1800" b="1" dirty="0">
+            <a:off x="8138160" y="1956816"/>
+            <a:ext cx="3291840" cy="393192"/>
+          </a:xfrm>
+          <a:prstGeom prst="rect">
+            <a:avLst/>
+          </a:prstGeom>
+          <a:noFill/>
+          <a:ln/>
+        </p:spPr>
+        <p:txBody>
+          <a:bodyPr wrap="square" lIns="0" tIns="0" rIns="0" bIns="0" rtlCol="0" anchor="t"/>
+          <a:lstStyle/>
+          <a:p>
+            <a:pPr indent="0" marL="0">
+              <a:lnSpc>
+                <a:spcPct val="100000"/>
+              </a:lnSpc>
+              <a:buNone/>
+            </a:pPr>
+            <a:r>
+              <a:rPr lang="en-US" sz="1700" b="1" dirty="0">
                 <a:solidFill>
                   <a:srgbClr val="237F72"/>
                 </a:solidFill>
               </a:rPr>
-              <a:t>1,332.20 亿元人民币</a:t>
-            </a:r>
-            <a:endParaRPr lang="en-US" sz="1800" dirty="0"/>
-          </a:p>
-        </p:txBody>
-      </p:sp>
-      <p:sp>
-        <p:nvSpPr>
-          <p:cNvPr id="12" name="Shape 9"/>
+              <a:t>4,237.02 亿元人民币</a:t>
+            </a:r>
+            <a:endParaRPr lang="en-US" sz="1700" dirty="0"/>
+          </a:p>
+        </p:txBody>
+      </p:sp>
+      <p:sp>
+        <p:nvSpPr>
+          <p:cNvPr id="11" name="Shape 8"/>
           <p:cNvSpPr/>
           <p:nvPr/>
         </p:nvSpPr>
@@ -2894,64 +2979,68 @@
       </p:sp>
       <p:sp>
         <p:nvSpPr>
+          <p:cNvPr id="12" name="Text 9"/>
+          <p:cNvSpPr/>
+          <p:nvPr/>
+        </p:nvSpPr>
+        <p:spPr>
+          <a:xfrm>
+            <a:off x="8138160" y="2670048"/>
+            <a:ext cx="3291840" cy="274320"/>
+          </a:xfrm>
+          <a:prstGeom prst="rect">
+            <a:avLst/>
+          </a:prstGeom>
+          <a:noFill/>
+          <a:ln/>
+        </p:spPr>
+        <p:txBody>
+          <a:bodyPr wrap="square" lIns="0" tIns="0" rIns="0" bIns="0" rtlCol="0" anchor="t"/>
+          <a:lstStyle/>
+          <a:p>
+            <a:pPr indent="0" marL="0">
+              <a:lnSpc>
+                <a:spcPct val="100000"/>
+              </a:lnSpc>
+              <a:buNone/>
+            </a:pPr>
+            <a:r>
+              <a:rPr lang="en-US" sz="1200" dirty="0">
+                <a:solidFill>
+                  <a:srgbClr val="213B45"/>
+                </a:solidFill>
+              </a:rPr>
+              <a:t>收入同比</a:t>
+            </a:r>
+            <a:endParaRPr lang="en-US" sz="1200" dirty="0"/>
+          </a:p>
+        </p:txBody>
+      </p:sp>
+      <p:sp>
+        <p:nvSpPr>
           <p:cNvPr id="13" name="Text 10"/>
           <p:cNvSpPr/>
           <p:nvPr/>
         </p:nvSpPr>
         <p:spPr>
           <a:xfrm>
-            <a:off x="8138160" y="2670048"/>
-            <a:ext cx="3291840" cy="228600"/>
-          </a:xfrm>
-          <a:prstGeom prst="rect">
-            <a:avLst/>
-          </a:prstGeom>
-          <a:noFill/>
-          <a:ln/>
-        </p:spPr>
-        <p:txBody>
-          <a:bodyPr wrap="square" lIns="0" tIns="0" rIns="0" bIns="0" rtlCol="0" anchor="ctr"/>
-          <a:lstStyle/>
-          <a:p>
-            <a:pPr indent="0" marL="0">
-              <a:buNone/>
-            </a:pPr>
-            <a:r>
-              <a:rPr lang="en-US" sz="1200" dirty="0">
-                <a:solidFill>
-                  <a:srgbClr val="213B45"/>
-                </a:solidFill>
-              </a:rPr>
-              <a:t>CFO与合并净利润之比</a:t>
-            </a:r>
-            <a:endParaRPr lang="en-US" sz="1200" dirty="0"/>
-          </a:p>
-        </p:txBody>
-      </p:sp>
-      <p:sp>
-        <p:nvSpPr>
-          <p:cNvPr id="14" name="Text 11"/>
-          <p:cNvSpPr/>
-          <p:nvPr/>
-        </p:nvSpPr>
-        <p:spPr>
-          <a:xfrm>
-            <a:off x="8138160" y="2971800"/>
-            <a:ext cx="3291840" cy="365760"/>
-          </a:xfrm>
-          <a:prstGeom prst="rect">
-            <a:avLst/>
-          </a:prstGeom>
-          <a:noFill/>
-          <a:ln/>
-        </p:spPr>
-        <p:txBody>
-          <a:bodyPr wrap="square" lIns="0" tIns="0" rIns="0" bIns="0" rtlCol="0" anchor="ctr">
-            <a:normAutofit/>
-          </a:bodyPr>
-          <a:lstStyle/>
-          <a:p>
-            <a:pPr indent="0" marL="0">
+            <a:off x="8138160" y="3035808"/>
+            <a:ext cx="3291840" cy="393192"/>
+          </a:xfrm>
+          <a:prstGeom prst="rect">
+            <a:avLst/>
+          </a:prstGeom>
+          <a:noFill/>
+          <a:ln/>
+        </p:spPr>
+        <p:txBody>
+          <a:bodyPr wrap="square" lIns="0" tIns="0" rIns="0" bIns="0" rtlCol="0" anchor="t"/>
+          <a:lstStyle/>
+          <a:p>
+            <a:pPr indent="0" marL="0">
+              <a:lnSpc>
+                <a:spcPct val="100000"/>
+              </a:lnSpc>
               <a:buNone/>
             </a:pPr>
             <a:r>
@@ -2960,7 +3049,7 @@
                   <a:srgbClr val="237F72"/>
                 </a:solidFill>
               </a:rPr>
-              <a:t>173.49%</a:t>
+              <a:t>17.04%</a:t>
             </a:r>
             <a:endParaRPr lang="en-US" sz="1800" dirty="0"/>
           </a:p>
@@ -2968,7 +3057,7 @@
       </p:sp>
       <p:sp>
         <p:nvSpPr>
-          <p:cNvPr id="15" name="Shape 12"/>
+          <p:cNvPr id="14" name="Shape 11"/>
           <p:cNvSpPr/>
           <p:nvPr/>
         </p:nvSpPr>
@@ -2993,64 +3082,68 @@
       </p:sp>
       <p:sp>
         <p:nvSpPr>
+          <p:cNvPr id="15" name="Text 12"/>
+          <p:cNvSpPr/>
+          <p:nvPr/>
+        </p:nvSpPr>
+        <p:spPr>
+          <a:xfrm>
+            <a:off x="8138160" y="3749040"/>
+            <a:ext cx="3291840" cy="274320"/>
+          </a:xfrm>
+          <a:prstGeom prst="rect">
+            <a:avLst/>
+          </a:prstGeom>
+          <a:noFill/>
+          <a:ln/>
+        </p:spPr>
+        <p:txBody>
+          <a:bodyPr wrap="square" lIns="0" tIns="0" rIns="0" bIns="0" rtlCol="0" anchor="t"/>
+          <a:lstStyle/>
+          <a:p>
+            <a:pPr indent="0" marL="0">
+              <a:lnSpc>
+                <a:spcPct val="100000"/>
+              </a:lnSpc>
+              <a:buNone/>
+            </a:pPr>
+            <a:r>
+              <a:rPr lang="en-US" sz="1200" dirty="0">
+                <a:solidFill>
+                  <a:srgbClr val="213B45"/>
+                </a:solidFill>
+              </a:rPr>
+              <a:t>动力系统收入同比</a:t>
+            </a:r>
+            <a:endParaRPr lang="en-US" sz="1200" dirty="0"/>
+          </a:p>
+        </p:txBody>
+      </p:sp>
+      <p:sp>
+        <p:nvSpPr>
           <p:cNvPr id="16" name="Text 13"/>
           <p:cNvSpPr/>
           <p:nvPr/>
         </p:nvSpPr>
         <p:spPr>
           <a:xfrm>
-            <a:off x="8138160" y="3749040"/>
-            <a:ext cx="3291840" cy="228600"/>
-          </a:xfrm>
-          <a:prstGeom prst="rect">
-            <a:avLst/>
-          </a:prstGeom>
-          <a:noFill/>
-          <a:ln/>
-        </p:spPr>
-        <p:txBody>
-          <a:bodyPr wrap="square" lIns="0" tIns="0" rIns="0" bIns="0" rtlCol="0" anchor="ctr"/>
-          <a:lstStyle/>
-          <a:p>
-            <a:pPr indent="0" marL="0">
-              <a:buNone/>
-            </a:pPr>
-            <a:r>
-              <a:rPr lang="en-US" sz="1200" dirty="0">
-                <a:solidFill>
-                  <a:srgbClr val="213B45"/>
-                </a:solidFill>
-              </a:rPr>
-              <a:t>经营营运资本现金净贡献</a:t>
-            </a:r>
-            <a:endParaRPr lang="en-US" sz="1200" dirty="0"/>
-          </a:p>
-        </p:txBody>
-      </p:sp>
-      <p:sp>
-        <p:nvSpPr>
-          <p:cNvPr id="17" name="Text 14"/>
-          <p:cNvSpPr/>
-          <p:nvPr/>
-        </p:nvSpPr>
-        <p:spPr>
-          <a:xfrm>
-            <a:off x="8138160" y="4050792"/>
-            <a:ext cx="3291840" cy="365760"/>
-          </a:xfrm>
-          <a:prstGeom prst="rect">
-            <a:avLst/>
-          </a:prstGeom>
-          <a:noFill/>
-          <a:ln/>
-        </p:spPr>
-        <p:txBody>
-          <a:bodyPr wrap="square" lIns="0" tIns="0" rIns="0" bIns="0" rtlCol="0" anchor="ctr">
-            <a:normAutofit/>
-          </a:bodyPr>
-          <a:lstStyle/>
-          <a:p>
-            <a:pPr indent="0" marL="0">
+            <a:off x="8138160" y="4114800"/>
+            <a:ext cx="3291840" cy="393192"/>
+          </a:xfrm>
+          <a:prstGeom prst="rect">
+            <a:avLst/>
+          </a:prstGeom>
+          <a:noFill/>
+          <a:ln/>
+        </p:spPr>
+        <p:txBody>
+          <a:bodyPr wrap="square" lIns="0" tIns="0" rIns="0" bIns="0" rtlCol="0" anchor="t"/>
+          <a:lstStyle/>
+          <a:p>
+            <a:pPr indent="0" marL="0">
+              <a:lnSpc>
+                <a:spcPct val="100000"/>
+              </a:lnSpc>
               <a:buNone/>
             </a:pPr>
             <a:r>
@@ -3059,7 +3152,7 @@
                   <a:srgbClr val="237F72"/>
                 </a:solidFill>
               </a:rPr>
-              <a:t>332.16 亿元人民币</a:t>
+              <a:t>25.08%</a:t>
             </a:r>
             <a:endParaRPr lang="en-US" sz="1800" dirty="0"/>
           </a:p>
@@ -3067,7 +3160,7 @@
       </p:sp>
       <p:sp>
         <p:nvSpPr>
-          <p:cNvPr id="18" name="Shape 15"/>
+          <p:cNvPr id="17" name="Shape 14"/>
           <p:cNvSpPr/>
           <p:nvPr/>
         </p:nvSpPr>
@@ -3092,81 +3185,85 @@
       </p:sp>
       <p:sp>
         <p:nvSpPr>
+          <p:cNvPr id="18" name="Text 15"/>
+          <p:cNvSpPr/>
+          <p:nvPr/>
+        </p:nvSpPr>
+        <p:spPr>
+          <a:xfrm>
+            <a:off x="8138160" y="4828032"/>
+            <a:ext cx="3291840" cy="274320"/>
+          </a:xfrm>
+          <a:prstGeom prst="rect">
+            <a:avLst/>
+          </a:prstGeom>
+          <a:noFill/>
+          <a:ln/>
+        </p:spPr>
+        <p:txBody>
+          <a:bodyPr wrap="square" lIns="0" tIns="0" rIns="0" bIns="0" rtlCol="0" anchor="t"/>
+          <a:lstStyle/>
+          <a:p>
+            <a:pPr indent="0" marL="0">
+              <a:lnSpc>
+                <a:spcPct val="100000"/>
+              </a:lnSpc>
+              <a:buNone/>
+            </a:pPr>
+            <a:r>
+              <a:rPr lang="en-US" sz="1200" dirty="0">
+                <a:solidFill>
+                  <a:srgbClr val="213B45"/>
+                </a:solidFill>
+              </a:rPr>
+              <a:t>销售量同比</a:t>
+            </a:r>
+            <a:endParaRPr lang="en-US" sz="1200" dirty="0"/>
+          </a:p>
+        </p:txBody>
+      </p:sp>
+      <p:sp>
+        <p:nvSpPr>
           <p:cNvPr id="19" name="Text 16"/>
           <p:cNvSpPr/>
           <p:nvPr/>
         </p:nvSpPr>
         <p:spPr>
           <a:xfrm>
-            <a:off x="8138160" y="4828032"/>
-            <a:ext cx="3291840" cy="228600"/>
-          </a:xfrm>
-          <a:prstGeom prst="rect">
-            <a:avLst/>
-          </a:prstGeom>
-          <a:noFill/>
-          <a:ln/>
-        </p:spPr>
-        <p:txBody>
-          <a:bodyPr wrap="square" lIns="0" tIns="0" rIns="0" bIns="0" rtlCol="0" anchor="ctr"/>
-          <a:lstStyle/>
-          <a:p>
-            <a:pPr indent="0" marL="0">
-              <a:buNone/>
-            </a:pPr>
-            <a:r>
-              <a:rPr lang="en-US" sz="1200" dirty="0">
-                <a:solidFill>
-                  <a:srgbClr val="213B45"/>
-                </a:solidFill>
-              </a:rPr>
-              <a:t>CFO减购建长期资产现金</a:t>
-            </a:r>
-            <a:endParaRPr lang="en-US" sz="1200" dirty="0"/>
+            <a:off x="8138160" y="5193792"/>
+            <a:ext cx="3291840" cy="393192"/>
+          </a:xfrm>
+          <a:prstGeom prst="rect">
+            <a:avLst/>
+          </a:prstGeom>
+          <a:noFill/>
+          <a:ln/>
+        </p:spPr>
+        <p:txBody>
+          <a:bodyPr wrap="square" lIns="0" tIns="0" rIns="0" bIns="0" rtlCol="0" anchor="t"/>
+          <a:lstStyle/>
+          <a:p>
+            <a:pPr indent="0" marL="0">
+              <a:lnSpc>
+                <a:spcPct val="100000"/>
+              </a:lnSpc>
+              <a:buNone/>
+            </a:pPr>
+            <a:r>
+              <a:rPr lang="en-US" sz="1800" b="1" dirty="0">
+                <a:solidFill>
+                  <a:srgbClr val="237F72"/>
+                </a:solidFill>
+              </a:rPr>
+              <a:t>39.16%</a:t>
+            </a:r>
+            <a:endParaRPr lang="en-US" sz="1800" dirty="0"/>
           </a:p>
         </p:txBody>
       </p:sp>
       <p:sp>
         <p:nvSpPr>
           <p:cNvPr id="20" name="Text 17"/>
-          <p:cNvSpPr/>
-          <p:nvPr/>
-        </p:nvSpPr>
-        <p:spPr>
-          <a:xfrm>
-            <a:off x="8138160" y="5129784"/>
-            <a:ext cx="3291840" cy="365760"/>
-          </a:xfrm>
-          <a:prstGeom prst="rect">
-            <a:avLst/>
-          </a:prstGeom>
-          <a:noFill/>
-          <a:ln/>
-        </p:spPr>
-        <p:txBody>
-          <a:bodyPr wrap="square" lIns="0" tIns="0" rIns="0" bIns="0" rtlCol="0" anchor="ctr">
-            <a:normAutofit/>
-          </a:bodyPr>
-          <a:lstStyle/>
-          <a:p>
-            <a:pPr indent="0" marL="0">
-              <a:buNone/>
-            </a:pPr>
-            <a:r>
-              <a:rPr lang="en-US" sz="1800" b="1" dirty="0">
-                <a:solidFill>
-                  <a:srgbClr val="237F72"/>
-                </a:solidFill>
-              </a:rPr>
-              <a:t>908.75 亿元人民币</a:t>
-            </a:r>
-            <a:endParaRPr lang="en-US" sz="1800" dirty="0"/>
-          </a:p>
-        </p:txBody>
-      </p:sp>
-      <p:sp>
-        <p:nvSpPr>
-          <p:cNvPr id="21" name="Text 18"/>
           <p:cNvSpPr/>
           <p:nvPr/>
         </p:nvSpPr>
@@ -3182,12 +3279,13 @@
           <a:ln/>
         </p:spPr>
         <p:txBody>
-          <a:bodyPr wrap="square" lIns="0" tIns="0" rIns="0" bIns="0" rtlCol="0" anchor="ctr">
-            <a:normAutofit/>
-          </a:bodyPr>
-          <a:lstStyle/>
-          <a:p>
-            <a:pPr indent="0" marL="0">
+          <a:bodyPr wrap="square" lIns="0" tIns="0" rIns="0" bIns="0" rtlCol="0" anchor="t"/>
+          <a:lstStyle/>
+          <a:p>
+            <a:pPr indent="0" marL="0">
+              <a:lnSpc>
+                <a:spcPct val="100000"/>
+              </a:lnSpc>
               <a:buNone/>
             </a:pPr>
             <a:r>
@@ -3196,7 +3294,7 @@
                   <a:srgbClr val="586874"/>
                 </a:solidFill>
               </a:rPr>
-              <a:t>来源记录 E_CF / E_BRIDGE / cfo_bridge / working_capital_effect / fcf_simple；完整位置见报告与底稿</a:t>
+              <a:t>来源记录 E_PL / E_BIZ / revenue_growth 等；全部来源及位置见报告、底稿与备注</a:t>
             </a:r>
             <a:endParaRPr lang="en-US" sz="900" dirty="0"/>
           </a:p>
@@ -3252,10 +3350,13 @@
           <a:ln/>
         </p:spPr>
         <p:txBody>
-          <a:bodyPr wrap="square" lIns="0" tIns="0" rIns="0" bIns="0" rtlCol="0" anchor="ctr"/>
-          <a:lstStyle/>
-          <a:p>
-            <a:pPr indent="0" marL="0">
+          <a:bodyPr wrap="square" lIns="0" tIns="0" rIns="0" bIns="0" rtlCol="0" anchor="t"/>
+          <a:lstStyle/>
+          <a:p>
+            <a:pPr indent="0" marL="0">
+              <a:lnSpc>
+                <a:spcPct val="100000"/>
+              </a:lnSpc>
               <a:buNone/>
             </a:pPr>
             <a:r>
@@ -3264,7 +3365,7 @@
                   <a:srgbClr val="213B45"/>
                 </a:solidFill>
               </a:rPr>
-              <a:t>供应商融资与债务口径</a:t>
+              <a:t>利润与经营现金质量</a:t>
             </a:r>
             <a:endParaRPr lang="en-US" sz="2700" dirty="0"/>
           </a:p>
@@ -3338,19 +3439,22 @@
         <p:spPr>
           <a:xfrm>
             <a:off x="594360" y="1444752"/>
-            <a:ext cx="6995160" cy="685800"/>
-          </a:xfrm>
-          <a:prstGeom prst="rect">
-            <a:avLst/>
-          </a:prstGeom>
-          <a:noFill/>
-          <a:ln/>
-        </p:spPr>
-        <p:txBody>
-          <a:bodyPr wrap="square" lIns="0" tIns="0" rIns="0" bIns="0" rtlCol="0" anchor="ctr"/>
-          <a:lstStyle/>
-          <a:p>
-            <a:pPr indent="0" marL="0">
+            <a:ext cx="6995160" cy="1005840"/>
+          </a:xfrm>
+          <a:prstGeom prst="rect">
+            <a:avLst/>
+          </a:prstGeom>
+          <a:noFill/>
+          <a:ln/>
+        </p:spPr>
+        <p:txBody>
+          <a:bodyPr wrap="square" lIns="0" tIns="0" rIns="0" bIns="0" rtlCol="0" anchor="t"/>
+          <a:lstStyle/>
+          <a:p>
+            <a:pPr indent="0" marL="0">
+              <a:lnSpc>
+                <a:spcPct val="100000"/>
+              </a:lnSpc>
               <a:buNone/>
             </a:pPr>
             <a:r>
@@ -3359,7 +3463,7 @@
                   <a:srgbClr val="213B45"/>
                 </a:solidFill>
               </a:rPr>
-              <a:t>供应商融资总额下降仍有撤回与集中风险</a:t>
+              <a:t>现金表现强但依赖经营负债提供资金</a:t>
             </a:r>
             <a:endParaRPr lang="en-US" sz="2200" dirty="0"/>
           </a:p>
@@ -3373,91 +3477,134 @@
         </p:nvSpPr>
         <p:spPr>
           <a:xfrm>
-            <a:off x="594360" y="2331720"/>
-            <a:ext cx="6995160" cy="1828800"/>
-          </a:xfrm>
-          <a:prstGeom prst="rect">
-            <a:avLst/>
-          </a:prstGeom>
-          <a:noFill/>
-          <a:ln/>
-        </p:spPr>
-        <p:txBody>
-          <a:bodyPr wrap="square" lIns="0" tIns="0" rIns="0" bIns="0" rtlCol="0" anchor="ctr">
-            <a:normAutofit/>
-          </a:bodyPr>
-          <a:lstStyle/>
-          <a:p>
-            <a:pPr indent="0" marL="0">
-              <a:buNone/>
-            </a:pPr>
-            <a:r>
-              <a:rPr lang="en-US" sz="1900" dirty="0">
+            <a:off x="594360" y="2624328"/>
+            <a:ext cx="6995160" cy="3063240"/>
+          </a:xfrm>
+          <a:prstGeom prst="rect">
+            <a:avLst/>
+          </a:prstGeom>
+          <a:noFill/>
+          <a:ln/>
+        </p:spPr>
+        <p:txBody>
+          <a:bodyPr wrap="square" lIns="0" tIns="0" rIns="0" bIns="0" rtlCol="0" anchor="t"/>
+          <a:lstStyle/>
+          <a:p>
+            <a:pPr indent="0" marL="0">
+              <a:lnSpc>
+                <a:spcPct val="100000"/>
+              </a:lnSpc>
+              <a:buNone/>
+            </a:pPr>
+            <a:r>
+              <a:rPr lang="en-US" sz="1800" dirty="0">
                 <a:solidFill>
                   <a:srgbClr val="1F2933"/>
                 </a:solidFill>
               </a:rPr>
-              <a:t>跨页融资安排合计372.23 亿元人民币，较期初变动-71.40 亿元人民币；供应商已收款307.28 亿元人民币是其中一部分。</a:t>
-            </a:r>
-            <a:endParaRPr lang="en-US" sz="1900" dirty="0"/>
-          </a:p>
-        </p:txBody>
-      </p:sp>
-      <p:sp>
-        <p:nvSpPr>
-          <p:cNvPr id="7" name="Text 5"/>
-          <p:cNvSpPr/>
-          <p:nvPr/>
-        </p:nvSpPr>
-        <p:spPr>
-          <a:xfrm>
-            <a:off x="594360" y="4434840"/>
-            <a:ext cx="6995160" cy="1325880"/>
-          </a:xfrm>
-          <a:prstGeom prst="rect">
-            <a:avLst/>
-          </a:prstGeom>
-          <a:noFill/>
-          <a:ln/>
-        </p:spPr>
-        <p:txBody>
-          <a:bodyPr wrap="square" lIns="0" tIns="0" rIns="0" bIns="0" rtlCol="0" anchor="ctr">
-            <a:normAutofit/>
-          </a:bodyPr>
-          <a:lstStyle/>
-          <a:p>
-            <a:pPr indent="0" marL="0">
-              <a:buNone/>
-            </a:pPr>
-            <a:r>
-              <a:rPr lang="en-US" sz="1600" dirty="0">
-                <a:solidFill>
-                  <a:srgbClr val="56646C"/>
+              <a:t>CFO为1,332.20 亿元人民币，与总净利润之比</a:t>
+            </a:r>
+            <a:endParaRPr lang="en-US" sz="1800" dirty="0"/>
+          </a:p>
+          <a:p>
+            <a:pPr indent="0" marL="0">
+              <a:lnSpc>
+                <a:spcPct val="100000"/>
+              </a:lnSpc>
+              <a:buNone/>
+            </a:pPr>
+            <a:r>
+              <a:rPr lang="en-US" sz="1800" dirty="0">
+                <a:solidFill>
+                  <a:srgbClr val="1F2933"/>
+                </a:solidFill>
+              </a:rPr>
+              <a:t>173.49%；营运资本三项合计贡献332.16 亿元人民</a:t>
+            </a:r>
+            <a:endParaRPr lang="en-US" sz="1800" dirty="0"/>
+          </a:p>
+          <a:p>
+            <a:pPr indent="0" marL="0">
+              <a:lnSpc>
+                <a:spcPct val="100000"/>
+              </a:lnSpc>
+              <a:buNone/>
+            </a:pPr>
+            <a:r>
+              <a:rPr lang="en-US" sz="1800" dirty="0">
+                <a:solidFill>
+                  <a:srgbClr val="1F2933"/>
+                </a:solidFill>
+              </a:rPr>
+              <a:t>币。</a:t>
+            </a:r>
+            <a:endParaRPr lang="en-US" sz="1800" dirty="0"/>
+          </a:p>
+          <a:p>
+            <a:pPr indent="0" marL="0">
+              <a:lnSpc>
+                <a:spcPct val="100000"/>
+              </a:lnSpc>
+              <a:buNone/>
+            </a:pPr>
+            <a:endParaRPr lang="en-US" sz="1800" dirty="0"/>
+          </a:p>
+          <a:p>
+            <a:pPr indent="0" marL="0">
+              <a:lnSpc>
+                <a:spcPct val="100000"/>
+              </a:lnSpc>
+              <a:buNone/>
+            </a:pPr>
+            <a:r>
+              <a:rPr lang="en-US" sz="1800" dirty="0">
+                <a:solidFill>
+                  <a:srgbClr val="1F2933"/>
                 </a:solidFill>
               </a:rPr>
               <a:t>判断改变条件</a:t>
             </a:r>
-            <a:endParaRPr lang="en-US" sz="1600" dirty="0"/>
-          </a:p>
-          <a:p>
-            <a:pPr indent="0" marL="0">
-              <a:buNone/>
-            </a:pPr>
-            <a:r>
-              <a:rPr lang="en-US" sz="1600" dirty="0">
-                <a:solidFill>
-                  <a:srgbClr val="56646C"/>
-                </a:solidFill>
-              </a:rPr>
-              <a:t>取得融资机构、到期梯度及撤回条款，重算现金缺口和债务口径；不能把存量总额直接当本期CFO调整额。</a:t>
-            </a:r>
-            <a:endParaRPr lang="en-US" sz="1600" dirty="0"/>
-          </a:p>
-        </p:txBody>
-      </p:sp>
-      <p:sp>
-        <p:nvSpPr>
-          <p:cNvPr id="9" name="Shape 6"/>
+            <a:endParaRPr lang="en-US" sz="1800" dirty="0"/>
+          </a:p>
+          <a:p>
+            <a:pPr indent="0" marL="0">
+              <a:lnSpc>
+                <a:spcPct val="100000"/>
+              </a:lnSpc>
+              <a:buNone/>
+            </a:pPr>
+            <a:r>
+              <a:rPr lang="en-US" sz="1800" dirty="0">
+                <a:solidFill>
+                  <a:srgbClr val="1F2933"/>
+                </a:solidFill>
+              </a:rPr>
+              <a:t>逐月回款付款、客户预收和供应商账期桥显示资金贡献不可持续时</a:t>
+            </a:r>
+            <a:endParaRPr lang="en-US" sz="1800" dirty="0"/>
+          </a:p>
+          <a:p>
+            <a:pPr indent="0" marL="0">
+              <a:lnSpc>
+                <a:spcPct val="100000"/>
+              </a:lnSpc>
+              <a:buNone/>
+            </a:pPr>
+            <a:r>
+              <a:rPr lang="en-US" sz="1800" dirty="0">
+                <a:solidFill>
+                  <a:srgbClr val="1F2933"/>
+                </a:solidFill>
+              </a:rPr>
+              <a:t>，下调可持续现金假设。</a:t>
+            </a:r>
+            <a:endParaRPr lang="en-US" sz="1800" dirty="0"/>
+          </a:p>
+        </p:txBody>
+      </p:sp>
+      <p:sp>
+        <p:nvSpPr>
+          <p:cNvPr id="8" name="Shape 5"/>
           <p:cNvSpPr/>
           <p:nvPr/>
         </p:nvSpPr>
@@ -3482,81 +3629,85 @@
       </p:sp>
       <p:sp>
         <p:nvSpPr>
+          <p:cNvPr id="9" name="Text 6"/>
+          <p:cNvSpPr/>
+          <p:nvPr/>
+        </p:nvSpPr>
+        <p:spPr>
+          <a:xfrm>
+            <a:off x="8138160" y="1591056"/>
+            <a:ext cx="3291840" cy="274320"/>
+          </a:xfrm>
+          <a:prstGeom prst="rect">
+            <a:avLst/>
+          </a:prstGeom>
+          <a:noFill/>
+          <a:ln/>
+        </p:spPr>
+        <p:txBody>
+          <a:bodyPr wrap="square" lIns="0" tIns="0" rIns="0" bIns="0" rtlCol="0" anchor="t"/>
+          <a:lstStyle/>
+          <a:p>
+            <a:pPr indent="0" marL="0">
+              <a:lnSpc>
+                <a:spcPct val="100000"/>
+              </a:lnSpc>
+              <a:buNone/>
+            </a:pPr>
+            <a:r>
+              <a:rPr lang="en-US" sz="1200" dirty="0">
+                <a:solidFill>
+                  <a:srgbClr val="213B45"/>
+                </a:solidFill>
+              </a:rPr>
+              <a:t>经营活动现金净额</a:t>
+            </a:r>
+            <a:endParaRPr lang="en-US" sz="1200" dirty="0"/>
+          </a:p>
+        </p:txBody>
+      </p:sp>
+      <p:sp>
+        <p:nvSpPr>
           <p:cNvPr id="10" name="Text 7"/>
           <p:cNvSpPr/>
           <p:nvPr/>
         </p:nvSpPr>
         <p:spPr>
           <a:xfrm>
-            <a:off x="8138160" y="1591056"/>
-            <a:ext cx="3291840" cy="228600"/>
-          </a:xfrm>
-          <a:prstGeom prst="rect">
-            <a:avLst/>
-          </a:prstGeom>
-          <a:noFill/>
-          <a:ln/>
-        </p:spPr>
-        <p:txBody>
-          <a:bodyPr wrap="square" lIns="0" tIns="0" rIns="0" bIns="0" rtlCol="0" anchor="ctr"/>
-          <a:lstStyle/>
-          <a:p>
-            <a:pPr indent="0" marL="0">
-              <a:buNone/>
-            </a:pPr>
-            <a:r>
-              <a:rPr lang="en-US" sz="1200" dirty="0">
-                <a:solidFill>
-                  <a:srgbClr val="213B45"/>
-                </a:solidFill>
-              </a:rPr>
-              <a:t>供应商融资安排合计</a:t>
-            </a:r>
-            <a:endParaRPr lang="en-US" sz="1200" dirty="0"/>
-          </a:p>
-        </p:txBody>
-      </p:sp>
-      <p:sp>
-        <p:nvSpPr>
-          <p:cNvPr id="11" name="Text 8"/>
-          <p:cNvSpPr/>
-          <p:nvPr/>
-        </p:nvSpPr>
-        <p:spPr>
-          <a:xfrm>
-            <a:off x="8138160" y="1892808"/>
-            <a:ext cx="3291840" cy="365760"/>
-          </a:xfrm>
-          <a:prstGeom prst="rect">
-            <a:avLst/>
-          </a:prstGeom>
-          <a:noFill/>
-          <a:ln/>
-        </p:spPr>
-        <p:txBody>
-          <a:bodyPr wrap="square" lIns="0" tIns="0" rIns="0" bIns="0" rtlCol="0" anchor="ctr">
-            <a:normAutofit/>
-          </a:bodyPr>
-          <a:lstStyle/>
-          <a:p>
-            <a:pPr indent="0" marL="0">
-              <a:buNone/>
-            </a:pPr>
-            <a:r>
-              <a:rPr lang="en-US" sz="1800" b="1" dirty="0">
+            <a:off x="8138160" y="1956816"/>
+            <a:ext cx="3291840" cy="393192"/>
+          </a:xfrm>
+          <a:prstGeom prst="rect">
+            <a:avLst/>
+          </a:prstGeom>
+          <a:noFill/>
+          <a:ln/>
+        </p:spPr>
+        <p:txBody>
+          <a:bodyPr wrap="square" lIns="0" tIns="0" rIns="0" bIns="0" rtlCol="0" anchor="t"/>
+          <a:lstStyle/>
+          <a:p>
+            <a:pPr indent="0" marL="0">
+              <a:lnSpc>
+                <a:spcPct val="100000"/>
+              </a:lnSpc>
+              <a:buNone/>
+            </a:pPr>
+            <a:r>
+              <a:rPr lang="en-US" sz="1700" b="1" dirty="0">
                 <a:solidFill>
                   <a:srgbClr val="237F72"/>
                 </a:solidFill>
               </a:rPr>
-              <a:t>372.23 亿元人民币</a:t>
-            </a:r>
-            <a:endParaRPr lang="en-US" sz="1800" dirty="0"/>
-          </a:p>
-        </p:txBody>
-      </p:sp>
-      <p:sp>
-        <p:nvSpPr>
-          <p:cNvPr id="12" name="Shape 9"/>
+              <a:t>1,332.20 亿元人民币</a:t>
+            </a:r>
+            <a:endParaRPr lang="en-US" sz="1700" dirty="0"/>
+          </a:p>
+        </p:txBody>
+      </p:sp>
+      <p:sp>
+        <p:nvSpPr>
+          <p:cNvPr id="11" name="Shape 8"/>
           <p:cNvSpPr/>
           <p:nvPr/>
         </p:nvSpPr>
@@ -3581,64 +3732,68 @@
       </p:sp>
       <p:sp>
         <p:nvSpPr>
+          <p:cNvPr id="12" name="Text 9"/>
+          <p:cNvSpPr/>
+          <p:nvPr/>
+        </p:nvSpPr>
+        <p:spPr>
+          <a:xfrm>
+            <a:off x="8138160" y="2670048"/>
+            <a:ext cx="3291840" cy="274320"/>
+          </a:xfrm>
+          <a:prstGeom prst="rect">
+            <a:avLst/>
+          </a:prstGeom>
+          <a:noFill/>
+          <a:ln/>
+        </p:spPr>
+        <p:txBody>
+          <a:bodyPr wrap="square" lIns="0" tIns="0" rIns="0" bIns="0" rtlCol="0" anchor="t"/>
+          <a:lstStyle/>
+          <a:p>
+            <a:pPr indent="0" marL="0">
+              <a:lnSpc>
+                <a:spcPct val="100000"/>
+              </a:lnSpc>
+              <a:buNone/>
+            </a:pPr>
+            <a:r>
+              <a:rPr lang="en-US" sz="1200" dirty="0">
+                <a:solidFill>
+                  <a:srgbClr val="213B45"/>
+                </a:solidFill>
+              </a:rPr>
+              <a:t>CFO与合并净利润之比</a:t>
+            </a:r>
+            <a:endParaRPr lang="en-US" sz="1200" dirty="0"/>
+          </a:p>
+        </p:txBody>
+      </p:sp>
+      <p:sp>
+        <p:nvSpPr>
           <p:cNvPr id="13" name="Text 10"/>
           <p:cNvSpPr/>
           <p:nvPr/>
         </p:nvSpPr>
         <p:spPr>
           <a:xfrm>
-            <a:off x="8138160" y="2670048"/>
-            <a:ext cx="3291840" cy="228600"/>
-          </a:xfrm>
-          <a:prstGeom prst="rect">
-            <a:avLst/>
-          </a:prstGeom>
-          <a:noFill/>
-          <a:ln/>
-        </p:spPr>
-        <p:txBody>
-          <a:bodyPr wrap="square" lIns="0" tIns="0" rIns="0" bIns="0" rtlCol="0" anchor="ctr"/>
-          <a:lstStyle/>
-          <a:p>
-            <a:pPr indent="0" marL="0">
-              <a:buNone/>
-            </a:pPr>
-            <a:r>
-              <a:rPr lang="en-US" sz="1200" dirty="0">
-                <a:solidFill>
-                  <a:srgbClr val="213B45"/>
-                </a:solidFill>
-              </a:rPr>
-              <a:t>供应商融资余额变化</a:t>
-            </a:r>
-            <a:endParaRPr lang="en-US" sz="1200" dirty="0"/>
-          </a:p>
-        </p:txBody>
-      </p:sp>
-      <p:sp>
-        <p:nvSpPr>
-          <p:cNvPr id="14" name="Text 11"/>
-          <p:cNvSpPr/>
-          <p:nvPr/>
-        </p:nvSpPr>
-        <p:spPr>
-          <a:xfrm>
-            <a:off x="8138160" y="2971800"/>
-            <a:ext cx="3291840" cy="365760"/>
-          </a:xfrm>
-          <a:prstGeom prst="rect">
-            <a:avLst/>
-          </a:prstGeom>
-          <a:noFill/>
-          <a:ln/>
-        </p:spPr>
-        <p:txBody>
-          <a:bodyPr wrap="square" lIns="0" tIns="0" rIns="0" bIns="0" rtlCol="0" anchor="ctr">
-            <a:normAutofit/>
-          </a:bodyPr>
-          <a:lstStyle/>
-          <a:p>
-            <a:pPr indent="0" marL="0">
+            <a:off x="8138160" y="3035808"/>
+            <a:ext cx="3291840" cy="393192"/>
+          </a:xfrm>
+          <a:prstGeom prst="rect">
+            <a:avLst/>
+          </a:prstGeom>
+          <a:noFill/>
+          <a:ln/>
+        </p:spPr>
+        <p:txBody>
+          <a:bodyPr wrap="square" lIns="0" tIns="0" rIns="0" bIns="0" rtlCol="0" anchor="t"/>
+          <a:lstStyle/>
+          <a:p>
+            <a:pPr indent="0" marL="0">
+              <a:lnSpc>
+                <a:spcPct val="100000"/>
+              </a:lnSpc>
               <a:buNone/>
             </a:pPr>
             <a:r>
@@ -3647,7 +3802,7 @@
                   <a:srgbClr val="237F72"/>
                 </a:solidFill>
               </a:rPr>
-              <a:t>-71.40 亿元人民币</a:t>
+              <a:t>173.49%</a:t>
             </a:r>
             <a:endParaRPr lang="en-US" sz="1800" dirty="0"/>
           </a:p>
@@ -3655,7 +3810,7 @@
       </p:sp>
       <p:sp>
         <p:nvSpPr>
-          <p:cNvPr id="15" name="Shape 12"/>
+          <p:cNvPr id="14" name="Shape 11"/>
           <p:cNvSpPr/>
           <p:nvPr/>
         </p:nvSpPr>
@@ -3680,64 +3835,68 @@
       </p:sp>
       <p:sp>
         <p:nvSpPr>
+          <p:cNvPr id="15" name="Text 12"/>
+          <p:cNvSpPr/>
+          <p:nvPr/>
+        </p:nvSpPr>
+        <p:spPr>
+          <a:xfrm>
+            <a:off x="8138160" y="3749040"/>
+            <a:ext cx="3291840" cy="274320"/>
+          </a:xfrm>
+          <a:prstGeom prst="rect">
+            <a:avLst/>
+          </a:prstGeom>
+          <a:noFill/>
+          <a:ln/>
+        </p:spPr>
+        <p:txBody>
+          <a:bodyPr wrap="square" lIns="0" tIns="0" rIns="0" bIns="0" rtlCol="0" anchor="t"/>
+          <a:lstStyle/>
+          <a:p>
+            <a:pPr indent="0" marL="0">
+              <a:lnSpc>
+                <a:spcPct val="100000"/>
+              </a:lnSpc>
+              <a:buNone/>
+            </a:pPr>
+            <a:r>
+              <a:rPr lang="en-US" sz="1200" dirty="0">
+                <a:solidFill>
+                  <a:srgbClr val="213B45"/>
+                </a:solidFill>
+              </a:rPr>
+              <a:t>经营营运资本现金净贡献</a:t>
+            </a:r>
+            <a:endParaRPr lang="en-US" sz="1200" dirty="0"/>
+          </a:p>
+        </p:txBody>
+      </p:sp>
+      <p:sp>
+        <p:nvSpPr>
           <p:cNvPr id="16" name="Text 13"/>
           <p:cNvSpPr/>
           <p:nvPr/>
         </p:nvSpPr>
         <p:spPr>
           <a:xfrm>
-            <a:off x="8138160" y="3749040"/>
-            <a:ext cx="3291840" cy="228600"/>
-          </a:xfrm>
-          <a:prstGeom prst="rect">
-            <a:avLst/>
-          </a:prstGeom>
-          <a:noFill/>
-          <a:ln/>
-        </p:spPr>
-        <p:txBody>
-          <a:bodyPr wrap="square" lIns="0" tIns="0" rIns="0" bIns="0" rtlCol="0" anchor="ctr"/>
-          <a:lstStyle/>
-          <a:p>
-            <a:pPr indent="0" marL="0">
-              <a:buNone/>
-            </a:pPr>
-            <a:r>
-              <a:rPr lang="en-US" sz="1200" dirty="0">
-                <a:solidFill>
-                  <a:srgbClr val="213B45"/>
-                </a:solidFill>
-              </a:rPr>
-              <a:t>筹资负债表借款债券及租赁合计</a:t>
-            </a:r>
-            <a:endParaRPr lang="en-US" sz="1200" dirty="0"/>
-          </a:p>
-        </p:txBody>
-      </p:sp>
-      <p:sp>
-        <p:nvSpPr>
-          <p:cNvPr id="17" name="Text 14"/>
-          <p:cNvSpPr/>
-          <p:nvPr/>
-        </p:nvSpPr>
-        <p:spPr>
-          <a:xfrm>
-            <a:off x="8138160" y="4050792"/>
-            <a:ext cx="3291840" cy="365760"/>
-          </a:xfrm>
-          <a:prstGeom prst="rect">
-            <a:avLst/>
-          </a:prstGeom>
-          <a:noFill/>
-          <a:ln/>
-        </p:spPr>
-        <p:txBody>
-          <a:bodyPr wrap="square" lIns="0" tIns="0" rIns="0" bIns="0" rtlCol="0" anchor="ctr">
-            <a:normAutofit/>
-          </a:bodyPr>
-          <a:lstStyle/>
-          <a:p>
-            <a:pPr indent="0" marL="0">
+            <a:off x="8138160" y="4114800"/>
+            <a:ext cx="3291840" cy="393192"/>
+          </a:xfrm>
+          <a:prstGeom prst="rect">
+            <a:avLst/>
+          </a:prstGeom>
+          <a:noFill/>
+          <a:ln/>
+        </p:spPr>
+        <p:txBody>
+          <a:bodyPr wrap="square" lIns="0" tIns="0" rIns="0" bIns="0" rtlCol="0" anchor="t"/>
+          <a:lstStyle/>
+          <a:p>
+            <a:pPr indent="0" marL="0">
+              <a:lnSpc>
+                <a:spcPct val="100000"/>
+              </a:lnSpc>
               <a:buNone/>
             </a:pPr>
             <a:r>
@@ -3746,7 +3905,7 @@
                   <a:srgbClr val="237F72"/>
                 </a:solidFill>
               </a:rPr>
-              <a:t>1,196.01 亿元人民币</a:t>
+              <a:t>332.16 亿元人民币</a:t>
             </a:r>
             <a:endParaRPr lang="en-US" sz="1800" dirty="0"/>
           </a:p>
@@ -3754,7 +3913,7 @@
       </p:sp>
       <p:sp>
         <p:nvSpPr>
-          <p:cNvPr id="18" name="Shape 15"/>
+          <p:cNvPr id="17" name="Shape 14"/>
           <p:cNvSpPr/>
           <p:nvPr/>
         </p:nvSpPr>
@@ -3779,81 +3938,85 @@
       </p:sp>
       <p:sp>
         <p:nvSpPr>
+          <p:cNvPr id="18" name="Text 15"/>
+          <p:cNvSpPr/>
+          <p:nvPr/>
+        </p:nvSpPr>
+        <p:spPr>
+          <a:xfrm>
+            <a:off x="8138160" y="4828032"/>
+            <a:ext cx="3291840" cy="274320"/>
+          </a:xfrm>
+          <a:prstGeom prst="rect">
+            <a:avLst/>
+          </a:prstGeom>
+          <a:noFill/>
+          <a:ln/>
+        </p:spPr>
+        <p:txBody>
+          <a:bodyPr wrap="square" lIns="0" tIns="0" rIns="0" bIns="0" rtlCol="0" anchor="t"/>
+          <a:lstStyle/>
+          <a:p>
+            <a:pPr indent="0" marL="0">
+              <a:lnSpc>
+                <a:spcPct val="100000"/>
+              </a:lnSpc>
+              <a:buNone/>
+            </a:pPr>
+            <a:r>
+              <a:rPr lang="en-US" sz="1200" dirty="0">
+                <a:solidFill>
+                  <a:srgbClr val="213B45"/>
+                </a:solidFill>
+              </a:rPr>
+              <a:t>CFO减购建长期资产现金</a:t>
+            </a:r>
+            <a:endParaRPr lang="en-US" sz="1200" dirty="0"/>
+          </a:p>
+        </p:txBody>
+      </p:sp>
+      <p:sp>
+        <p:nvSpPr>
           <p:cNvPr id="19" name="Text 16"/>
           <p:cNvSpPr/>
           <p:nvPr/>
         </p:nvSpPr>
         <p:spPr>
           <a:xfrm>
-            <a:off x="8138160" y="4828032"/>
-            <a:ext cx="3291840" cy="228600"/>
-          </a:xfrm>
-          <a:prstGeom prst="rect">
-            <a:avLst/>
-          </a:prstGeom>
-          <a:noFill/>
-          <a:ln/>
-        </p:spPr>
-        <p:txBody>
-          <a:bodyPr wrap="square" lIns="0" tIns="0" rIns="0" bIns="0" rtlCol="0" anchor="ctr"/>
-          <a:lstStyle/>
-          <a:p>
-            <a:pPr indent="0" marL="0">
-              <a:buNone/>
-            </a:pPr>
-            <a:r>
-              <a:rPr lang="en-US" sz="1200" dirty="0">
-                <a:solidFill>
-                  <a:srgbClr val="213B45"/>
-                </a:solidFill>
-              </a:rPr>
-              <a:t>含供应商融资的债务敏感性口径</a:t>
-            </a:r>
-            <a:endParaRPr lang="en-US" sz="1200" dirty="0"/>
+            <a:off x="8138160" y="5193792"/>
+            <a:ext cx="3291840" cy="393192"/>
+          </a:xfrm>
+          <a:prstGeom prst="rect">
+            <a:avLst/>
+          </a:prstGeom>
+          <a:noFill/>
+          <a:ln/>
+        </p:spPr>
+        <p:txBody>
+          <a:bodyPr wrap="square" lIns="0" tIns="0" rIns="0" bIns="0" rtlCol="0" anchor="t"/>
+          <a:lstStyle/>
+          <a:p>
+            <a:pPr indent="0" marL="0">
+              <a:lnSpc>
+                <a:spcPct val="100000"/>
+              </a:lnSpc>
+              <a:buNone/>
+            </a:pPr>
+            <a:r>
+              <a:rPr lang="en-US" sz="1800" b="1" dirty="0">
+                <a:solidFill>
+                  <a:srgbClr val="237F72"/>
+                </a:solidFill>
+              </a:rPr>
+              <a:t>908.75 亿元人民币</a:t>
+            </a:r>
+            <a:endParaRPr lang="en-US" sz="1800" dirty="0"/>
           </a:p>
         </p:txBody>
       </p:sp>
       <p:sp>
         <p:nvSpPr>
           <p:cNvPr id="20" name="Text 17"/>
-          <p:cNvSpPr/>
-          <p:nvPr/>
-        </p:nvSpPr>
-        <p:spPr>
-          <a:xfrm>
-            <a:off x="8138160" y="5129784"/>
-            <a:ext cx="3291840" cy="365760"/>
-          </a:xfrm>
-          <a:prstGeom prst="rect">
-            <a:avLst/>
-          </a:prstGeom>
-          <a:noFill/>
-          <a:ln/>
-        </p:spPr>
-        <p:txBody>
-          <a:bodyPr wrap="square" lIns="0" tIns="0" rIns="0" bIns="0" rtlCol="0" anchor="ctr">
-            <a:normAutofit/>
-          </a:bodyPr>
-          <a:lstStyle/>
-          <a:p>
-            <a:pPr indent="0" marL="0">
-              <a:buNone/>
-            </a:pPr>
-            <a:r>
-              <a:rPr lang="en-US" sz="1800" b="1" dirty="0">
-                <a:solidFill>
-                  <a:srgbClr val="237F72"/>
-                </a:solidFill>
-              </a:rPr>
-              <a:t>1,568.24 亿元人民币</a:t>
-            </a:r>
-            <a:endParaRPr lang="en-US" sz="1800" dirty="0"/>
-          </a:p>
-        </p:txBody>
-      </p:sp>
-      <p:sp>
-        <p:nvSpPr>
-          <p:cNvPr id="21" name="Text 18"/>
           <p:cNvSpPr/>
           <p:nvPr/>
         </p:nvSpPr>
@@ -3869,12 +4032,13 @@
           <a:ln/>
         </p:spPr>
         <p:txBody>
-          <a:bodyPr wrap="square" lIns="0" tIns="0" rIns="0" bIns="0" rtlCol="0" anchor="ctr">
-            <a:normAutofit/>
-          </a:bodyPr>
-          <a:lstStyle/>
-          <a:p>
-            <a:pPr indent="0" marL="0">
+          <a:bodyPr wrap="square" lIns="0" tIns="0" rIns="0" bIns="0" rtlCol="0" anchor="t"/>
+          <a:lstStyle/>
+          <a:p>
+            <a:pPr indent="0" marL="0">
+              <a:lnSpc>
+                <a:spcPct val="100000"/>
+              </a:lnSpc>
               <a:buNone/>
             </a:pPr>
             <a:r>
@@ -3883,7 +4047,7 @@
                   <a:srgbClr val="586874"/>
                 </a:solidFill>
               </a:rPr>
-              <a:t>来源记录 E_SUPPLY / E_DEBT / supply_components / supply_change；完整位置见报告与底稿</a:t>
+              <a:t>来源记录 E_CF / E_BRIDGE / cfo_bridge 等；全部来源及位置见报告、底稿与备注</a:t>
             </a:r>
             <a:endParaRPr lang="en-US" sz="900" dirty="0"/>
           </a:p>
@@ -3939,10 +4103,13 @@
           <a:ln/>
         </p:spPr>
         <p:txBody>
-          <a:bodyPr wrap="square" lIns="0" tIns="0" rIns="0" bIns="0" rtlCol="0" anchor="ctr"/>
-          <a:lstStyle/>
-          <a:p>
-            <a:pPr indent="0" marL="0">
+          <a:bodyPr wrap="square" lIns="0" tIns="0" rIns="0" bIns="0" rtlCol="0" anchor="t"/>
+          <a:lstStyle/>
+          <a:p>
+            <a:pPr indent="0" marL="0">
+              <a:lnSpc>
+                <a:spcPct val="100000"/>
+              </a:lnSpc>
               <a:buNone/>
             </a:pPr>
             <a:r>
@@ -3951,7 +4118,7 @@
                   <a:srgbClr val="213B45"/>
                 </a:solidFill>
               </a:rPr>
-              <a:t>资金可用性与流动性</a:t>
+              <a:t>供应商融资与债务口径</a:t>
             </a:r>
             <a:endParaRPr lang="en-US" sz="2700" dirty="0"/>
           </a:p>
@@ -4025,19 +4192,22 @@
         <p:spPr>
           <a:xfrm>
             <a:off x="594360" y="1444752"/>
-            <a:ext cx="6995160" cy="685800"/>
-          </a:xfrm>
-          <a:prstGeom prst="rect">
-            <a:avLst/>
-          </a:prstGeom>
-          <a:noFill/>
-          <a:ln/>
-        </p:spPr>
-        <p:txBody>
-          <a:bodyPr wrap="square" lIns="0" tIns="0" rIns="0" bIns="0" rtlCol="0" anchor="ctr"/>
-          <a:lstStyle/>
-          <a:p>
-            <a:pPr indent="0" marL="0">
+            <a:ext cx="6995160" cy="1005840"/>
+          </a:xfrm>
+          <a:prstGeom prst="rect">
+            <a:avLst/>
+          </a:prstGeom>
+          <a:noFill/>
+          <a:ln/>
+        </p:spPr>
+        <p:txBody>
+          <a:bodyPr wrap="square" lIns="0" tIns="0" rIns="0" bIns="0" rtlCol="0" anchor="t"/>
+          <a:lstStyle/>
+          <a:p>
+            <a:pPr indent="0" marL="0">
+              <a:lnSpc>
+                <a:spcPct val="100000"/>
+              </a:lnSpc>
               <a:buNone/>
             </a:pPr>
             <a:r>
@@ -4046,7 +4216,7 @@
                   <a:srgbClr val="213B45"/>
                 </a:solidFill>
               </a:rPr>
-              <a:t>账面资金不能直接当法人偿债现金</a:t>
+              <a:t>供应商融资总额下降仍有撤回与集中风险</a:t>
             </a:r>
             <a:endParaRPr lang="en-US" sz="2200" dirty="0"/>
           </a:p>
@@ -4060,91 +4230,134 @@
         </p:nvSpPr>
         <p:spPr>
           <a:xfrm>
-            <a:off x="594360" y="2331720"/>
-            <a:ext cx="6995160" cy="1828800"/>
-          </a:xfrm>
-          <a:prstGeom prst="rect">
-            <a:avLst/>
-          </a:prstGeom>
-          <a:noFill/>
-          <a:ln/>
-        </p:spPr>
-        <p:txBody>
-          <a:bodyPr wrap="square" lIns="0" tIns="0" rIns="0" bIns="0" rtlCol="0" anchor="ctr">
-            <a:normAutofit/>
-          </a:bodyPr>
-          <a:lstStyle/>
-          <a:p>
-            <a:pPr indent="0" marL="0">
-              <a:buNone/>
-            </a:pPr>
-            <a:r>
-              <a:rPr lang="en-US" sz="1900" dirty="0">
+            <a:off x="594360" y="2624328"/>
+            <a:ext cx="6995160" cy="3063240"/>
+          </a:xfrm>
+          <a:prstGeom prst="rect">
+            <a:avLst/>
+          </a:prstGeom>
+          <a:noFill/>
+          <a:ln/>
+        </p:spPr>
+        <p:txBody>
+          <a:bodyPr wrap="square" lIns="0" tIns="0" rIns="0" bIns="0" rtlCol="0" anchor="t"/>
+          <a:lstStyle/>
+          <a:p>
+            <a:pPr indent="0" marL="0">
+              <a:lnSpc>
+                <a:spcPct val="100000"/>
+              </a:lnSpc>
+              <a:buNone/>
+            </a:pPr>
+            <a:r>
+              <a:rPr lang="en-US" sz="1800" dirty="0">
                 <a:solidFill>
                   <a:srgbClr val="1F2933"/>
                 </a:solidFill>
               </a:rPr>
-              <a:t>货币资金3,335.13 亿元人民币中，现金及现金等价物2,999.30 亿元人民币，排除项目335.83 亿元人民币；现金桥保留千元级舍入差。</a:t>
-            </a:r>
-            <a:endParaRPr lang="en-US" sz="1900" dirty="0"/>
-          </a:p>
-        </p:txBody>
-      </p:sp>
-      <p:sp>
-        <p:nvSpPr>
-          <p:cNvPr id="7" name="Text 5"/>
-          <p:cNvSpPr/>
-          <p:nvPr/>
-        </p:nvSpPr>
-        <p:spPr>
-          <a:xfrm>
-            <a:off x="594360" y="4434840"/>
-            <a:ext cx="6995160" cy="1325880"/>
-          </a:xfrm>
-          <a:prstGeom prst="rect">
-            <a:avLst/>
-          </a:prstGeom>
-          <a:noFill/>
-          <a:ln/>
-        </p:spPr>
-        <p:txBody>
-          <a:bodyPr wrap="square" lIns="0" tIns="0" rIns="0" bIns="0" rtlCol="0" anchor="ctr">
-            <a:normAutofit/>
-          </a:bodyPr>
-          <a:lstStyle/>
-          <a:p>
-            <a:pPr indent="0" marL="0">
-              <a:buNone/>
-            </a:pPr>
-            <a:r>
-              <a:rPr lang="en-US" sz="1600" dirty="0">
-                <a:solidFill>
-                  <a:srgbClr val="56646C"/>
+              <a:t>跨页融资安排合计372.23 亿元人民币，较期初变动-</a:t>
+            </a:r>
+            <a:endParaRPr lang="en-US" sz="1800" dirty="0"/>
+          </a:p>
+          <a:p>
+            <a:pPr indent="0" marL="0">
+              <a:lnSpc>
+                <a:spcPct val="100000"/>
+              </a:lnSpc>
+              <a:buNone/>
+            </a:pPr>
+            <a:r>
+              <a:rPr lang="en-US" sz="1800" dirty="0">
+                <a:solidFill>
+                  <a:srgbClr val="1F2933"/>
+                </a:solidFill>
+              </a:rPr>
+              <a:t>71.40 亿元人民币；供应商已收款307.28 亿元人民</a:t>
+            </a:r>
+            <a:endParaRPr lang="en-US" sz="1800" dirty="0"/>
+          </a:p>
+          <a:p>
+            <a:pPr indent="0" marL="0">
+              <a:lnSpc>
+                <a:spcPct val="100000"/>
+              </a:lnSpc>
+              <a:buNone/>
+            </a:pPr>
+            <a:r>
+              <a:rPr lang="en-US" sz="1800" dirty="0">
+                <a:solidFill>
+                  <a:srgbClr val="1F2933"/>
+                </a:solidFill>
+              </a:rPr>
+              <a:t>币是其中一部分。</a:t>
+            </a:r>
+            <a:endParaRPr lang="en-US" sz="1800" dirty="0"/>
+          </a:p>
+          <a:p>
+            <a:pPr indent="0" marL="0">
+              <a:lnSpc>
+                <a:spcPct val="100000"/>
+              </a:lnSpc>
+              <a:buNone/>
+            </a:pPr>
+            <a:endParaRPr lang="en-US" sz="1800" dirty="0"/>
+          </a:p>
+          <a:p>
+            <a:pPr indent="0" marL="0">
+              <a:lnSpc>
+                <a:spcPct val="100000"/>
+              </a:lnSpc>
+              <a:buNone/>
+            </a:pPr>
+            <a:r>
+              <a:rPr lang="en-US" sz="1800" dirty="0">
+                <a:solidFill>
+                  <a:srgbClr val="1F2933"/>
                 </a:solidFill>
               </a:rPr>
               <a:t>判断改变条件</a:t>
             </a:r>
-            <a:endParaRPr lang="en-US" sz="1600" dirty="0"/>
-          </a:p>
-          <a:p>
-            <a:pPr indent="0" marL="0">
-              <a:buNone/>
-            </a:pPr>
-            <a:r>
-              <a:rPr lang="en-US" sz="1600" dirty="0">
-                <a:solidFill>
-                  <a:srgbClr val="56646C"/>
-                </a:solidFill>
-              </a:rPr>
-              <a:t>按法人取得账户限制、债务期限和承诺授信条件，才能完成分期流动性覆盖。</a:t>
-            </a:r>
-            <a:endParaRPr lang="en-US" sz="1600" dirty="0"/>
-          </a:p>
-        </p:txBody>
-      </p:sp>
-      <p:sp>
-        <p:nvSpPr>
-          <p:cNvPr id="9" name="Shape 6"/>
+            <a:endParaRPr lang="en-US" sz="1800" dirty="0"/>
+          </a:p>
+          <a:p>
+            <a:pPr indent="0" marL="0">
+              <a:lnSpc>
+                <a:spcPct val="100000"/>
+              </a:lnSpc>
+              <a:buNone/>
+            </a:pPr>
+            <a:r>
+              <a:rPr lang="en-US" sz="1800" dirty="0">
+                <a:solidFill>
+                  <a:srgbClr val="1F2933"/>
+                </a:solidFill>
+              </a:rPr>
+              <a:t>取得融资机构、到期梯度及撤回条款，重算现金缺口和债务口径；</a:t>
+            </a:r>
+            <a:endParaRPr lang="en-US" sz="1800" dirty="0"/>
+          </a:p>
+          <a:p>
+            <a:pPr indent="0" marL="0">
+              <a:lnSpc>
+                <a:spcPct val="100000"/>
+              </a:lnSpc>
+              <a:buNone/>
+            </a:pPr>
+            <a:r>
+              <a:rPr lang="en-US" sz="1800" dirty="0">
+                <a:solidFill>
+                  <a:srgbClr val="1F2933"/>
+                </a:solidFill>
+              </a:rPr>
+              <a:t>不能把存量总额直接当本期CFO调整额。</a:t>
+            </a:r>
+            <a:endParaRPr lang="en-US" sz="1800" dirty="0"/>
+          </a:p>
+        </p:txBody>
+      </p:sp>
+      <p:sp>
+        <p:nvSpPr>
+          <p:cNvPr id="8" name="Shape 5"/>
           <p:cNvSpPr/>
           <p:nvPr/>
         </p:nvSpPr>
@@ -4169,64 +4382,68 @@
       </p:sp>
       <p:sp>
         <p:nvSpPr>
+          <p:cNvPr id="9" name="Text 6"/>
+          <p:cNvSpPr/>
+          <p:nvPr/>
+        </p:nvSpPr>
+        <p:spPr>
+          <a:xfrm>
+            <a:off x="8138160" y="1591056"/>
+            <a:ext cx="3291840" cy="274320"/>
+          </a:xfrm>
+          <a:prstGeom prst="rect">
+            <a:avLst/>
+          </a:prstGeom>
+          <a:noFill/>
+          <a:ln/>
+        </p:spPr>
+        <p:txBody>
+          <a:bodyPr wrap="square" lIns="0" tIns="0" rIns="0" bIns="0" rtlCol="0" anchor="t"/>
+          <a:lstStyle/>
+          <a:p>
+            <a:pPr indent="0" marL="0">
+              <a:lnSpc>
+                <a:spcPct val="100000"/>
+              </a:lnSpc>
+              <a:buNone/>
+            </a:pPr>
+            <a:r>
+              <a:rPr lang="en-US" sz="1200" dirty="0">
+                <a:solidFill>
+                  <a:srgbClr val="213B45"/>
+                </a:solidFill>
+              </a:rPr>
+              <a:t>供应商融资安排合计</a:t>
+            </a:r>
+            <a:endParaRPr lang="en-US" sz="1200" dirty="0"/>
+          </a:p>
+        </p:txBody>
+      </p:sp>
+      <p:sp>
+        <p:nvSpPr>
           <p:cNvPr id="10" name="Text 7"/>
           <p:cNvSpPr/>
           <p:nvPr/>
         </p:nvSpPr>
         <p:spPr>
           <a:xfrm>
-            <a:off x="8138160" y="1591056"/>
-            <a:ext cx="3291840" cy="228600"/>
-          </a:xfrm>
-          <a:prstGeom prst="rect">
-            <a:avLst/>
-          </a:prstGeom>
-          <a:noFill/>
-          <a:ln/>
-        </p:spPr>
-        <p:txBody>
-          <a:bodyPr wrap="square" lIns="0" tIns="0" rIns="0" bIns="0" rtlCol="0" anchor="ctr"/>
-          <a:lstStyle/>
-          <a:p>
-            <a:pPr indent="0" marL="0">
-              <a:buNone/>
-            </a:pPr>
-            <a:r>
-              <a:rPr lang="en-US" sz="1200" dirty="0">
-                <a:solidFill>
-                  <a:srgbClr val="213B45"/>
-                </a:solidFill>
-              </a:rPr>
-              <a:t>货币资金</a:t>
-            </a:r>
-            <a:endParaRPr lang="en-US" sz="1200" dirty="0"/>
-          </a:p>
-        </p:txBody>
-      </p:sp>
-      <p:sp>
-        <p:nvSpPr>
-          <p:cNvPr id="11" name="Text 8"/>
-          <p:cNvSpPr/>
-          <p:nvPr/>
-        </p:nvSpPr>
-        <p:spPr>
-          <a:xfrm>
-            <a:off x="8138160" y="1892808"/>
-            <a:ext cx="3291840" cy="365760"/>
-          </a:xfrm>
-          <a:prstGeom prst="rect">
-            <a:avLst/>
-          </a:prstGeom>
-          <a:noFill/>
-          <a:ln/>
-        </p:spPr>
-        <p:txBody>
-          <a:bodyPr wrap="square" lIns="0" tIns="0" rIns="0" bIns="0" rtlCol="0" anchor="ctr">
-            <a:normAutofit/>
-          </a:bodyPr>
-          <a:lstStyle/>
-          <a:p>
-            <a:pPr indent="0" marL="0">
+            <a:off x="8138160" y="1956816"/>
+            <a:ext cx="3291840" cy="393192"/>
+          </a:xfrm>
+          <a:prstGeom prst="rect">
+            <a:avLst/>
+          </a:prstGeom>
+          <a:noFill/>
+          <a:ln/>
+        </p:spPr>
+        <p:txBody>
+          <a:bodyPr wrap="square" lIns="0" tIns="0" rIns="0" bIns="0" rtlCol="0" anchor="t"/>
+          <a:lstStyle/>
+          <a:p>
+            <a:pPr indent="0" marL="0">
+              <a:lnSpc>
+                <a:spcPct val="100000"/>
+              </a:lnSpc>
               <a:buNone/>
             </a:pPr>
             <a:r>
@@ -4235,7 +4452,7 @@
                   <a:srgbClr val="237F72"/>
                 </a:solidFill>
               </a:rPr>
-              <a:t>3,335.13 亿元人民币</a:t>
+              <a:t>372.23 亿元人民币</a:t>
             </a:r>
             <a:endParaRPr lang="en-US" sz="1800" dirty="0"/>
           </a:p>
@@ -4243,7 +4460,7 @@
       </p:sp>
       <p:sp>
         <p:nvSpPr>
-          <p:cNvPr id="12" name="Shape 9"/>
+          <p:cNvPr id="11" name="Shape 8"/>
           <p:cNvSpPr/>
           <p:nvPr/>
         </p:nvSpPr>
@@ -4268,64 +4485,68 @@
       </p:sp>
       <p:sp>
         <p:nvSpPr>
+          <p:cNvPr id="12" name="Text 9"/>
+          <p:cNvSpPr/>
+          <p:nvPr/>
+        </p:nvSpPr>
+        <p:spPr>
+          <a:xfrm>
+            <a:off x="8138160" y="2670048"/>
+            <a:ext cx="3291840" cy="274320"/>
+          </a:xfrm>
+          <a:prstGeom prst="rect">
+            <a:avLst/>
+          </a:prstGeom>
+          <a:noFill/>
+          <a:ln/>
+        </p:spPr>
+        <p:txBody>
+          <a:bodyPr wrap="square" lIns="0" tIns="0" rIns="0" bIns="0" rtlCol="0" anchor="t"/>
+          <a:lstStyle/>
+          <a:p>
+            <a:pPr indent="0" marL="0">
+              <a:lnSpc>
+                <a:spcPct val="100000"/>
+              </a:lnSpc>
+              <a:buNone/>
+            </a:pPr>
+            <a:r>
+              <a:rPr lang="en-US" sz="1200" dirty="0">
+                <a:solidFill>
+                  <a:srgbClr val="213B45"/>
+                </a:solidFill>
+              </a:rPr>
+              <a:t>供应商融资余额变化</a:t>
+            </a:r>
+            <a:endParaRPr lang="en-US" sz="1200" dirty="0"/>
+          </a:p>
+        </p:txBody>
+      </p:sp>
+      <p:sp>
+        <p:nvSpPr>
           <p:cNvPr id="13" name="Text 10"/>
           <p:cNvSpPr/>
           <p:nvPr/>
         </p:nvSpPr>
         <p:spPr>
           <a:xfrm>
-            <a:off x="8138160" y="2670048"/>
-            <a:ext cx="3291840" cy="228600"/>
-          </a:xfrm>
-          <a:prstGeom prst="rect">
-            <a:avLst/>
-          </a:prstGeom>
-          <a:noFill/>
-          <a:ln/>
-        </p:spPr>
-        <p:txBody>
-          <a:bodyPr wrap="square" lIns="0" tIns="0" rIns="0" bIns="0" rtlCol="0" anchor="ctr"/>
-          <a:lstStyle/>
-          <a:p>
-            <a:pPr indent="0" marL="0">
-              <a:buNone/>
-            </a:pPr>
-            <a:r>
-              <a:rPr lang="en-US" sz="1200" dirty="0">
-                <a:solidFill>
-                  <a:srgbClr val="213B45"/>
-                </a:solidFill>
-              </a:rPr>
-              <a:t>现金及现金等价物</a:t>
-            </a:r>
-            <a:endParaRPr lang="en-US" sz="1200" dirty="0"/>
-          </a:p>
-        </p:txBody>
-      </p:sp>
-      <p:sp>
-        <p:nvSpPr>
-          <p:cNvPr id="14" name="Text 11"/>
-          <p:cNvSpPr/>
-          <p:nvPr/>
-        </p:nvSpPr>
-        <p:spPr>
-          <a:xfrm>
-            <a:off x="8138160" y="2971800"/>
-            <a:ext cx="3291840" cy="365760"/>
-          </a:xfrm>
-          <a:prstGeom prst="rect">
-            <a:avLst/>
-          </a:prstGeom>
-          <a:noFill/>
-          <a:ln/>
-        </p:spPr>
-        <p:txBody>
-          <a:bodyPr wrap="square" lIns="0" tIns="0" rIns="0" bIns="0" rtlCol="0" anchor="ctr">
-            <a:normAutofit/>
-          </a:bodyPr>
-          <a:lstStyle/>
-          <a:p>
-            <a:pPr indent="0" marL="0">
+            <a:off x="8138160" y="3035808"/>
+            <a:ext cx="3291840" cy="393192"/>
+          </a:xfrm>
+          <a:prstGeom prst="rect">
+            <a:avLst/>
+          </a:prstGeom>
+          <a:noFill/>
+          <a:ln/>
+        </p:spPr>
+        <p:txBody>
+          <a:bodyPr wrap="square" lIns="0" tIns="0" rIns="0" bIns="0" rtlCol="0" anchor="t"/>
+          <a:lstStyle/>
+          <a:p>
+            <a:pPr indent="0" marL="0">
+              <a:lnSpc>
+                <a:spcPct val="100000"/>
+              </a:lnSpc>
               <a:buNone/>
             </a:pPr>
             <a:r>
@@ -4334,7 +4555,7 @@
                   <a:srgbClr val="237F72"/>
                 </a:solidFill>
               </a:rPr>
-              <a:t>2,999.30 亿元人民币</a:t>
+              <a:t>-71.40 亿元人民币</a:t>
             </a:r>
             <a:endParaRPr lang="en-US" sz="1800" dirty="0"/>
           </a:p>
@@ -4342,7 +4563,7 @@
       </p:sp>
       <p:sp>
         <p:nvSpPr>
-          <p:cNvPr id="15" name="Shape 12"/>
+          <p:cNvPr id="14" name="Shape 11"/>
           <p:cNvSpPr/>
           <p:nvPr/>
         </p:nvSpPr>
@@ -4367,26 +4588,132 @@
       </p:sp>
       <p:sp>
         <p:nvSpPr>
+          <p:cNvPr id="15" name="Text 12"/>
+          <p:cNvSpPr/>
+          <p:nvPr/>
+        </p:nvSpPr>
+        <p:spPr>
+          <a:xfrm>
+            <a:off x="8138160" y="3749040"/>
+            <a:ext cx="3291840" cy="274320"/>
+          </a:xfrm>
+          <a:prstGeom prst="rect">
+            <a:avLst/>
+          </a:prstGeom>
+          <a:noFill/>
+          <a:ln/>
+        </p:spPr>
+        <p:txBody>
+          <a:bodyPr wrap="square" lIns="0" tIns="0" rIns="0" bIns="0" rtlCol="0" anchor="t"/>
+          <a:lstStyle/>
+          <a:p>
+            <a:pPr indent="0" marL="0">
+              <a:lnSpc>
+                <a:spcPct val="100000"/>
+              </a:lnSpc>
+              <a:buNone/>
+            </a:pPr>
+            <a:r>
+              <a:rPr lang="en-US" sz="1200" dirty="0">
+                <a:solidFill>
+                  <a:srgbClr val="213B45"/>
+                </a:solidFill>
+              </a:rPr>
+              <a:t>筹资负债表借款债券及租赁合计</a:t>
+            </a:r>
+            <a:endParaRPr lang="en-US" sz="1200" dirty="0"/>
+          </a:p>
+        </p:txBody>
+      </p:sp>
+      <p:sp>
+        <p:nvSpPr>
           <p:cNvPr id="16" name="Text 13"/>
           <p:cNvSpPr/>
           <p:nvPr/>
         </p:nvSpPr>
         <p:spPr>
           <a:xfrm>
-            <a:off x="8138160" y="3749040"/>
-            <a:ext cx="3291840" cy="228600"/>
-          </a:xfrm>
-          <a:prstGeom prst="rect">
-            <a:avLst/>
-          </a:prstGeom>
-          <a:noFill/>
-          <a:ln/>
-        </p:spPr>
-        <p:txBody>
-          <a:bodyPr wrap="square" lIns="0" tIns="0" rIns="0" bIns="0" rtlCol="0" anchor="ctr"/>
-          <a:lstStyle/>
-          <a:p>
-            <a:pPr indent="0" marL="0">
+            <a:off x="8138160" y="4114800"/>
+            <a:ext cx="3291840" cy="393192"/>
+          </a:xfrm>
+          <a:prstGeom prst="rect">
+            <a:avLst/>
+          </a:prstGeom>
+          <a:noFill/>
+          <a:ln/>
+        </p:spPr>
+        <p:txBody>
+          <a:bodyPr wrap="square" lIns="0" tIns="0" rIns="0" bIns="0" rtlCol="0" anchor="t"/>
+          <a:lstStyle/>
+          <a:p>
+            <a:pPr indent="0" marL="0">
+              <a:lnSpc>
+                <a:spcPct val="100000"/>
+              </a:lnSpc>
+              <a:buNone/>
+            </a:pPr>
+            <a:r>
+              <a:rPr lang="en-US" sz="1700" b="1" dirty="0">
+                <a:solidFill>
+                  <a:srgbClr val="237F72"/>
+                </a:solidFill>
+              </a:rPr>
+              <a:t>1,196.01 亿元人民币</a:t>
+            </a:r>
+            <a:endParaRPr lang="en-US" sz="1700" dirty="0"/>
+          </a:p>
+        </p:txBody>
+      </p:sp>
+      <p:sp>
+        <p:nvSpPr>
+          <p:cNvPr id="17" name="Shape 14"/>
+          <p:cNvSpPr/>
+          <p:nvPr/>
+        </p:nvSpPr>
+        <p:spPr>
+          <a:xfrm>
+            <a:off x="7955280" y="4745736"/>
+            <a:ext cx="3657600" cy="950976"/>
+          </a:xfrm>
+          <a:prstGeom prst="rect">
+            <a:avLst/>
+          </a:prstGeom>
+          <a:solidFill>
+            <a:srgbClr val="E6EFEC"/>
+          </a:solidFill>
+          <a:ln w="12700">
+            <a:solidFill>
+              <a:srgbClr val="E6EFEC"/>
+            </a:solidFill>
+            <a:prstDash val="solid"/>
+          </a:ln>
+        </p:spPr>
+      </p:sp>
+      <p:sp>
+        <p:nvSpPr>
+          <p:cNvPr id="18" name="Text 15"/>
+          <p:cNvSpPr/>
+          <p:nvPr/>
+        </p:nvSpPr>
+        <p:spPr>
+          <a:xfrm>
+            <a:off x="8138160" y="4828032"/>
+            <a:ext cx="3291840" cy="274320"/>
+          </a:xfrm>
+          <a:prstGeom prst="rect">
+            <a:avLst/>
+          </a:prstGeom>
+          <a:noFill/>
+          <a:ln/>
+        </p:spPr>
+        <p:txBody>
+          <a:bodyPr wrap="square" lIns="0" tIns="0" rIns="0" bIns="0" rtlCol="0" anchor="t"/>
+          <a:lstStyle/>
+          <a:p>
+            <a:pPr indent="0" marL="0">
+              <a:lnSpc>
+                <a:spcPct val="100000"/>
+              </a:lnSpc>
               <a:buNone/>
             </a:pPr>
             <a:r>
@@ -4395,7 +4722,7 @@
                   <a:srgbClr val="213B45"/>
                 </a:solidFill>
               </a:rPr>
-              <a:t>排除于现金等价物的货币资金</a:t>
+              <a:t>含供应商融资的债务敏感性口径</a:t>
             </a:r>
             <a:endParaRPr lang="en-US" sz="1200" dirty="0"/>
           </a:p>
@@ -4403,45 +4730,46 @@
       </p:sp>
       <p:sp>
         <p:nvSpPr>
-          <p:cNvPr id="17" name="Text 14"/>
-          <p:cNvSpPr/>
-          <p:nvPr/>
-        </p:nvSpPr>
-        <p:spPr>
-          <a:xfrm>
-            <a:off x="8138160" y="4050792"/>
-            <a:ext cx="3291840" cy="365760"/>
-          </a:xfrm>
-          <a:prstGeom prst="rect">
-            <a:avLst/>
-          </a:prstGeom>
-          <a:noFill/>
-          <a:ln/>
-        </p:spPr>
-        <p:txBody>
-          <a:bodyPr wrap="square" lIns="0" tIns="0" rIns="0" bIns="0" rtlCol="0" anchor="ctr">
-            <a:normAutofit/>
-          </a:bodyPr>
-          <a:lstStyle/>
-          <a:p>
-            <a:pPr indent="0" marL="0">
-              <a:buNone/>
-            </a:pPr>
-            <a:r>
-              <a:rPr lang="en-US" sz="1800" b="1" dirty="0">
+          <p:cNvPr id="19" name="Text 16"/>
+          <p:cNvSpPr/>
+          <p:nvPr/>
+        </p:nvSpPr>
+        <p:spPr>
+          <a:xfrm>
+            <a:off x="8138160" y="5193792"/>
+            <a:ext cx="3291840" cy="393192"/>
+          </a:xfrm>
+          <a:prstGeom prst="rect">
+            <a:avLst/>
+          </a:prstGeom>
+          <a:noFill/>
+          <a:ln/>
+        </p:spPr>
+        <p:txBody>
+          <a:bodyPr wrap="square" lIns="0" tIns="0" rIns="0" bIns="0" rtlCol="0" anchor="t"/>
+          <a:lstStyle/>
+          <a:p>
+            <a:pPr indent="0" marL="0">
+              <a:lnSpc>
+                <a:spcPct val="100000"/>
+              </a:lnSpc>
+              <a:buNone/>
+            </a:pPr>
+            <a:r>
+              <a:rPr lang="en-US" sz="1700" b="1" dirty="0">
                 <a:solidFill>
                   <a:srgbClr val="237F72"/>
                 </a:solidFill>
               </a:rPr>
-              <a:t>335.83 亿元人民币</a:t>
-            </a:r>
-            <a:endParaRPr lang="en-US" sz="1800" dirty="0"/>
-          </a:p>
-        </p:txBody>
-      </p:sp>
-      <p:sp>
-        <p:nvSpPr>
-          <p:cNvPr id="18" name="Text 15"/>
+              <a:t>1,568.24 亿元人民币</a:t>
+            </a:r>
+            <a:endParaRPr lang="en-US" sz="1700" dirty="0"/>
+          </a:p>
+        </p:txBody>
+      </p:sp>
+      <p:sp>
+        <p:nvSpPr>
+          <p:cNvPr id="20" name="Text 17"/>
           <p:cNvSpPr/>
           <p:nvPr/>
         </p:nvSpPr>
@@ -4457,12 +4785,13 @@
           <a:ln/>
         </p:spPr>
         <p:txBody>
-          <a:bodyPr wrap="square" lIns="0" tIns="0" rIns="0" bIns="0" rtlCol="0" anchor="ctr">
-            <a:normAutofit/>
-          </a:bodyPr>
-          <a:lstStyle/>
-          <a:p>
-            <a:pPr indent="0" marL="0">
+          <a:bodyPr wrap="square" lIns="0" tIns="0" rIns="0" bIns="0" rtlCol="0" anchor="t"/>
+          <a:lstStyle/>
+          <a:p>
+            <a:pPr indent="0" marL="0">
+              <a:lnSpc>
+                <a:spcPct val="100000"/>
+              </a:lnSpc>
               <a:buNone/>
             </a:pPr>
             <a:r>
@@ -4471,7 +4800,7 @@
                   <a:srgbClr val="586874"/>
                 </a:solidFill>
               </a:rPr>
-              <a:t>来源记录 E_BS / E_CASH / E_CF / cash_composition / debt；完整位置见报告与底稿</a:t>
+              <a:t>来源记录 E_SUPPLY / E_DEBT / supply_components 等；全部来源及位置见报告、底稿与备注</a:t>
             </a:r>
             <a:endParaRPr lang="en-US" sz="900" dirty="0"/>
           </a:p>
@@ -4527,10 +4856,13 @@
           <a:ln/>
         </p:spPr>
         <p:txBody>
-          <a:bodyPr wrap="square" lIns="0" tIns="0" rIns="0" bIns="0" rtlCol="0" anchor="ctr"/>
-          <a:lstStyle/>
-          <a:p>
-            <a:pPr indent="0" marL="0">
+          <a:bodyPr wrap="square" lIns="0" tIns="0" rIns="0" bIns="0" rtlCol="0" anchor="t"/>
+          <a:lstStyle/>
+          <a:p>
+            <a:pPr indent="0" marL="0">
+              <a:lnSpc>
+                <a:spcPct val="100000"/>
+              </a:lnSpc>
               <a:buNone/>
             </a:pPr>
             <a:r>
@@ -4539,7 +4871,7 @@
                   <a:srgbClr val="213B45"/>
                 </a:solidFill>
               </a:rPr>
-              <a:t>资产估计与售后义务</a:t>
+              <a:t>资金可用性与流动性</a:t>
             </a:r>
             <a:endParaRPr lang="en-US" sz="2700" dirty="0"/>
           </a:p>
@@ -4613,19 +4945,22 @@
         <p:spPr>
           <a:xfrm>
             <a:off x="594360" y="1444752"/>
-            <a:ext cx="6995160" cy="685800"/>
-          </a:xfrm>
-          <a:prstGeom prst="rect">
-            <a:avLst/>
-          </a:prstGeom>
-          <a:noFill/>
-          <a:ln/>
-        </p:spPr>
-        <p:txBody>
-          <a:bodyPr wrap="square" lIns="0" tIns="0" rIns="0" bIns="0" rtlCol="0" anchor="ctr"/>
-          <a:lstStyle/>
-          <a:p>
-            <a:pPr indent="0" marL="0">
+            <a:ext cx="6995160" cy="1005840"/>
+          </a:xfrm>
+          <a:prstGeom prst="rect">
+            <a:avLst/>
+          </a:prstGeom>
+          <a:noFill/>
+          <a:ln/>
+        </p:spPr>
+        <p:txBody>
+          <a:bodyPr wrap="square" lIns="0" tIns="0" rIns="0" bIns="0" rtlCol="0" anchor="t"/>
+          <a:lstStyle/>
+          <a:p>
+            <a:pPr indent="0" marL="0">
+              <a:lnSpc>
+                <a:spcPct val="100000"/>
+              </a:lnSpc>
               <a:buNone/>
             </a:pPr>
             <a:r>
@@ -4634,7 +4969,7 @@
                   <a:srgbClr val="213B45"/>
                 </a:solidFill>
               </a:rPr>
-              <a:t>扩张中的减值与售后成本需要单独验证</a:t>
+              <a:t>账面资金不能直接当法人偿债现金</a:t>
             </a:r>
             <a:endParaRPr lang="en-US" sz="2200" dirty="0"/>
           </a:p>
@@ -4648,91 +4983,134 @@
         </p:nvSpPr>
         <p:spPr>
           <a:xfrm>
-            <a:off x="594360" y="2331720"/>
-            <a:ext cx="6995160" cy="1828800"/>
-          </a:xfrm>
-          <a:prstGeom prst="rect">
-            <a:avLst/>
-          </a:prstGeom>
-          <a:noFill/>
-          <a:ln/>
-        </p:spPr>
-        <p:txBody>
-          <a:bodyPr wrap="square" lIns="0" tIns="0" rIns="0" bIns="0" rtlCol="0" anchor="ctr">
-            <a:normAutofit/>
-          </a:bodyPr>
-          <a:lstStyle/>
-          <a:p>
-            <a:pPr indent="0" marL="0">
-              <a:buNone/>
-            </a:pPr>
-            <a:r>
-              <a:rPr lang="en-US" sz="1900" dirty="0">
+            <a:off x="594360" y="2624328"/>
+            <a:ext cx="6995160" cy="3063240"/>
+          </a:xfrm>
+          <a:prstGeom prst="rect">
+            <a:avLst/>
+          </a:prstGeom>
+          <a:noFill/>
+          <a:ln/>
+        </p:spPr>
+        <p:txBody>
+          <a:bodyPr wrap="square" lIns="0" tIns="0" rIns="0" bIns="0" rtlCol="0" anchor="t"/>
+          <a:lstStyle/>
+          <a:p>
+            <a:pPr indent="0" marL="0">
+              <a:lnSpc>
+                <a:spcPct val="100000"/>
+              </a:lnSpc>
+              <a:buNone/>
+            </a:pPr>
+            <a:r>
+              <a:rPr lang="en-US" sz="1800" dirty="0">
                 <a:solidFill>
                   <a:srgbClr val="1F2933"/>
                 </a:solidFill>
               </a:rPr>
-              <a:t>被测试固定资产组减值前账面28.66 亿元人民币、可收回额2.06 亿元人民币；售后预计负债512.33 亿元人民币。</a:t>
-            </a:r>
-            <a:endParaRPr lang="en-US" sz="1900" dirty="0"/>
-          </a:p>
-        </p:txBody>
-      </p:sp>
-      <p:sp>
-        <p:nvSpPr>
-          <p:cNvPr id="7" name="Text 5"/>
-          <p:cNvSpPr/>
-          <p:nvPr/>
-        </p:nvSpPr>
-        <p:spPr>
-          <a:xfrm>
-            <a:off x="594360" y="4434840"/>
-            <a:ext cx="6995160" cy="1325880"/>
-          </a:xfrm>
-          <a:prstGeom prst="rect">
-            <a:avLst/>
-          </a:prstGeom>
-          <a:noFill/>
-          <a:ln/>
-        </p:spPr>
-        <p:txBody>
-          <a:bodyPr wrap="square" lIns="0" tIns="0" rIns="0" bIns="0" rtlCol="0" anchor="ctr">
-            <a:normAutofit/>
-          </a:bodyPr>
-          <a:lstStyle/>
-          <a:p>
-            <a:pPr indent="0" marL="0">
-              <a:buNone/>
-            </a:pPr>
-            <a:r>
-              <a:rPr lang="en-US" sz="1600" dirty="0">
-                <a:solidFill>
-                  <a:srgbClr val="56646C"/>
+              <a:t>货币资金3,335.13 亿元人民币中，现金及现金等价物</a:t>
+            </a:r>
+            <a:endParaRPr lang="en-US" sz="1800" dirty="0"/>
+          </a:p>
+          <a:p>
+            <a:pPr indent="0" marL="0">
+              <a:lnSpc>
+                <a:spcPct val="100000"/>
+              </a:lnSpc>
+              <a:buNone/>
+            </a:pPr>
+            <a:r>
+              <a:rPr lang="en-US" sz="1800" dirty="0">
+                <a:solidFill>
+                  <a:srgbClr val="1F2933"/>
+                </a:solidFill>
+              </a:rPr>
+              <a:t>2,999.30 亿元人民币，排除项目335.83 亿元</a:t>
+            </a:r>
+            <a:endParaRPr lang="en-US" sz="1800" dirty="0"/>
+          </a:p>
+          <a:p>
+            <a:pPr indent="0" marL="0">
+              <a:lnSpc>
+                <a:spcPct val="100000"/>
+              </a:lnSpc>
+              <a:buNone/>
+            </a:pPr>
+            <a:r>
+              <a:rPr lang="en-US" sz="1800" dirty="0">
+                <a:solidFill>
+                  <a:srgbClr val="1F2933"/>
+                </a:solidFill>
+              </a:rPr>
+              <a:t>人民币；现金桥保留千元级舍入差。</a:t>
+            </a:r>
+            <a:endParaRPr lang="en-US" sz="1800" dirty="0"/>
+          </a:p>
+          <a:p>
+            <a:pPr indent="0" marL="0">
+              <a:lnSpc>
+                <a:spcPct val="100000"/>
+              </a:lnSpc>
+              <a:buNone/>
+            </a:pPr>
+            <a:endParaRPr lang="en-US" sz="1800" dirty="0"/>
+          </a:p>
+          <a:p>
+            <a:pPr indent="0" marL="0">
+              <a:lnSpc>
+                <a:spcPct val="100000"/>
+              </a:lnSpc>
+              <a:buNone/>
+            </a:pPr>
+            <a:r>
+              <a:rPr lang="en-US" sz="1800" dirty="0">
+                <a:solidFill>
+                  <a:srgbClr val="1F2933"/>
                 </a:solidFill>
               </a:rPr>
               <a:t>判断改变条件</a:t>
             </a:r>
-            <a:endParaRPr lang="en-US" sz="1600" dirty="0"/>
-          </a:p>
-          <a:p>
-            <a:pPr indent="0" marL="0">
-              <a:buNone/>
-            </a:pPr>
-            <a:r>
-              <a:rPr lang="en-US" sz="1600" dirty="0">
-                <a:solidFill>
-                  <a:srgbClr val="56646C"/>
-                </a:solidFill>
-              </a:rPr>
-              <a:t>取得资产组预算/折现参数与历史兑现，及售后准备新增、使用、冲回和批次维修数据后，形成可收回额和准备敏感性。</a:t>
-            </a:r>
-            <a:endParaRPr lang="en-US" sz="1600" dirty="0"/>
-          </a:p>
-        </p:txBody>
-      </p:sp>
-      <p:sp>
-        <p:nvSpPr>
-          <p:cNvPr id="9" name="Shape 6"/>
+            <a:endParaRPr lang="en-US" sz="1800" dirty="0"/>
+          </a:p>
+          <a:p>
+            <a:pPr indent="0" marL="0">
+              <a:lnSpc>
+                <a:spcPct val="100000"/>
+              </a:lnSpc>
+              <a:buNone/>
+            </a:pPr>
+            <a:r>
+              <a:rPr lang="en-US" sz="1800" dirty="0">
+                <a:solidFill>
+                  <a:srgbClr val="1F2933"/>
+                </a:solidFill>
+              </a:rPr>
+              <a:t>按法人取得账户限制、债务期限和承诺授信条件，才能完成分期</a:t>
+            </a:r>
+            <a:endParaRPr lang="en-US" sz="1800" dirty="0"/>
+          </a:p>
+          <a:p>
+            <a:pPr indent="0" marL="0">
+              <a:lnSpc>
+                <a:spcPct val="100000"/>
+              </a:lnSpc>
+              <a:buNone/>
+            </a:pPr>
+            <a:r>
+              <a:rPr lang="en-US" sz="1800" dirty="0">
+                <a:solidFill>
+                  <a:srgbClr val="1F2933"/>
+                </a:solidFill>
+              </a:rPr>
+              <a:t>流动性覆盖。</a:t>
+            </a:r>
+            <a:endParaRPr lang="en-US" sz="1800" dirty="0"/>
+          </a:p>
+        </p:txBody>
+      </p:sp>
+      <p:sp>
+        <p:nvSpPr>
+          <p:cNvPr id="8" name="Shape 5"/>
           <p:cNvSpPr/>
           <p:nvPr/>
         </p:nvSpPr>
@@ -4757,81 +5135,85 @@
       </p:sp>
       <p:sp>
         <p:nvSpPr>
+          <p:cNvPr id="9" name="Text 6"/>
+          <p:cNvSpPr/>
+          <p:nvPr/>
+        </p:nvSpPr>
+        <p:spPr>
+          <a:xfrm>
+            <a:off x="8138160" y="1591056"/>
+            <a:ext cx="3291840" cy="274320"/>
+          </a:xfrm>
+          <a:prstGeom prst="rect">
+            <a:avLst/>
+          </a:prstGeom>
+          <a:noFill/>
+          <a:ln/>
+        </p:spPr>
+        <p:txBody>
+          <a:bodyPr wrap="square" lIns="0" tIns="0" rIns="0" bIns="0" rtlCol="0" anchor="t"/>
+          <a:lstStyle/>
+          <a:p>
+            <a:pPr indent="0" marL="0">
+              <a:lnSpc>
+                <a:spcPct val="100000"/>
+              </a:lnSpc>
+              <a:buNone/>
+            </a:pPr>
+            <a:r>
+              <a:rPr lang="en-US" sz="1200" dirty="0">
+                <a:solidFill>
+                  <a:srgbClr val="213B45"/>
+                </a:solidFill>
+              </a:rPr>
+              <a:t>货币资金</a:t>
+            </a:r>
+            <a:endParaRPr lang="en-US" sz="1200" dirty="0"/>
+          </a:p>
+        </p:txBody>
+      </p:sp>
+      <p:sp>
+        <p:nvSpPr>
           <p:cNvPr id="10" name="Text 7"/>
           <p:cNvSpPr/>
           <p:nvPr/>
         </p:nvSpPr>
         <p:spPr>
           <a:xfrm>
-            <a:off x="8138160" y="1591056"/>
-            <a:ext cx="3291840" cy="228600"/>
-          </a:xfrm>
-          <a:prstGeom prst="rect">
-            <a:avLst/>
-          </a:prstGeom>
-          <a:noFill/>
-          <a:ln/>
-        </p:spPr>
-        <p:txBody>
-          <a:bodyPr wrap="square" lIns="0" tIns="0" rIns="0" bIns="0" rtlCol="0" anchor="ctr"/>
-          <a:lstStyle/>
-          <a:p>
-            <a:pPr indent="0" marL="0">
-              <a:buNone/>
-            </a:pPr>
-            <a:r>
-              <a:rPr lang="en-US" sz="1200" dirty="0">
-                <a:solidFill>
-                  <a:srgbClr val="213B45"/>
-                </a:solidFill>
-              </a:rPr>
-              <a:t>被测试相关资产减值前账面额</a:t>
-            </a:r>
-            <a:endParaRPr lang="en-US" sz="1200" dirty="0"/>
-          </a:p>
-        </p:txBody>
-      </p:sp>
-      <p:sp>
-        <p:nvSpPr>
-          <p:cNvPr id="11" name="Text 8"/>
-          <p:cNvSpPr/>
-          <p:nvPr/>
-        </p:nvSpPr>
-        <p:spPr>
-          <a:xfrm>
-            <a:off x="8138160" y="1892808"/>
-            <a:ext cx="3291840" cy="365760"/>
-          </a:xfrm>
-          <a:prstGeom prst="rect">
-            <a:avLst/>
-          </a:prstGeom>
-          <a:noFill/>
-          <a:ln/>
-        </p:spPr>
-        <p:txBody>
-          <a:bodyPr wrap="square" lIns="0" tIns="0" rIns="0" bIns="0" rtlCol="0" anchor="ctr">
-            <a:normAutofit/>
-          </a:bodyPr>
-          <a:lstStyle/>
-          <a:p>
-            <a:pPr indent="0" marL="0">
-              <a:buNone/>
-            </a:pPr>
-            <a:r>
-              <a:rPr lang="en-US" sz="1800" b="1" dirty="0">
+            <a:off x="8138160" y="1956816"/>
+            <a:ext cx="3291840" cy="393192"/>
+          </a:xfrm>
+          <a:prstGeom prst="rect">
+            <a:avLst/>
+          </a:prstGeom>
+          <a:noFill/>
+          <a:ln/>
+        </p:spPr>
+        <p:txBody>
+          <a:bodyPr wrap="square" lIns="0" tIns="0" rIns="0" bIns="0" rtlCol="0" anchor="t"/>
+          <a:lstStyle/>
+          <a:p>
+            <a:pPr indent="0" marL="0">
+              <a:lnSpc>
+                <a:spcPct val="100000"/>
+              </a:lnSpc>
+              <a:buNone/>
+            </a:pPr>
+            <a:r>
+              <a:rPr lang="en-US" sz="1700" b="1" dirty="0">
                 <a:solidFill>
                   <a:srgbClr val="237F72"/>
                 </a:solidFill>
               </a:rPr>
-              <a:t>28.66 亿元人民币</a:t>
-            </a:r>
-            <a:endParaRPr lang="en-US" sz="1800" dirty="0"/>
-          </a:p>
-        </p:txBody>
-      </p:sp>
-      <p:sp>
-        <p:nvSpPr>
-          <p:cNvPr id="12" name="Shape 9"/>
+              <a:t>3,335.13 亿元人民币</a:t>
+            </a:r>
+            <a:endParaRPr lang="en-US" sz="1700" dirty="0"/>
+          </a:p>
+        </p:txBody>
+      </p:sp>
+      <p:sp>
+        <p:nvSpPr>
+          <p:cNvPr id="11" name="Shape 8"/>
           <p:cNvSpPr/>
           <p:nvPr/>
         </p:nvSpPr>
@@ -4856,81 +5238,85 @@
       </p:sp>
       <p:sp>
         <p:nvSpPr>
+          <p:cNvPr id="12" name="Text 9"/>
+          <p:cNvSpPr/>
+          <p:nvPr/>
+        </p:nvSpPr>
+        <p:spPr>
+          <a:xfrm>
+            <a:off x="8138160" y="2670048"/>
+            <a:ext cx="3291840" cy="274320"/>
+          </a:xfrm>
+          <a:prstGeom prst="rect">
+            <a:avLst/>
+          </a:prstGeom>
+          <a:noFill/>
+          <a:ln/>
+        </p:spPr>
+        <p:txBody>
+          <a:bodyPr wrap="square" lIns="0" tIns="0" rIns="0" bIns="0" rtlCol="0" anchor="t"/>
+          <a:lstStyle/>
+          <a:p>
+            <a:pPr indent="0" marL="0">
+              <a:lnSpc>
+                <a:spcPct val="100000"/>
+              </a:lnSpc>
+              <a:buNone/>
+            </a:pPr>
+            <a:r>
+              <a:rPr lang="en-US" sz="1200" dirty="0">
+                <a:solidFill>
+                  <a:srgbClr val="213B45"/>
+                </a:solidFill>
+              </a:rPr>
+              <a:t>现金及现金等价物</a:t>
+            </a:r>
+            <a:endParaRPr lang="en-US" sz="1200" dirty="0"/>
+          </a:p>
+        </p:txBody>
+      </p:sp>
+      <p:sp>
+        <p:nvSpPr>
           <p:cNvPr id="13" name="Text 10"/>
           <p:cNvSpPr/>
           <p:nvPr/>
         </p:nvSpPr>
         <p:spPr>
           <a:xfrm>
-            <a:off x="8138160" y="2670048"/>
-            <a:ext cx="3291840" cy="228600"/>
-          </a:xfrm>
-          <a:prstGeom prst="rect">
-            <a:avLst/>
-          </a:prstGeom>
-          <a:noFill/>
-          <a:ln/>
-        </p:spPr>
-        <p:txBody>
-          <a:bodyPr wrap="square" lIns="0" tIns="0" rIns="0" bIns="0" rtlCol="0" anchor="ctr"/>
-          <a:lstStyle/>
-          <a:p>
-            <a:pPr indent="0" marL="0">
-              <a:buNone/>
-            </a:pPr>
-            <a:r>
-              <a:rPr lang="en-US" sz="1200" dirty="0">
-                <a:solidFill>
-                  <a:srgbClr val="213B45"/>
-                </a:solidFill>
-              </a:rPr>
-              <a:t>该组可收回金额</a:t>
-            </a:r>
-            <a:endParaRPr lang="en-US" sz="1200" dirty="0"/>
-          </a:p>
-        </p:txBody>
-      </p:sp>
-      <p:sp>
-        <p:nvSpPr>
-          <p:cNvPr id="14" name="Text 11"/>
-          <p:cNvSpPr/>
-          <p:nvPr/>
-        </p:nvSpPr>
-        <p:spPr>
-          <a:xfrm>
-            <a:off x="8138160" y="2971800"/>
-            <a:ext cx="3291840" cy="365760"/>
-          </a:xfrm>
-          <a:prstGeom prst="rect">
-            <a:avLst/>
-          </a:prstGeom>
-          <a:noFill/>
-          <a:ln/>
-        </p:spPr>
-        <p:txBody>
-          <a:bodyPr wrap="square" lIns="0" tIns="0" rIns="0" bIns="0" rtlCol="0" anchor="ctr">
-            <a:normAutofit/>
-          </a:bodyPr>
-          <a:lstStyle/>
-          <a:p>
-            <a:pPr indent="0" marL="0">
-              <a:buNone/>
-            </a:pPr>
-            <a:r>
-              <a:rPr lang="en-US" sz="1800" b="1" dirty="0">
+            <a:off x="8138160" y="3035808"/>
+            <a:ext cx="3291840" cy="393192"/>
+          </a:xfrm>
+          <a:prstGeom prst="rect">
+            <a:avLst/>
+          </a:prstGeom>
+          <a:noFill/>
+          <a:ln/>
+        </p:spPr>
+        <p:txBody>
+          <a:bodyPr wrap="square" lIns="0" tIns="0" rIns="0" bIns="0" rtlCol="0" anchor="t"/>
+          <a:lstStyle/>
+          <a:p>
+            <a:pPr indent="0" marL="0">
+              <a:lnSpc>
+                <a:spcPct val="100000"/>
+              </a:lnSpc>
+              <a:buNone/>
+            </a:pPr>
+            <a:r>
+              <a:rPr lang="en-US" sz="1700" b="1" dirty="0">
                 <a:solidFill>
                   <a:srgbClr val="237F72"/>
                 </a:solidFill>
               </a:rPr>
-              <a:t>2.06 亿元人民币</a:t>
-            </a:r>
-            <a:endParaRPr lang="en-US" sz="1800" dirty="0"/>
-          </a:p>
-        </p:txBody>
-      </p:sp>
-      <p:sp>
-        <p:nvSpPr>
-          <p:cNvPr id="15" name="Shape 12"/>
+              <a:t>2,999.30 亿元人民币</a:t>
+            </a:r>
+            <a:endParaRPr lang="en-US" sz="1700" dirty="0"/>
+          </a:p>
+        </p:txBody>
+      </p:sp>
+      <p:sp>
+        <p:nvSpPr>
+          <p:cNvPr id="14" name="Shape 11"/>
           <p:cNvSpPr/>
           <p:nvPr/>
         </p:nvSpPr>
@@ -4955,180 +5341,85 @@
       </p:sp>
       <p:sp>
         <p:nvSpPr>
+          <p:cNvPr id="15" name="Text 12"/>
+          <p:cNvSpPr/>
+          <p:nvPr/>
+        </p:nvSpPr>
+        <p:spPr>
+          <a:xfrm>
+            <a:off x="8138160" y="3749040"/>
+            <a:ext cx="3291840" cy="274320"/>
+          </a:xfrm>
+          <a:prstGeom prst="rect">
+            <a:avLst/>
+          </a:prstGeom>
+          <a:noFill/>
+          <a:ln/>
+        </p:spPr>
+        <p:txBody>
+          <a:bodyPr wrap="square" lIns="0" tIns="0" rIns="0" bIns="0" rtlCol="0" anchor="t"/>
+          <a:lstStyle/>
+          <a:p>
+            <a:pPr indent="0" marL="0">
+              <a:lnSpc>
+                <a:spcPct val="100000"/>
+              </a:lnSpc>
+              <a:buNone/>
+            </a:pPr>
+            <a:r>
+              <a:rPr lang="en-US" sz="1200" dirty="0">
+                <a:solidFill>
+                  <a:srgbClr val="213B45"/>
+                </a:solidFill>
+              </a:rPr>
+              <a:t>排除于现金等价物的货币资金</a:t>
+            </a:r>
+            <a:endParaRPr lang="en-US" sz="1200" dirty="0"/>
+          </a:p>
+        </p:txBody>
+      </p:sp>
+      <p:sp>
+        <p:nvSpPr>
           <p:cNvPr id="16" name="Text 13"/>
           <p:cNvSpPr/>
           <p:nvPr/>
         </p:nvSpPr>
         <p:spPr>
           <a:xfrm>
-            <a:off x="8138160" y="3749040"/>
-            <a:ext cx="3291840" cy="228600"/>
-          </a:xfrm>
-          <a:prstGeom prst="rect">
-            <a:avLst/>
-          </a:prstGeom>
-          <a:noFill/>
-          <a:ln/>
-        </p:spPr>
-        <p:txBody>
-          <a:bodyPr wrap="square" lIns="0" tIns="0" rIns="0" bIns="0" rtlCol="0" anchor="ctr"/>
-          <a:lstStyle/>
-          <a:p>
-            <a:pPr indent="0" marL="0">
-              <a:buNone/>
-            </a:pPr>
-            <a:r>
-              <a:rPr lang="en-US" sz="1200" dirty="0">
-                <a:solidFill>
-                  <a:srgbClr val="213B45"/>
-                </a:solidFill>
-              </a:rPr>
-              <a:t>固定资产本期计提减值</a:t>
-            </a:r>
-            <a:endParaRPr lang="en-US" sz="1200" dirty="0"/>
+            <a:off x="8138160" y="4114800"/>
+            <a:ext cx="3291840" cy="393192"/>
+          </a:xfrm>
+          <a:prstGeom prst="rect">
+            <a:avLst/>
+          </a:prstGeom>
+          <a:noFill/>
+          <a:ln/>
+        </p:spPr>
+        <p:txBody>
+          <a:bodyPr wrap="square" lIns="0" tIns="0" rIns="0" bIns="0" rtlCol="0" anchor="t"/>
+          <a:lstStyle/>
+          <a:p>
+            <a:pPr indent="0" marL="0">
+              <a:lnSpc>
+                <a:spcPct val="100000"/>
+              </a:lnSpc>
+              <a:buNone/>
+            </a:pPr>
+            <a:r>
+              <a:rPr lang="en-US" sz="1800" b="1" dirty="0">
+                <a:solidFill>
+                  <a:srgbClr val="237F72"/>
+                </a:solidFill>
+              </a:rPr>
+              <a:t>335.83 亿元人民币</a:t>
+            </a:r>
+            <a:endParaRPr lang="en-US" sz="1800" dirty="0"/>
           </a:p>
         </p:txBody>
       </p:sp>
       <p:sp>
         <p:nvSpPr>
           <p:cNvPr id="17" name="Text 14"/>
-          <p:cNvSpPr/>
-          <p:nvPr/>
-        </p:nvSpPr>
-        <p:spPr>
-          <a:xfrm>
-            <a:off x="8138160" y="4050792"/>
-            <a:ext cx="3291840" cy="365760"/>
-          </a:xfrm>
-          <a:prstGeom prst="rect">
-            <a:avLst/>
-          </a:prstGeom>
-          <a:noFill/>
-          <a:ln/>
-        </p:spPr>
-        <p:txBody>
-          <a:bodyPr wrap="square" lIns="0" tIns="0" rIns="0" bIns="0" rtlCol="0" anchor="ctr">
-            <a:normAutofit/>
-          </a:bodyPr>
-          <a:lstStyle/>
-          <a:p>
-            <a:pPr indent="0" marL="0">
-              <a:buNone/>
-            </a:pPr>
-            <a:r>
-              <a:rPr lang="en-US" sz="1800" b="1" dirty="0">
-                <a:solidFill>
-                  <a:srgbClr val="237F72"/>
-                </a:solidFill>
-              </a:rPr>
-              <a:t>26.60 亿元人民币</a:t>
-            </a:r>
-            <a:endParaRPr lang="en-US" sz="1800" dirty="0"/>
-          </a:p>
-        </p:txBody>
-      </p:sp>
-      <p:sp>
-        <p:nvSpPr>
-          <p:cNvPr id="18" name="Shape 15"/>
-          <p:cNvSpPr/>
-          <p:nvPr/>
-        </p:nvSpPr>
-        <p:spPr>
-          <a:xfrm>
-            <a:off x="7955280" y="4745736"/>
-            <a:ext cx="3657600" cy="950976"/>
-          </a:xfrm>
-          <a:prstGeom prst="rect">
-            <a:avLst/>
-          </a:prstGeom>
-          <a:solidFill>
-            <a:srgbClr val="E6EFEC"/>
-          </a:solidFill>
-          <a:ln w="12700">
-            <a:solidFill>
-              <a:srgbClr val="E6EFEC"/>
-            </a:solidFill>
-            <a:prstDash val="solid"/>
-          </a:ln>
-        </p:spPr>
-      </p:sp>
-      <p:sp>
-        <p:nvSpPr>
-          <p:cNvPr id="19" name="Text 16"/>
-          <p:cNvSpPr/>
-          <p:nvPr/>
-        </p:nvSpPr>
-        <p:spPr>
-          <a:xfrm>
-            <a:off x="8138160" y="4828032"/>
-            <a:ext cx="3291840" cy="228600"/>
-          </a:xfrm>
-          <a:prstGeom prst="rect">
-            <a:avLst/>
-          </a:prstGeom>
-          <a:noFill/>
-          <a:ln/>
-        </p:spPr>
-        <p:txBody>
-          <a:bodyPr wrap="square" lIns="0" tIns="0" rIns="0" bIns="0" rtlCol="0" anchor="ctr"/>
-          <a:lstStyle/>
-          <a:p>
-            <a:pPr indent="0" marL="0">
-              <a:buNone/>
-            </a:pPr>
-            <a:r>
-              <a:rPr lang="en-US" sz="1200" dirty="0">
-                <a:solidFill>
-                  <a:srgbClr val="213B45"/>
-                </a:solidFill>
-              </a:rPr>
-              <a:t>售后综合服务预计负债</a:t>
-            </a:r>
-            <a:endParaRPr lang="en-US" sz="1200" dirty="0"/>
-          </a:p>
-        </p:txBody>
-      </p:sp>
-      <p:sp>
-        <p:nvSpPr>
-          <p:cNvPr id="20" name="Text 17"/>
-          <p:cNvSpPr/>
-          <p:nvPr/>
-        </p:nvSpPr>
-        <p:spPr>
-          <a:xfrm>
-            <a:off x="8138160" y="5129784"/>
-            <a:ext cx="3291840" cy="365760"/>
-          </a:xfrm>
-          <a:prstGeom prst="rect">
-            <a:avLst/>
-          </a:prstGeom>
-          <a:noFill/>
-          <a:ln/>
-        </p:spPr>
-        <p:txBody>
-          <a:bodyPr wrap="square" lIns="0" tIns="0" rIns="0" bIns="0" rtlCol="0" anchor="ctr">
-            <a:normAutofit/>
-          </a:bodyPr>
-          <a:lstStyle/>
-          <a:p>
-            <a:pPr indent="0" marL="0">
-              <a:buNone/>
-            </a:pPr>
-            <a:r>
-              <a:rPr lang="en-US" sz="1800" b="1" dirty="0">
-                <a:solidFill>
-                  <a:srgbClr val="237F72"/>
-                </a:solidFill>
-              </a:rPr>
-              <a:t>512.33 亿元人民币</a:t>
-            </a:r>
-            <a:endParaRPr lang="en-US" sz="1800" dirty="0"/>
-          </a:p>
-        </p:txBody>
-      </p:sp>
-      <p:sp>
-        <p:nvSpPr>
-          <p:cNvPr id="21" name="Text 18"/>
           <p:cNvSpPr/>
           <p:nvPr/>
         </p:nvSpPr>
@@ -5144,12 +5435,13 @@
           <a:ln/>
         </p:spPr>
         <p:txBody>
-          <a:bodyPr wrap="square" lIns="0" tIns="0" rIns="0" bIns="0" rtlCol="0" anchor="ctr">
-            <a:normAutofit/>
-          </a:bodyPr>
-          <a:lstStyle/>
-          <a:p>
-            <a:pPr indent="0" marL="0">
+          <a:bodyPr wrap="square" lIns="0" tIns="0" rIns="0" bIns="0" rtlCol="0" anchor="t"/>
+          <a:lstStyle/>
+          <a:p>
+            <a:pPr indent="0" marL="0">
+              <a:lnSpc>
+                <a:spcPct val="100000"/>
+              </a:lnSpc>
               <a:buNone/>
             </a:pPr>
             <a:r>
@@ -5158,7 +5450,7 @@
                   <a:srgbClr val="586874"/>
                 </a:solidFill>
               </a:rPr>
-              <a:t>来源记录 E_PPE / E_WARRANTY / E_POLICY / ppe_imp_recalc；完整位置见报告与底稿</a:t>
+              <a:t>来源记录 E_BS / E_CASH / E_CF 等；全部来源及位置见报告、底稿与备注</a:t>
             </a:r>
             <a:endParaRPr lang="en-US" sz="900" dirty="0"/>
           </a:p>
@@ -5214,10 +5506,13 @@
           <a:ln/>
         </p:spPr>
         <p:txBody>
-          <a:bodyPr wrap="square" lIns="0" tIns="0" rIns="0" bIns="0" rtlCol="0" anchor="ctr"/>
-          <a:lstStyle/>
-          <a:p>
-            <a:pPr indent="0" marL="0">
+          <a:bodyPr wrap="square" lIns="0" tIns="0" rIns="0" bIns="0" rtlCol="0" anchor="t"/>
+          <a:lstStyle/>
+          <a:p>
+            <a:pPr indent="0" marL="0">
+              <a:lnSpc>
+                <a:spcPct val="100000"/>
+              </a:lnSpc>
               <a:buNone/>
             </a:pPr>
             <a:r>
@@ -5226,7 +5521,7 @@
                   <a:srgbClr val="213B45"/>
                 </a:solidFill>
               </a:rPr>
-              <a:t>权益变动与股东回报</a:t>
+              <a:t>资产估计与售后义务</a:t>
             </a:r>
             <a:endParaRPr lang="en-US" sz="2700" dirty="0"/>
           </a:p>
@@ -5300,19 +5595,22 @@
         <p:spPr>
           <a:xfrm>
             <a:off x="594360" y="1444752"/>
-            <a:ext cx="6995160" cy="685800"/>
-          </a:xfrm>
-          <a:prstGeom prst="rect">
-            <a:avLst/>
-          </a:prstGeom>
-          <a:noFill/>
-          <a:ln/>
-        </p:spPr>
-        <p:txBody>
-          <a:bodyPr wrap="square" lIns="0" tIns="0" rIns="0" bIns="0" rtlCol="0" anchor="ctr"/>
-          <a:lstStyle/>
-          <a:p>
-            <a:pPr indent="0" marL="0">
+            <a:ext cx="6995160" cy="1005840"/>
+          </a:xfrm>
+          <a:prstGeom prst="rect">
+            <a:avLst/>
+          </a:prstGeom>
+          <a:noFill/>
+          <a:ln/>
+        </p:spPr>
+        <p:txBody>
+          <a:bodyPr wrap="square" lIns="0" tIns="0" rIns="0" bIns="0" rtlCol="0" anchor="t"/>
+          <a:lstStyle/>
+          <a:p>
+            <a:pPr indent="0" marL="0">
+              <a:lnSpc>
+                <a:spcPct val="100000"/>
+              </a:lnSpc>
               <a:buNone/>
             </a:pPr>
             <a:r>
@@ -5321,7 +5619,7 @@
                   <a:srgbClr val="213B45"/>
                 </a:solidFill>
               </a:rPr>
-              <a:t>权益增长同时包含利润与资本交易</a:t>
+              <a:t>扩张中的减值与售后成本需要单独验证</a:t>
             </a:r>
             <a:endParaRPr lang="en-US" sz="2200" dirty="0"/>
           </a:p>
@@ -5335,91 +5633,134 @@
         </p:nvSpPr>
         <p:spPr>
           <a:xfrm>
-            <a:off x="594360" y="2331720"/>
-            <a:ext cx="6995160" cy="1828800"/>
-          </a:xfrm>
-          <a:prstGeom prst="rect">
-            <a:avLst/>
-          </a:prstGeom>
-          <a:noFill/>
-          <a:ln/>
-        </p:spPr>
-        <p:txBody>
-          <a:bodyPr wrap="square" lIns="0" tIns="0" rIns="0" bIns="0" rtlCol="0" anchor="ctr">
-            <a:normAutofit/>
-          </a:bodyPr>
-          <a:lstStyle/>
-          <a:p>
-            <a:pPr indent="0" marL="0">
-              <a:buNone/>
-            </a:pPr>
-            <a:r>
-              <a:rPr lang="en-US" sz="1900" dirty="0">
+            <a:off x="594360" y="2624328"/>
+            <a:ext cx="6995160" cy="3063240"/>
+          </a:xfrm>
+          <a:prstGeom prst="rect">
+            <a:avLst/>
+          </a:prstGeom>
+          <a:noFill/>
+          <a:ln/>
+        </p:spPr>
+        <p:txBody>
+          <a:bodyPr wrap="square" lIns="0" tIns="0" rIns="0" bIns="0" rtlCol="0" anchor="t"/>
+          <a:lstStyle/>
+          <a:p>
+            <a:pPr indent="0" marL="0">
+              <a:lnSpc>
+                <a:spcPct val="100000"/>
+              </a:lnSpc>
+              <a:buNone/>
+            </a:pPr>
+            <a:r>
+              <a:rPr lang="en-US" sz="1800" dirty="0">
                 <a:solidFill>
                   <a:srgbClr val="1F2933"/>
                 </a:solidFill>
               </a:rPr>
-              <a:t>归母净利润722.01 亿元人民币与母公司净利润704.14 亿元人民币分开；简单平均权益ROE为24.72%。</a:t>
-            </a:r>
-            <a:endParaRPr lang="en-US" sz="1900" dirty="0"/>
-          </a:p>
-        </p:txBody>
-      </p:sp>
-      <p:sp>
-        <p:nvSpPr>
-          <p:cNvPr id="7" name="Text 5"/>
-          <p:cNvSpPr/>
-          <p:nvPr/>
-        </p:nvSpPr>
-        <p:spPr>
-          <a:xfrm>
-            <a:off x="594360" y="4434840"/>
-            <a:ext cx="6995160" cy="1325880"/>
-          </a:xfrm>
-          <a:prstGeom prst="rect">
-            <a:avLst/>
-          </a:prstGeom>
-          <a:noFill/>
-          <a:ln/>
-        </p:spPr>
-        <p:txBody>
-          <a:bodyPr wrap="square" lIns="0" tIns="0" rIns="0" bIns="0" rtlCol="0" anchor="ctr">
-            <a:normAutofit/>
-          </a:bodyPr>
-          <a:lstStyle/>
-          <a:p>
-            <a:pPr indent="0" marL="0">
-              <a:buNone/>
-            </a:pPr>
-            <a:r>
-              <a:rPr lang="en-US" sz="1600" dirty="0">
-                <a:solidFill>
-                  <a:srgbClr val="56646C"/>
+              <a:t>被测试固定资产组减值前账面28.66 亿元人民币、可收回额</a:t>
+            </a:r>
+            <a:endParaRPr lang="en-US" sz="1800" dirty="0"/>
+          </a:p>
+          <a:p>
+            <a:pPr indent="0" marL="0">
+              <a:lnSpc>
+                <a:spcPct val="100000"/>
+              </a:lnSpc>
+              <a:buNone/>
+            </a:pPr>
+            <a:r>
+              <a:rPr lang="en-US" sz="1800" dirty="0">
+                <a:solidFill>
+                  <a:srgbClr val="1F2933"/>
+                </a:solidFill>
+              </a:rPr>
+              <a:t>2.06 亿元人民币；售后预计负债512.33 亿元人民币</a:t>
+            </a:r>
+            <a:endParaRPr lang="en-US" sz="1800" dirty="0"/>
+          </a:p>
+          <a:p>
+            <a:pPr indent="0" marL="0">
+              <a:lnSpc>
+                <a:spcPct val="100000"/>
+              </a:lnSpc>
+              <a:buNone/>
+            </a:pPr>
+            <a:r>
+              <a:rPr lang="en-US" sz="1800" dirty="0">
+                <a:solidFill>
+                  <a:srgbClr val="1F2933"/>
+                </a:solidFill>
+              </a:rPr>
+              <a:t>。</a:t>
+            </a:r>
+            <a:endParaRPr lang="en-US" sz="1800" dirty="0"/>
+          </a:p>
+          <a:p>
+            <a:pPr indent="0" marL="0">
+              <a:lnSpc>
+                <a:spcPct val="100000"/>
+              </a:lnSpc>
+              <a:buNone/>
+            </a:pPr>
+            <a:endParaRPr lang="en-US" sz="1800" dirty="0"/>
+          </a:p>
+          <a:p>
+            <a:pPr indent="0" marL="0">
+              <a:lnSpc>
+                <a:spcPct val="100000"/>
+              </a:lnSpc>
+              <a:buNone/>
+            </a:pPr>
+            <a:r>
+              <a:rPr lang="en-US" sz="1800" dirty="0">
+                <a:solidFill>
+                  <a:srgbClr val="1F2933"/>
                 </a:solidFill>
               </a:rPr>
               <a:t>判断改变条件</a:t>
             </a:r>
-            <a:endParaRPr lang="en-US" sz="1600" dirty="0"/>
-          </a:p>
-          <a:p>
-            <a:pPr indent="0" marL="0">
-              <a:buNone/>
-            </a:pPr>
-            <a:r>
-              <a:rPr lang="en-US" sz="1600" dirty="0">
-                <a:solidFill>
-                  <a:srgbClr val="56646C"/>
-                </a:solidFill>
-              </a:rPr>
-              <a:t>分红能力判断需要母公司可分配利润、法定限制和实际资金，而非只看集团ROE。</a:t>
-            </a:r>
-            <a:endParaRPr lang="en-US" sz="1600" dirty="0"/>
-          </a:p>
-        </p:txBody>
-      </p:sp>
-      <p:sp>
-        <p:nvSpPr>
-          <p:cNvPr id="9" name="Shape 6"/>
+            <a:endParaRPr lang="en-US" sz="1800" dirty="0"/>
+          </a:p>
+          <a:p>
+            <a:pPr indent="0" marL="0">
+              <a:lnSpc>
+                <a:spcPct val="100000"/>
+              </a:lnSpc>
+              <a:buNone/>
+            </a:pPr>
+            <a:r>
+              <a:rPr lang="en-US" sz="1800" dirty="0">
+                <a:solidFill>
+                  <a:srgbClr val="1F2933"/>
+                </a:solidFill>
+              </a:rPr>
+              <a:t>取得资产组预算/折现参数与历史兑现，及售后准备新增、使用、</a:t>
+            </a:r>
+            <a:endParaRPr lang="en-US" sz="1800" dirty="0"/>
+          </a:p>
+          <a:p>
+            <a:pPr indent="0" marL="0">
+              <a:lnSpc>
+                <a:spcPct val="100000"/>
+              </a:lnSpc>
+              <a:buNone/>
+            </a:pPr>
+            <a:r>
+              <a:rPr lang="en-US" sz="1800" dirty="0">
+                <a:solidFill>
+                  <a:srgbClr val="1F2933"/>
+                </a:solidFill>
+              </a:rPr>
+              <a:t>冲回和批次维修数据后，形成可收回额和准备敏感性。</a:t>
+            </a:r>
+            <a:endParaRPr lang="en-US" sz="1800" dirty="0"/>
+          </a:p>
+        </p:txBody>
+      </p:sp>
+      <p:sp>
+        <p:nvSpPr>
+          <p:cNvPr id="8" name="Shape 5"/>
           <p:cNvSpPr/>
           <p:nvPr/>
         </p:nvSpPr>
@@ -5444,64 +5785,68 @@
       </p:sp>
       <p:sp>
         <p:nvSpPr>
+          <p:cNvPr id="9" name="Text 6"/>
+          <p:cNvSpPr/>
+          <p:nvPr/>
+        </p:nvSpPr>
+        <p:spPr>
+          <a:xfrm>
+            <a:off x="8138160" y="1591056"/>
+            <a:ext cx="3291840" cy="274320"/>
+          </a:xfrm>
+          <a:prstGeom prst="rect">
+            <a:avLst/>
+          </a:prstGeom>
+          <a:noFill/>
+          <a:ln/>
+        </p:spPr>
+        <p:txBody>
+          <a:bodyPr wrap="square" lIns="0" tIns="0" rIns="0" bIns="0" rtlCol="0" anchor="t"/>
+          <a:lstStyle/>
+          <a:p>
+            <a:pPr indent="0" marL="0">
+              <a:lnSpc>
+                <a:spcPct val="100000"/>
+              </a:lnSpc>
+              <a:buNone/>
+            </a:pPr>
+            <a:r>
+              <a:rPr lang="en-US" sz="1200" dirty="0">
+                <a:solidFill>
+                  <a:srgbClr val="213B45"/>
+                </a:solidFill>
+              </a:rPr>
+              <a:t>被测试相关资产减值前账面额</a:t>
+            </a:r>
+            <a:endParaRPr lang="en-US" sz="1200" dirty="0"/>
+          </a:p>
+        </p:txBody>
+      </p:sp>
+      <p:sp>
+        <p:nvSpPr>
           <p:cNvPr id="10" name="Text 7"/>
           <p:cNvSpPr/>
           <p:nvPr/>
         </p:nvSpPr>
         <p:spPr>
           <a:xfrm>
-            <a:off x="8138160" y="1591056"/>
-            <a:ext cx="3291840" cy="228600"/>
-          </a:xfrm>
-          <a:prstGeom prst="rect">
-            <a:avLst/>
-          </a:prstGeom>
-          <a:noFill/>
-          <a:ln/>
-        </p:spPr>
-        <p:txBody>
-          <a:bodyPr wrap="square" lIns="0" tIns="0" rIns="0" bIns="0" rtlCol="0" anchor="ctr"/>
-          <a:lstStyle/>
-          <a:p>
-            <a:pPr indent="0" marL="0">
-              <a:buNone/>
-            </a:pPr>
-            <a:r>
-              <a:rPr lang="en-US" sz="1200" dirty="0">
-                <a:solidFill>
-                  <a:srgbClr val="213B45"/>
-                </a:solidFill>
-              </a:rPr>
-              <a:t>归母净利润</a:t>
-            </a:r>
-            <a:endParaRPr lang="en-US" sz="1200" dirty="0"/>
-          </a:p>
-        </p:txBody>
-      </p:sp>
-      <p:sp>
-        <p:nvSpPr>
-          <p:cNvPr id="11" name="Text 8"/>
-          <p:cNvSpPr/>
-          <p:nvPr/>
-        </p:nvSpPr>
-        <p:spPr>
-          <a:xfrm>
-            <a:off x="8138160" y="1892808"/>
-            <a:ext cx="3291840" cy="365760"/>
-          </a:xfrm>
-          <a:prstGeom prst="rect">
-            <a:avLst/>
-          </a:prstGeom>
-          <a:noFill/>
-          <a:ln/>
-        </p:spPr>
-        <p:txBody>
-          <a:bodyPr wrap="square" lIns="0" tIns="0" rIns="0" bIns="0" rtlCol="0" anchor="ctr">
-            <a:normAutofit/>
-          </a:bodyPr>
-          <a:lstStyle/>
-          <a:p>
-            <a:pPr indent="0" marL="0">
+            <a:off x="8138160" y="1956816"/>
+            <a:ext cx="3291840" cy="393192"/>
+          </a:xfrm>
+          <a:prstGeom prst="rect">
+            <a:avLst/>
+          </a:prstGeom>
+          <a:noFill/>
+          <a:ln/>
+        </p:spPr>
+        <p:txBody>
+          <a:bodyPr wrap="square" lIns="0" tIns="0" rIns="0" bIns="0" rtlCol="0" anchor="t"/>
+          <a:lstStyle/>
+          <a:p>
+            <a:pPr indent="0" marL="0">
+              <a:lnSpc>
+                <a:spcPct val="100000"/>
+              </a:lnSpc>
               <a:buNone/>
             </a:pPr>
             <a:r>
@@ -5510,7 +5855,7 @@
                   <a:srgbClr val="237F72"/>
                 </a:solidFill>
               </a:rPr>
-              <a:t>722.01 亿元人民币</a:t>
+              <a:t>28.66 亿元人民币</a:t>
             </a:r>
             <a:endParaRPr lang="en-US" sz="1800" dirty="0"/>
           </a:p>
@@ -5518,7 +5863,7 @@
       </p:sp>
       <p:sp>
         <p:nvSpPr>
-          <p:cNvPr id="12" name="Shape 9"/>
+          <p:cNvPr id="11" name="Shape 8"/>
           <p:cNvSpPr/>
           <p:nvPr/>
         </p:nvSpPr>
@@ -5543,64 +5888,68 @@
       </p:sp>
       <p:sp>
         <p:nvSpPr>
+          <p:cNvPr id="12" name="Text 9"/>
+          <p:cNvSpPr/>
+          <p:nvPr/>
+        </p:nvSpPr>
+        <p:spPr>
+          <a:xfrm>
+            <a:off x="8138160" y="2670048"/>
+            <a:ext cx="3291840" cy="274320"/>
+          </a:xfrm>
+          <a:prstGeom prst="rect">
+            <a:avLst/>
+          </a:prstGeom>
+          <a:noFill/>
+          <a:ln/>
+        </p:spPr>
+        <p:txBody>
+          <a:bodyPr wrap="square" lIns="0" tIns="0" rIns="0" bIns="0" rtlCol="0" anchor="t"/>
+          <a:lstStyle/>
+          <a:p>
+            <a:pPr indent="0" marL="0">
+              <a:lnSpc>
+                <a:spcPct val="100000"/>
+              </a:lnSpc>
+              <a:buNone/>
+            </a:pPr>
+            <a:r>
+              <a:rPr lang="en-US" sz="1200" dirty="0">
+                <a:solidFill>
+                  <a:srgbClr val="213B45"/>
+                </a:solidFill>
+              </a:rPr>
+              <a:t>该组可收回金额</a:t>
+            </a:r>
+            <a:endParaRPr lang="en-US" sz="1200" dirty="0"/>
+          </a:p>
+        </p:txBody>
+      </p:sp>
+      <p:sp>
+        <p:nvSpPr>
           <p:cNvPr id="13" name="Text 10"/>
           <p:cNvSpPr/>
           <p:nvPr/>
         </p:nvSpPr>
         <p:spPr>
           <a:xfrm>
-            <a:off x="8138160" y="2670048"/>
-            <a:ext cx="3291840" cy="228600"/>
-          </a:xfrm>
-          <a:prstGeom prst="rect">
-            <a:avLst/>
-          </a:prstGeom>
-          <a:noFill/>
-          <a:ln/>
-        </p:spPr>
-        <p:txBody>
-          <a:bodyPr wrap="square" lIns="0" tIns="0" rIns="0" bIns="0" rtlCol="0" anchor="ctr"/>
-          <a:lstStyle/>
-          <a:p>
-            <a:pPr indent="0" marL="0">
-              <a:buNone/>
-            </a:pPr>
-            <a:r>
-              <a:rPr lang="en-US" sz="1200" dirty="0">
-                <a:solidFill>
-                  <a:srgbClr val="213B45"/>
-                </a:solidFill>
-              </a:rPr>
-              <a:t>母公司净利润</a:t>
-            </a:r>
-            <a:endParaRPr lang="en-US" sz="1200" dirty="0"/>
-          </a:p>
-        </p:txBody>
-      </p:sp>
-      <p:sp>
-        <p:nvSpPr>
-          <p:cNvPr id="14" name="Text 11"/>
-          <p:cNvSpPr/>
-          <p:nvPr/>
-        </p:nvSpPr>
-        <p:spPr>
-          <a:xfrm>
-            <a:off x="8138160" y="2971800"/>
-            <a:ext cx="3291840" cy="365760"/>
-          </a:xfrm>
-          <a:prstGeom prst="rect">
-            <a:avLst/>
-          </a:prstGeom>
-          <a:noFill/>
-          <a:ln/>
-        </p:spPr>
-        <p:txBody>
-          <a:bodyPr wrap="square" lIns="0" tIns="0" rIns="0" bIns="0" rtlCol="0" anchor="ctr">
-            <a:normAutofit/>
-          </a:bodyPr>
-          <a:lstStyle/>
-          <a:p>
-            <a:pPr indent="0" marL="0">
+            <a:off x="8138160" y="3035808"/>
+            <a:ext cx="3291840" cy="393192"/>
+          </a:xfrm>
+          <a:prstGeom prst="rect">
+            <a:avLst/>
+          </a:prstGeom>
+          <a:noFill/>
+          <a:ln/>
+        </p:spPr>
+        <p:txBody>
+          <a:bodyPr wrap="square" lIns="0" tIns="0" rIns="0" bIns="0" rtlCol="0" anchor="t"/>
+          <a:lstStyle/>
+          <a:p>
+            <a:pPr indent="0" marL="0">
+              <a:lnSpc>
+                <a:spcPct val="100000"/>
+              </a:lnSpc>
               <a:buNone/>
             </a:pPr>
             <a:r>
@@ -5609,7 +5958,7 @@
                   <a:srgbClr val="237F72"/>
                 </a:solidFill>
               </a:rPr>
-              <a:t>704.14 亿元人民币</a:t>
+              <a:t>2.06 亿元人民币</a:t>
             </a:r>
             <a:endParaRPr lang="en-US" sz="1800" dirty="0"/>
           </a:p>
@@ -5617,7 +5966,7 @@
       </p:sp>
       <p:sp>
         <p:nvSpPr>
-          <p:cNvPr id="15" name="Shape 12"/>
+          <p:cNvPr id="14" name="Shape 11"/>
           <p:cNvSpPr/>
           <p:nvPr/>
         </p:nvSpPr>
@@ -5642,64 +5991,68 @@
       </p:sp>
       <p:sp>
         <p:nvSpPr>
+          <p:cNvPr id="15" name="Text 12"/>
+          <p:cNvSpPr/>
+          <p:nvPr/>
+        </p:nvSpPr>
+        <p:spPr>
+          <a:xfrm>
+            <a:off x="8138160" y="3749040"/>
+            <a:ext cx="3291840" cy="274320"/>
+          </a:xfrm>
+          <a:prstGeom prst="rect">
+            <a:avLst/>
+          </a:prstGeom>
+          <a:noFill/>
+          <a:ln/>
+        </p:spPr>
+        <p:txBody>
+          <a:bodyPr wrap="square" lIns="0" tIns="0" rIns="0" bIns="0" rtlCol="0" anchor="t"/>
+          <a:lstStyle/>
+          <a:p>
+            <a:pPr indent="0" marL="0">
+              <a:lnSpc>
+                <a:spcPct val="100000"/>
+              </a:lnSpc>
+              <a:buNone/>
+            </a:pPr>
+            <a:r>
+              <a:rPr lang="en-US" sz="1200" dirty="0">
+                <a:solidFill>
+                  <a:srgbClr val="213B45"/>
+                </a:solidFill>
+              </a:rPr>
+              <a:t>固定资产本期计提减值</a:t>
+            </a:r>
+            <a:endParaRPr lang="en-US" sz="1200" dirty="0"/>
+          </a:p>
+        </p:txBody>
+      </p:sp>
+      <p:sp>
+        <p:nvSpPr>
           <p:cNvPr id="16" name="Text 13"/>
           <p:cNvSpPr/>
           <p:nvPr/>
         </p:nvSpPr>
         <p:spPr>
           <a:xfrm>
-            <a:off x="8138160" y="3749040"/>
-            <a:ext cx="3291840" cy="228600"/>
-          </a:xfrm>
-          <a:prstGeom prst="rect">
-            <a:avLst/>
-          </a:prstGeom>
-          <a:noFill/>
-          <a:ln/>
-        </p:spPr>
-        <p:txBody>
-          <a:bodyPr wrap="square" lIns="0" tIns="0" rIns="0" bIns="0" rtlCol="0" anchor="ctr"/>
-          <a:lstStyle/>
-          <a:p>
-            <a:pPr indent="0" marL="0">
-              <a:buNone/>
-            </a:pPr>
-            <a:r>
-              <a:rPr lang="en-US" sz="1200" dirty="0">
-                <a:solidFill>
-                  <a:srgbClr val="213B45"/>
-                </a:solidFill>
-              </a:rPr>
-              <a:t>期初期末平均归母权益</a:t>
-            </a:r>
-            <a:endParaRPr lang="en-US" sz="1200" dirty="0"/>
-          </a:p>
-        </p:txBody>
-      </p:sp>
-      <p:sp>
-        <p:nvSpPr>
-          <p:cNvPr id="17" name="Text 14"/>
-          <p:cNvSpPr/>
-          <p:nvPr/>
-        </p:nvSpPr>
-        <p:spPr>
-          <a:xfrm>
-            <a:off x="8138160" y="4050792"/>
-            <a:ext cx="3291840" cy="365760"/>
-          </a:xfrm>
-          <a:prstGeom prst="rect">
-            <a:avLst/>
-          </a:prstGeom>
-          <a:noFill/>
-          <a:ln/>
-        </p:spPr>
-        <p:txBody>
-          <a:bodyPr wrap="square" lIns="0" tIns="0" rIns="0" bIns="0" rtlCol="0" anchor="ctr">
-            <a:normAutofit/>
-          </a:bodyPr>
-          <a:lstStyle/>
-          <a:p>
-            <a:pPr indent="0" marL="0">
+            <a:off x="8138160" y="4114800"/>
+            <a:ext cx="3291840" cy="393192"/>
+          </a:xfrm>
+          <a:prstGeom prst="rect">
+            <a:avLst/>
+          </a:prstGeom>
+          <a:noFill/>
+          <a:ln/>
+        </p:spPr>
+        <p:txBody>
+          <a:bodyPr wrap="square" lIns="0" tIns="0" rIns="0" bIns="0" rtlCol="0" anchor="t"/>
+          <a:lstStyle/>
+          <a:p>
+            <a:pPr indent="0" marL="0">
+              <a:lnSpc>
+                <a:spcPct val="100000"/>
+              </a:lnSpc>
               <a:buNone/>
             </a:pPr>
             <a:r>
@@ -5708,7 +6061,7 @@
                   <a:srgbClr val="237F72"/>
                 </a:solidFill>
               </a:rPr>
-              <a:t>2,920.19 亿元人民币</a:t>
+              <a:t>26.60 亿元人民币</a:t>
             </a:r>
             <a:endParaRPr lang="en-US" sz="1800" dirty="0"/>
           </a:p>
@@ -5716,7 +6069,7 @@
       </p:sp>
       <p:sp>
         <p:nvSpPr>
-          <p:cNvPr id="18" name="Shape 15"/>
+          <p:cNvPr id="17" name="Shape 14"/>
           <p:cNvSpPr/>
           <p:nvPr/>
         </p:nvSpPr>
@@ -5741,81 +6094,85 @@
       </p:sp>
       <p:sp>
         <p:nvSpPr>
+          <p:cNvPr id="18" name="Text 15"/>
+          <p:cNvSpPr/>
+          <p:nvPr/>
+        </p:nvSpPr>
+        <p:spPr>
+          <a:xfrm>
+            <a:off x="8138160" y="4828032"/>
+            <a:ext cx="3291840" cy="274320"/>
+          </a:xfrm>
+          <a:prstGeom prst="rect">
+            <a:avLst/>
+          </a:prstGeom>
+          <a:noFill/>
+          <a:ln/>
+        </p:spPr>
+        <p:txBody>
+          <a:bodyPr wrap="square" lIns="0" tIns="0" rIns="0" bIns="0" rtlCol="0" anchor="t"/>
+          <a:lstStyle/>
+          <a:p>
+            <a:pPr indent="0" marL="0">
+              <a:lnSpc>
+                <a:spcPct val="100000"/>
+              </a:lnSpc>
+              <a:buNone/>
+            </a:pPr>
+            <a:r>
+              <a:rPr lang="en-US" sz="1200" dirty="0">
+                <a:solidFill>
+                  <a:srgbClr val="213B45"/>
+                </a:solidFill>
+              </a:rPr>
+              <a:t>售后综合服务预计负债</a:t>
+            </a:r>
+            <a:endParaRPr lang="en-US" sz="1200" dirty="0"/>
+          </a:p>
+        </p:txBody>
+      </p:sp>
+      <p:sp>
+        <p:nvSpPr>
           <p:cNvPr id="19" name="Text 16"/>
           <p:cNvSpPr/>
           <p:nvPr/>
         </p:nvSpPr>
         <p:spPr>
           <a:xfrm>
-            <a:off x="8138160" y="4828032"/>
-            <a:ext cx="3291840" cy="228600"/>
-          </a:xfrm>
-          <a:prstGeom prst="rect">
-            <a:avLst/>
-          </a:prstGeom>
-          <a:noFill/>
-          <a:ln/>
-        </p:spPr>
-        <p:txBody>
-          <a:bodyPr wrap="square" lIns="0" tIns="0" rIns="0" bIns="0" rtlCol="0" anchor="ctr"/>
-          <a:lstStyle/>
-          <a:p>
-            <a:pPr indent="0" marL="0">
-              <a:buNone/>
-            </a:pPr>
-            <a:r>
-              <a:rPr lang="en-US" sz="1200" dirty="0">
-                <a:solidFill>
-                  <a:srgbClr val="213B45"/>
-                </a:solidFill>
-              </a:rPr>
-              <a:t>简单平均权益ROE</a:t>
-            </a:r>
-            <a:endParaRPr lang="en-US" sz="1200" dirty="0"/>
+            <a:off x="8138160" y="5193792"/>
+            <a:ext cx="3291840" cy="393192"/>
+          </a:xfrm>
+          <a:prstGeom prst="rect">
+            <a:avLst/>
+          </a:prstGeom>
+          <a:noFill/>
+          <a:ln/>
+        </p:spPr>
+        <p:txBody>
+          <a:bodyPr wrap="square" lIns="0" tIns="0" rIns="0" bIns="0" rtlCol="0" anchor="t"/>
+          <a:lstStyle/>
+          <a:p>
+            <a:pPr indent="0" marL="0">
+              <a:lnSpc>
+                <a:spcPct val="100000"/>
+              </a:lnSpc>
+              <a:buNone/>
+            </a:pPr>
+            <a:r>
+              <a:rPr lang="en-US" sz="1800" b="1" dirty="0">
+                <a:solidFill>
+                  <a:srgbClr val="237F72"/>
+                </a:solidFill>
+              </a:rPr>
+              <a:t>512.33 亿元人民币</a:t>
+            </a:r>
+            <a:endParaRPr lang="en-US" sz="1800" dirty="0"/>
           </a:p>
         </p:txBody>
       </p:sp>
       <p:sp>
         <p:nvSpPr>
           <p:cNvPr id="20" name="Text 17"/>
-          <p:cNvSpPr/>
-          <p:nvPr/>
-        </p:nvSpPr>
-        <p:spPr>
-          <a:xfrm>
-            <a:off x="8138160" y="5129784"/>
-            <a:ext cx="3291840" cy="365760"/>
-          </a:xfrm>
-          <a:prstGeom prst="rect">
-            <a:avLst/>
-          </a:prstGeom>
-          <a:noFill/>
-          <a:ln/>
-        </p:spPr>
-        <p:txBody>
-          <a:bodyPr wrap="square" lIns="0" tIns="0" rIns="0" bIns="0" rtlCol="0" anchor="ctr">
-            <a:normAutofit/>
-          </a:bodyPr>
-          <a:lstStyle/>
-          <a:p>
-            <a:pPr indent="0" marL="0">
-              <a:buNone/>
-            </a:pPr>
-            <a:r>
-              <a:rPr lang="en-US" sz="1800" b="1" dirty="0">
-                <a:solidFill>
-                  <a:srgbClr val="237F72"/>
-                </a:solidFill>
-              </a:rPr>
-              <a:t>24.72%</a:t>
-            </a:r>
-            <a:endParaRPr lang="en-US" sz="1800" dirty="0"/>
-          </a:p>
-        </p:txBody>
-      </p:sp>
-      <p:sp>
-        <p:nvSpPr>
-          <p:cNvPr id="21" name="Text 18"/>
           <p:cNvSpPr/>
           <p:nvPr/>
         </p:nvSpPr>
@@ -5831,12 +6188,13 @@
           <a:ln/>
         </p:spPr>
         <p:txBody>
-          <a:bodyPr wrap="square" lIns="0" tIns="0" rIns="0" bIns="0" rtlCol="0" anchor="ctr">
-            <a:normAutofit/>
-          </a:bodyPr>
-          <a:lstStyle/>
-          <a:p>
-            <a:pPr indent="0" marL="0">
+          <a:bodyPr wrap="square" lIns="0" tIns="0" rIns="0" bIns="0" rtlCol="0" anchor="t"/>
+          <a:lstStyle/>
+          <a:p>
+            <a:pPr indent="0" marL="0">
+              <a:lnSpc>
+                <a:spcPct val="100000"/>
+              </a:lnSpc>
               <a:buNone/>
             </a:pPr>
             <a:r>
@@ -5845,7 +6203,7 @@
                   <a:srgbClr val="586874"/>
                 </a:solidFill>
               </a:rPr>
-              <a:t>来源记录 E_PL / E_BS / E_EQ / equity_rollforward / roe_simple；完整位置见报告与底稿</a:t>
+              <a:t>来源记录 E_PPE / E_WARRANTY / E_POLICY 等；全部来源及位置见报告、底稿与备注</a:t>
             </a:r>
             <a:endParaRPr lang="en-US" sz="900" dirty="0"/>
           </a:p>
@@ -5901,10 +6259,13 @@
           <a:ln/>
         </p:spPr>
         <p:txBody>
-          <a:bodyPr wrap="square" lIns="0" tIns="0" rIns="0" bIns="0" rtlCol="0" anchor="ctr"/>
-          <a:lstStyle/>
-          <a:p>
-            <a:pPr indent="0" marL="0">
+          <a:bodyPr wrap="square" lIns="0" tIns="0" rIns="0" bIns="0" rtlCol="0" anchor="t"/>
+          <a:lstStyle/>
+          <a:p>
+            <a:pPr indent="0" marL="0">
+              <a:lnSpc>
+                <a:spcPct val="100000"/>
+              </a:lnSpc>
               <a:buNone/>
             </a:pPr>
             <a:r>
@@ -5913,7 +6274,7 @@
                   <a:srgbClr val="213B45"/>
                 </a:solidFill>
               </a:rPr>
-              <a:t>审计事项与未完成程序</a:t>
+              <a:t>权益变动与股东回报</a:t>
             </a:r>
             <a:endParaRPr lang="en-US" sz="2700" dirty="0"/>
           </a:p>
@@ -5987,19 +6348,22 @@
         <p:spPr>
           <a:xfrm>
             <a:off x="594360" y="1444752"/>
-            <a:ext cx="10972800" cy="685800"/>
-          </a:xfrm>
-          <a:prstGeom prst="rect">
-            <a:avLst/>
-          </a:prstGeom>
-          <a:noFill/>
-          <a:ln/>
-        </p:spPr>
-        <p:txBody>
-          <a:bodyPr wrap="square" lIns="0" tIns="0" rIns="0" bIns="0" rtlCol="0" anchor="ctr"/>
-          <a:lstStyle/>
-          <a:p>
-            <a:pPr indent="0" marL="0">
+            <a:ext cx="6995160" cy="1005840"/>
+          </a:xfrm>
+          <a:prstGeom prst="rect">
+            <a:avLst/>
+          </a:prstGeom>
+          <a:noFill/>
+          <a:ln/>
+        </p:spPr>
+        <p:txBody>
+          <a:bodyPr wrap="square" lIns="0" tIns="0" rIns="0" bIns="0" rtlCol="0" anchor="t"/>
+          <a:lstStyle/>
+          <a:p>
+            <a:pPr indent="0" marL="0">
+              <a:lnSpc>
+                <a:spcPct val="100000"/>
+              </a:lnSpc>
               <a:buNone/>
             </a:pPr>
             <a:r>
@@ -6008,7 +6372,7 @@
                   <a:srgbClr val="213B45"/>
                 </a:solidFill>
               </a:rPr>
-              <a:t>审计重点是追加程序的起点</a:t>
+              <a:t>权益增长同时包含利润与资本交易</a:t>
             </a:r>
             <a:endParaRPr lang="en-US" sz="2200" dirty="0"/>
           </a:p>
@@ -6022,91 +6386,546 @@
         </p:nvSpPr>
         <p:spPr>
           <a:xfrm>
-            <a:off x="594360" y="2331720"/>
-            <a:ext cx="10972800" cy="1828800"/>
-          </a:xfrm>
-          <a:prstGeom prst="rect">
-            <a:avLst/>
-          </a:prstGeom>
-          <a:noFill/>
-          <a:ln/>
-        </p:spPr>
-        <p:txBody>
-          <a:bodyPr wrap="square" lIns="0" tIns="0" rIns="0" bIns="0" rtlCol="0" anchor="ctr">
-            <a:normAutofit/>
-          </a:bodyPr>
-          <a:lstStyle/>
-          <a:p>
-            <a:pPr indent="0" marL="0">
-              <a:buNone/>
-            </a:pPr>
-            <a:r>
-              <a:rPr lang="en-US" sz="1900" dirty="0">
+            <a:off x="594360" y="2624328"/>
+            <a:ext cx="6995160" cy="3063240"/>
+          </a:xfrm>
+          <a:prstGeom prst="rect">
+            <a:avLst/>
+          </a:prstGeom>
+          <a:noFill/>
+          <a:ln/>
+        </p:spPr>
+        <p:txBody>
+          <a:bodyPr wrap="square" lIns="0" tIns="0" rIns="0" bIns="0" rtlCol="0" anchor="t"/>
+          <a:lstStyle/>
+          <a:p>
+            <a:pPr indent="0" marL="0">
+              <a:lnSpc>
+                <a:spcPct val="100000"/>
+              </a:lnSpc>
+              <a:buNone/>
+            </a:pPr>
+            <a:r>
+              <a:rPr lang="en-US" sz="1800" dirty="0">
                 <a:solidFill>
                   <a:srgbClr val="1F2933"/>
                 </a:solidFill>
               </a:rPr>
-              <a:t>原报告为无保留意见，固定资产减值和收入确认为关键审计事项；本次只执行披露取证与复算。</a:t>
-            </a:r>
-            <a:endParaRPr lang="en-US" sz="1900" dirty="0"/>
-          </a:p>
-        </p:txBody>
-      </p:sp>
-      <p:sp>
-        <p:nvSpPr>
-          <p:cNvPr id="7" name="Text 5"/>
-          <p:cNvSpPr/>
-          <p:nvPr/>
-        </p:nvSpPr>
-        <p:spPr>
-          <a:xfrm>
-            <a:off x="594360" y="4434840"/>
-            <a:ext cx="10972800" cy="1325880"/>
-          </a:xfrm>
-          <a:prstGeom prst="rect">
-            <a:avLst/>
-          </a:prstGeom>
-          <a:noFill/>
-          <a:ln/>
-        </p:spPr>
-        <p:txBody>
-          <a:bodyPr wrap="square" lIns="0" tIns="0" rIns="0" bIns="0" rtlCol="0" anchor="ctr">
-            <a:normAutofit/>
-          </a:bodyPr>
-          <a:lstStyle/>
-          <a:p>
-            <a:pPr indent="0" marL="0">
-              <a:buNone/>
-            </a:pPr>
-            <a:r>
-              <a:rPr lang="en-US" sz="1600" dirty="0">
-                <a:solidFill>
-                  <a:srgbClr val="56646C"/>
+              <a:t>归母净利润722.01 亿元人民币与母公司净利润</a:t>
+            </a:r>
+            <a:endParaRPr lang="en-US" sz="1800" dirty="0"/>
+          </a:p>
+          <a:p>
+            <a:pPr indent="0" marL="0">
+              <a:lnSpc>
+                <a:spcPct val="100000"/>
+              </a:lnSpc>
+              <a:buNone/>
+            </a:pPr>
+            <a:r>
+              <a:rPr lang="en-US" sz="1800" dirty="0">
+                <a:solidFill>
+                  <a:srgbClr val="1F2933"/>
+                </a:solidFill>
+              </a:rPr>
+              <a:t>704.14 亿元人民币分开；简单平均权益ROE为</a:t>
+            </a:r>
+            <a:endParaRPr lang="en-US" sz="1800" dirty="0"/>
+          </a:p>
+          <a:p>
+            <a:pPr indent="0" marL="0">
+              <a:lnSpc>
+                <a:spcPct val="100000"/>
+              </a:lnSpc>
+              <a:buNone/>
+            </a:pPr>
+            <a:r>
+              <a:rPr lang="en-US" sz="1800" dirty="0">
+                <a:solidFill>
+                  <a:srgbClr val="1F2933"/>
+                </a:solidFill>
+              </a:rPr>
+              <a:t>24.72%。</a:t>
+            </a:r>
+            <a:endParaRPr lang="en-US" sz="1800" dirty="0"/>
+          </a:p>
+          <a:p>
+            <a:pPr indent="0" marL="0">
+              <a:lnSpc>
+                <a:spcPct val="100000"/>
+              </a:lnSpc>
+              <a:buNone/>
+            </a:pPr>
+            <a:endParaRPr lang="en-US" sz="1800" dirty="0"/>
+          </a:p>
+          <a:p>
+            <a:pPr indent="0" marL="0">
+              <a:lnSpc>
+                <a:spcPct val="100000"/>
+              </a:lnSpc>
+              <a:buNone/>
+            </a:pPr>
+            <a:r>
+              <a:rPr lang="en-US" sz="1800" dirty="0">
+                <a:solidFill>
+                  <a:srgbClr val="1F2933"/>
                 </a:solidFill>
               </a:rPr>
               <a:t>判断改变条件</a:t>
             </a:r>
-            <a:endParaRPr lang="en-US" sz="1600" dirty="0"/>
-          </a:p>
-          <a:p>
-            <a:pPr indent="0" marL="0">
-              <a:buNone/>
-            </a:pPr>
-            <a:r>
-              <a:rPr lang="en-US" sz="1600" dirty="0">
-                <a:solidFill>
-                  <a:srgbClr val="56646C"/>
-                </a:solidFill>
-              </a:rPr>
-              <a:t>实际合同、验收、返利及资产组证据支持或反驳原判断后更新风险状态。</a:t>
-            </a:r>
-            <a:endParaRPr lang="en-US" sz="1600" dirty="0"/>
-          </a:p>
-        </p:txBody>
+            <a:endParaRPr lang="en-US" sz="1800" dirty="0"/>
+          </a:p>
+          <a:p>
+            <a:pPr indent="0" marL="0">
+              <a:lnSpc>
+                <a:spcPct val="100000"/>
+              </a:lnSpc>
+              <a:buNone/>
+            </a:pPr>
+            <a:r>
+              <a:rPr lang="en-US" sz="1800" dirty="0">
+                <a:solidFill>
+                  <a:srgbClr val="1F2933"/>
+                </a:solidFill>
+              </a:rPr>
+              <a:t>分红能力判断需要母公司可分配利润、法定限制和实际资金，而非</a:t>
+            </a:r>
+            <a:endParaRPr lang="en-US" sz="1800" dirty="0"/>
+          </a:p>
+          <a:p>
+            <a:pPr indent="0" marL="0">
+              <a:lnSpc>
+                <a:spcPct val="100000"/>
+              </a:lnSpc>
+              <a:buNone/>
+            </a:pPr>
+            <a:r>
+              <a:rPr lang="en-US" sz="1800" dirty="0">
+                <a:solidFill>
+                  <a:srgbClr val="1F2933"/>
+                </a:solidFill>
+              </a:rPr>
+              <a:t>只看集团ROE。</a:t>
+            </a:r>
+            <a:endParaRPr lang="en-US" sz="1800" dirty="0"/>
+          </a:p>
+        </p:txBody>
+      </p:sp>
+      <p:sp>
+        <p:nvSpPr>
+          <p:cNvPr id="8" name="Shape 5"/>
+          <p:cNvSpPr/>
+          <p:nvPr/>
+        </p:nvSpPr>
+        <p:spPr>
+          <a:xfrm>
+            <a:off x="7955280" y="1508760"/>
+            <a:ext cx="3657600" cy="950976"/>
+          </a:xfrm>
+          <a:prstGeom prst="rect">
+            <a:avLst/>
+          </a:prstGeom>
+          <a:solidFill>
+            <a:srgbClr val="E6EFEC"/>
+          </a:solidFill>
+          <a:ln w="12700">
+            <a:solidFill>
+              <a:srgbClr val="E6EFEC"/>
+            </a:solidFill>
+            <a:prstDash val="solid"/>
+          </a:ln>
+        </p:spPr>
       </p:sp>
       <p:sp>
         <p:nvSpPr>
           <p:cNvPr id="9" name="Text 6"/>
+          <p:cNvSpPr/>
+          <p:nvPr/>
+        </p:nvSpPr>
+        <p:spPr>
+          <a:xfrm>
+            <a:off x="8138160" y="1591056"/>
+            <a:ext cx="3291840" cy="274320"/>
+          </a:xfrm>
+          <a:prstGeom prst="rect">
+            <a:avLst/>
+          </a:prstGeom>
+          <a:noFill/>
+          <a:ln/>
+        </p:spPr>
+        <p:txBody>
+          <a:bodyPr wrap="square" lIns="0" tIns="0" rIns="0" bIns="0" rtlCol="0" anchor="t"/>
+          <a:lstStyle/>
+          <a:p>
+            <a:pPr indent="0" marL="0">
+              <a:lnSpc>
+                <a:spcPct val="100000"/>
+              </a:lnSpc>
+              <a:buNone/>
+            </a:pPr>
+            <a:r>
+              <a:rPr lang="en-US" sz="1200" dirty="0">
+                <a:solidFill>
+                  <a:srgbClr val="213B45"/>
+                </a:solidFill>
+              </a:rPr>
+              <a:t>归母净利润</a:t>
+            </a:r>
+            <a:endParaRPr lang="en-US" sz="1200" dirty="0"/>
+          </a:p>
+        </p:txBody>
+      </p:sp>
+      <p:sp>
+        <p:nvSpPr>
+          <p:cNvPr id="10" name="Text 7"/>
+          <p:cNvSpPr/>
+          <p:nvPr/>
+        </p:nvSpPr>
+        <p:spPr>
+          <a:xfrm>
+            <a:off x="8138160" y="1956816"/>
+            <a:ext cx="3291840" cy="393192"/>
+          </a:xfrm>
+          <a:prstGeom prst="rect">
+            <a:avLst/>
+          </a:prstGeom>
+          <a:noFill/>
+          <a:ln/>
+        </p:spPr>
+        <p:txBody>
+          <a:bodyPr wrap="square" lIns="0" tIns="0" rIns="0" bIns="0" rtlCol="0" anchor="t"/>
+          <a:lstStyle/>
+          <a:p>
+            <a:pPr indent="0" marL="0">
+              <a:lnSpc>
+                <a:spcPct val="100000"/>
+              </a:lnSpc>
+              <a:buNone/>
+            </a:pPr>
+            <a:r>
+              <a:rPr lang="en-US" sz="1800" b="1" dirty="0">
+                <a:solidFill>
+                  <a:srgbClr val="237F72"/>
+                </a:solidFill>
+              </a:rPr>
+              <a:t>722.01 亿元人民币</a:t>
+            </a:r>
+            <a:endParaRPr lang="en-US" sz="1800" dirty="0"/>
+          </a:p>
+        </p:txBody>
+      </p:sp>
+      <p:sp>
+        <p:nvSpPr>
+          <p:cNvPr id="11" name="Shape 8"/>
+          <p:cNvSpPr/>
+          <p:nvPr/>
+        </p:nvSpPr>
+        <p:spPr>
+          <a:xfrm>
+            <a:off x="7955280" y="2587752"/>
+            <a:ext cx="3657600" cy="950976"/>
+          </a:xfrm>
+          <a:prstGeom prst="rect">
+            <a:avLst/>
+          </a:prstGeom>
+          <a:solidFill>
+            <a:srgbClr val="E6EFEC"/>
+          </a:solidFill>
+          <a:ln w="12700">
+            <a:solidFill>
+              <a:srgbClr val="E6EFEC"/>
+            </a:solidFill>
+            <a:prstDash val="solid"/>
+          </a:ln>
+        </p:spPr>
+      </p:sp>
+      <p:sp>
+        <p:nvSpPr>
+          <p:cNvPr id="12" name="Text 9"/>
+          <p:cNvSpPr/>
+          <p:nvPr/>
+        </p:nvSpPr>
+        <p:spPr>
+          <a:xfrm>
+            <a:off x="8138160" y="2670048"/>
+            <a:ext cx="3291840" cy="274320"/>
+          </a:xfrm>
+          <a:prstGeom prst="rect">
+            <a:avLst/>
+          </a:prstGeom>
+          <a:noFill/>
+          <a:ln/>
+        </p:spPr>
+        <p:txBody>
+          <a:bodyPr wrap="square" lIns="0" tIns="0" rIns="0" bIns="0" rtlCol="0" anchor="t"/>
+          <a:lstStyle/>
+          <a:p>
+            <a:pPr indent="0" marL="0">
+              <a:lnSpc>
+                <a:spcPct val="100000"/>
+              </a:lnSpc>
+              <a:buNone/>
+            </a:pPr>
+            <a:r>
+              <a:rPr lang="en-US" sz="1200" dirty="0">
+                <a:solidFill>
+                  <a:srgbClr val="213B45"/>
+                </a:solidFill>
+              </a:rPr>
+              <a:t>母公司净利润</a:t>
+            </a:r>
+            <a:endParaRPr lang="en-US" sz="1200" dirty="0"/>
+          </a:p>
+        </p:txBody>
+      </p:sp>
+      <p:sp>
+        <p:nvSpPr>
+          <p:cNvPr id="13" name="Text 10"/>
+          <p:cNvSpPr/>
+          <p:nvPr/>
+        </p:nvSpPr>
+        <p:spPr>
+          <a:xfrm>
+            <a:off x="8138160" y="3035808"/>
+            <a:ext cx="3291840" cy="393192"/>
+          </a:xfrm>
+          <a:prstGeom prst="rect">
+            <a:avLst/>
+          </a:prstGeom>
+          <a:noFill/>
+          <a:ln/>
+        </p:spPr>
+        <p:txBody>
+          <a:bodyPr wrap="square" lIns="0" tIns="0" rIns="0" bIns="0" rtlCol="0" anchor="t"/>
+          <a:lstStyle/>
+          <a:p>
+            <a:pPr indent="0" marL="0">
+              <a:lnSpc>
+                <a:spcPct val="100000"/>
+              </a:lnSpc>
+              <a:buNone/>
+            </a:pPr>
+            <a:r>
+              <a:rPr lang="en-US" sz="1800" b="1" dirty="0">
+                <a:solidFill>
+                  <a:srgbClr val="237F72"/>
+                </a:solidFill>
+              </a:rPr>
+              <a:t>704.14 亿元人民币</a:t>
+            </a:r>
+            <a:endParaRPr lang="en-US" sz="1800" dirty="0"/>
+          </a:p>
+        </p:txBody>
+      </p:sp>
+      <p:sp>
+        <p:nvSpPr>
+          <p:cNvPr id="14" name="Shape 11"/>
+          <p:cNvSpPr/>
+          <p:nvPr/>
+        </p:nvSpPr>
+        <p:spPr>
+          <a:xfrm>
+            <a:off x="7955280" y="3666744"/>
+            <a:ext cx="3657600" cy="950976"/>
+          </a:xfrm>
+          <a:prstGeom prst="rect">
+            <a:avLst/>
+          </a:prstGeom>
+          <a:solidFill>
+            <a:srgbClr val="E6EFEC"/>
+          </a:solidFill>
+          <a:ln w="12700">
+            <a:solidFill>
+              <a:srgbClr val="E6EFEC"/>
+            </a:solidFill>
+            <a:prstDash val="solid"/>
+          </a:ln>
+        </p:spPr>
+      </p:sp>
+      <p:sp>
+        <p:nvSpPr>
+          <p:cNvPr id="15" name="Text 12"/>
+          <p:cNvSpPr/>
+          <p:nvPr/>
+        </p:nvSpPr>
+        <p:spPr>
+          <a:xfrm>
+            <a:off x="8138160" y="3749040"/>
+            <a:ext cx="3291840" cy="274320"/>
+          </a:xfrm>
+          <a:prstGeom prst="rect">
+            <a:avLst/>
+          </a:prstGeom>
+          <a:noFill/>
+          <a:ln/>
+        </p:spPr>
+        <p:txBody>
+          <a:bodyPr wrap="square" lIns="0" tIns="0" rIns="0" bIns="0" rtlCol="0" anchor="t"/>
+          <a:lstStyle/>
+          <a:p>
+            <a:pPr indent="0" marL="0">
+              <a:lnSpc>
+                <a:spcPct val="100000"/>
+              </a:lnSpc>
+              <a:buNone/>
+            </a:pPr>
+            <a:r>
+              <a:rPr lang="en-US" sz="1200" dirty="0">
+                <a:solidFill>
+                  <a:srgbClr val="213B45"/>
+                </a:solidFill>
+              </a:rPr>
+              <a:t>期初期末平均归母权益</a:t>
+            </a:r>
+            <a:endParaRPr lang="en-US" sz="1200" dirty="0"/>
+          </a:p>
+        </p:txBody>
+      </p:sp>
+      <p:sp>
+        <p:nvSpPr>
+          <p:cNvPr id="16" name="Text 13"/>
+          <p:cNvSpPr/>
+          <p:nvPr/>
+        </p:nvSpPr>
+        <p:spPr>
+          <a:xfrm>
+            <a:off x="8138160" y="4114800"/>
+            <a:ext cx="3291840" cy="393192"/>
+          </a:xfrm>
+          <a:prstGeom prst="rect">
+            <a:avLst/>
+          </a:prstGeom>
+          <a:noFill/>
+          <a:ln/>
+        </p:spPr>
+        <p:txBody>
+          <a:bodyPr wrap="square" lIns="0" tIns="0" rIns="0" bIns="0" rtlCol="0" anchor="t"/>
+          <a:lstStyle/>
+          <a:p>
+            <a:pPr indent="0" marL="0">
+              <a:lnSpc>
+                <a:spcPct val="100000"/>
+              </a:lnSpc>
+              <a:buNone/>
+            </a:pPr>
+            <a:r>
+              <a:rPr lang="en-US" sz="1700" b="1" dirty="0">
+                <a:solidFill>
+                  <a:srgbClr val="237F72"/>
+                </a:solidFill>
+              </a:rPr>
+              <a:t>2,920.19 亿元人民币</a:t>
+            </a:r>
+            <a:endParaRPr lang="en-US" sz="1700" dirty="0"/>
+          </a:p>
+        </p:txBody>
+      </p:sp>
+      <p:sp>
+        <p:nvSpPr>
+          <p:cNvPr id="17" name="Shape 14"/>
+          <p:cNvSpPr/>
+          <p:nvPr/>
+        </p:nvSpPr>
+        <p:spPr>
+          <a:xfrm>
+            <a:off x="7955280" y="4745736"/>
+            <a:ext cx="3657600" cy="950976"/>
+          </a:xfrm>
+          <a:prstGeom prst="rect">
+            <a:avLst/>
+          </a:prstGeom>
+          <a:solidFill>
+            <a:srgbClr val="E6EFEC"/>
+          </a:solidFill>
+          <a:ln w="12700">
+            <a:solidFill>
+              <a:srgbClr val="E6EFEC"/>
+            </a:solidFill>
+            <a:prstDash val="solid"/>
+          </a:ln>
+        </p:spPr>
+      </p:sp>
+      <p:sp>
+        <p:nvSpPr>
+          <p:cNvPr id="18" name="Text 15"/>
+          <p:cNvSpPr/>
+          <p:nvPr/>
+        </p:nvSpPr>
+        <p:spPr>
+          <a:xfrm>
+            <a:off x="8138160" y="4828032"/>
+            <a:ext cx="3291840" cy="274320"/>
+          </a:xfrm>
+          <a:prstGeom prst="rect">
+            <a:avLst/>
+          </a:prstGeom>
+          <a:noFill/>
+          <a:ln/>
+        </p:spPr>
+        <p:txBody>
+          <a:bodyPr wrap="square" lIns="0" tIns="0" rIns="0" bIns="0" rtlCol="0" anchor="t"/>
+          <a:lstStyle/>
+          <a:p>
+            <a:pPr indent="0" marL="0">
+              <a:lnSpc>
+                <a:spcPct val="100000"/>
+              </a:lnSpc>
+              <a:buNone/>
+            </a:pPr>
+            <a:r>
+              <a:rPr lang="en-US" sz="1200" dirty="0">
+                <a:solidFill>
+                  <a:srgbClr val="213B45"/>
+                </a:solidFill>
+              </a:rPr>
+              <a:t>简单平均权益ROE</a:t>
+            </a:r>
+            <a:endParaRPr lang="en-US" sz="1200" dirty="0"/>
+          </a:p>
+        </p:txBody>
+      </p:sp>
+      <p:sp>
+        <p:nvSpPr>
+          <p:cNvPr id="19" name="Text 16"/>
+          <p:cNvSpPr/>
+          <p:nvPr/>
+        </p:nvSpPr>
+        <p:spPr>
+          <a:xfrm>
+            <a:off x="8138160" y="5193792"/>
+            <a:ext cx="3291840" cy="393192"/>
+          </a:xfrm>
+          <a:prstGeom prst="rect">
+            <a:avLst/>
+          </a:prstGeom>
+          <a:noFill/>
+          <a:ln/>
+        </p:spPr>
+        <p:txBody>
+          <a:bodyPr wrap="square" lIns="0" tIns="0" rIns="0" bIns="0" rtlCol="0" anchor="t"/>
+          <a:lstStyle/>
+          <a:p>
+            <a:pPr indent="0" marL="0">
+              <a:lnSpc>
+                <a:spcPct val="100000"/>
+              </a:lnSpc>
+              <a:buNone/>
+            </a:pPr>
+            <a:r>
+              <a:rPr lang="en-US" sz="1800" b="1" dirty="0">
+                <a:solidFill>
+                  <a:srgbClr val="237F72"/>
+                </a:solidFill>
+              </a:rPr>
+              <a:t>24.72%</a:t>
+            </a:r>
+            <a:endParaRPr lang="en-US" sz="1800" dirty="0"/>
+          </a:p>
+        </p:txBody>
+      </p:sp>
+      <p:sp>
+        <p:nvSpPr>
+          <p:cNvPr id="20" name="Text 17"/>
           <p:cNvSpPr/>
           <p:nvPr/>
         </p:nvSpPr>
@@ -6122,12 +6941,13 @@
           <a:ln/>
         </p:spPr>
         <p:txBody>
-          <a:bodyPr wrap="square" lIns="0" tIns="0" rIns="0" bIns="0" rtlCol="0" anchor="ctr">
-            <a:normAutofit/>
-          </a:bodyPr>
-          <a:lstStyle/>
-          <a:p>
-            <a:pPr indent="0" marL="0">
+          <a:bodyPr wrap="square" lIns="0" tIns="0" rIns="0" bIns="0" rtlCol="0" anchor="t"/>
+          <a:lstStyle/>
+          <a:p>
+            <a:pPr indent="0" marL="0">
+              <a:lnSpc>
+                <a:spcPct val="100000"/>
+              </a:lnSpc>
               <a:buNone/>
             </a:pPr>
             <a:r>
@@ -6136,7 +6956,7 @@
                   <a:srgbClr val="586874"/>
                 </a:solidFill>
               </a:rPr>
-              <a:t>来源记录 E_AUDIT / E_POLICY / E_PPE；完整位置见报告与底稿</a:t>
+              <a:t>来源记录 E_PL / E_BS / E_EQ 等；全部来源及位置见报告、底稿与备注</a:t>
             </a:r>
             <a:endParaRPr lang="en-US" sz="900" dirty="0"/>
           </a:p>
@@ -6192,10 +7012,13 @@
           <a:ln/>
         </p:spPr>
         <p:txBody>
-          <a:bodyPr wrap="square" lIns="0" tIns="0" rIns="0" bIns="0" rtlCol="0" anchor="ctr"/>
-          <a:lstStyle/>
-          <a:p>
-            <a:pPr indent="0" marL="0">
+          <a:bodyPr wrap="square" lIns="0" tIns="0" rIns="0" bIns="0" rtlCol="0" anchor="t"/>
+          <a:lstStyle/>
+          <a:p>
+            <a:pPr indent="0" marL="0">
+              <a:lnSpc>
+                <a:spcPct val="100000"/>
+              </a:lnSpc>
               <a:buNone/>
             </a:pPr>
             <a:r>
@@ -6204,7 +7027,7 @@
                   <a:srgbClr val="213B45"/>
                 </a:solidFill>
               </a:rPr>
-              <a:t>下一步核查</a:t>
+              <a:t>审计事项与未完成程序</a:t>
             </a:r>
             <a:endParaRPr lang="en-US" sz="2700" dirty="0"/>
           </a:p>
@@ -6277,31 +7100,34 @@
         </p:nvSpPr>
         <p:spPr>
           <a:xfrm>
-            <a:off x="594360" y="1508760"/>
-            <a:ext cx="914400" cy="365760"/>
-          </a:xfrm>
-          <a:prstGeom prst="rect">
-            <a:avLst/>
-          </a:prstGeom>
-          <a:noFill/>
-          <a:ln/>
-        </p:spPr>
-        <p:txBody>
-          <a:bodyPr wrap="square" lIns="0" tIns="0" rIns="0" bIns="0" rtlCol="0" anchor="ctr"/>
-          <a:lstStyle/>
-          <a:p>
-            <a:pPr indent="0" marL="0">
-              <a:buNone/>
-            </a:pPr>
-            <a:r>
-              <a:rPr lang="en-US" sz="2000" b="1" dirty="0">
-                <a:solidFill>
-                  <a:srgbClr val="237F72"/>
-                </a:solidFill>
-              </a:rPr>
-              <a:t>01</a:t>
-            </a:r>
-            <a:endParaRPr lang="en-US" sz="2000" dirty="0"/>
+            <a:off x="594360" y="1444752"/>
+            <a:ext cx="10972800" cy="1005840"/>
+          </a:xfrm>
+          <a:prstGeom prst="rect">
+            <a:avLst/>
+          </a:prstGeom>
+          <a:noFill/>
+          <a:ln/>
+        </p:spPr>
+        <p:txBody>
+          <a:bodyPr wrap="square" lIns="0" tIns="0" rIns="0" bIns="0" rtlCol="0" anchor="t"/>
+          <a:lstStyle/>
+          <a:p>
+            <a:pPr indent="0" marL="0">
+              <a:lnSpc>
+                <a:spcPct val="100000"/>
+              </a:lnSpc>
+              <a:buNone/>
+            </a:pPr>
+            <a:r>
+              <a:rPr lang="en-US" sz="2200" b="1" dirty="0">
+                <a:solidFill>
+                  <a:srgbClr val="213B45"/>
+                </a:solidFill>
+              </a:rPr>
+              <a:t>审计重点是追加程序的起点</a:t>
+            </a:r>
+            <a:endParaRPr lang="en-US" sz="2200" dirty="0"/>
           </a:p>
         </p:txBody>
       </p:sp>
@@ -6313,22 +7139,23 @@
         </p:nvSpPr>
         <p:spPr>
           <a:xfrm>
-            <a:off x="1645920" y="1508760"/>
-            <a:ext cx="9692640" cy="777240"/>
-          </a:xfrm>
-          <a:prstGeom prst="rect">
-            <a:avLst/>
-          </a:prstGeom>
-          <a:noFill/>
-          <a:ln/>
-        </p:spPr>
-        <p:txBody>
-          <a:bodyPr wrap="square" lIns="0" tIns="0" rIns="0" bIns="0" rtlCol="0" anchor="ctr">
-            <a:normAutofit/>
-          </a:bodyPr>
-          <a:lstStyle/>
-          <a:p>
-            <a:pPr indent="0" marL="0">
+            <a:off x="594360" y="2624328"/>
+            <a:ext cx="10972800" cy="3063240"/>
+          </a:xfrm>
+          <a:prstGeom prst="rect">
+            <a:avLst/>
+          </a:prstGeom>
+          <a:noFill/>
+          <a:ln/>
+        </p:spPr>
+        <p:txBody>
+          <a:bodyPr wrap="square" lIns="0" tIns="0" rIns="0" bIns="0" rtlCol="0" anchor="t"/>
+          <a:lstStyle/>
+          <a:p>
+            <a:pPr indent="0" marL="0">
+              <a:lnSpc>
+                <a:spcPct val="100000"/>
+              </a:lnSpc>
               <a:buNone/>
             </a:pPr>
             <a:r>
@@ -6337,155 +7164,91 @@
                   <a:srgbClr val="1F2933"/>
                 </a:solidFill>
               </a:rPr>
-              <a:t>取得逐法人、币种、月份的债务本金利息、受限现金、承诺额度到期与提款条件，以及未来经营/投资/分红预算。</a:t>
+              <a:t>原报告为无保留意见，固定资产减值和收入确认为关键审计事项；本次只执行披露取证与复算。</a:t>
             </a:r>
             <a:endParaRPr lang="en-US" sz="1800" dirty="0"/>
           </a:p>
-        </p:txBody>
-      </p:sp>
-      <p:sp>
-        <p:nvSpPr>
-          <p:cNvPr id="7" name="Text 5"/>
-          <p:cNvSpPr/>
-          <p:nvPr/>
-        </p:nvSpPr>
-        <p:spPr>
-          <a:xfrm>
-            <a:off x="1645920" y="2304288"/>
-            <a:ext cx="9692640" cy="274320"/>
-          </a:xfrm>
-          <a:prstGeom prst="rect">
-            <a:avLst/>
-          </a:prstGeom>
-          <a:noFill/>
-          <a:ln/>
-        </p:spPr>
-        <p:txBody>
-          <a:bodyPr wrap="square" lIns="0" tIns="0" rIns="0" bIns="0" rtlCol="0" anchor="ctr"/>
-          <a:lstStyle/>
-          <a:p>
-            <a:pPr indent="0" marL="0">
-              <a:buNone/>
-            </a:pPr>
-            <a:r>
-              <a:rPr lang="en-US" sz="1200" dirty="0">
+          <a:p>
+            <a:pPr indent="0" marL="0">
+              <a:lnSpc>
+                <a:spcPct val="100000"/>
+              </a:lnSpc>
+              <a:buNone/>
+            </a:pPr>
+            <a:endParaRPr lang="en-US" sz="1800" dirty="0"/>
+          </a:p>
+          <a:p>
+            <a:pPr indent="0" marL="0">
+              <a:lnSpc>
+                <a:spcPct val="100000"/>
+              </a:lnSpc>
+              <a:buNone/>
+            </a:pPr>
+            <a:r>
+              <a:rPr lang="en-US" sz="1800" dirty="0">
+                <a:solidFill>
+                  <a:srgbClr val="1F2933"/>
+                </a:solidFill>
+              </a:rPr>
+              <a:t>判断改变条件</a:t>
+            </a:r>
+            <a:endParaRPr lang="en-US" sz="1800" dirty="0"/>
+          </a:p>
+          <a:p>
+            <a:pPr indent="0" marL="0">
+              <a:lnSpc>
+                <a:spcPct val="100000"/>
+              </a:lnSpc>
+              <a:buNone/>
+            </a:pPr>
+            <a:r>
+              <a:rPr lang="en-US" sz="1800" dirty="0">
+                <a:solidFill>
+                  <a:srgbClr val="1F2933"/>
+                </a:solidFill>
+              </a:rPr>
+              <a:t>实际合同、验收、返利及资产组证据支持或反驳原判断后更新风险状态。</a:t>
+            </a:r>
+            <a:endParaRPr lang="en-US" sz="1800" dirty="0"/>
+          </a:p>
+        </p:txBody>
+      </p:sp>
+      <p:sp>
+        <p:nvSpPr>
+          <p:cNvPr id="8" name="Text 5"/>
+          <p:cNvSpPr/>
+          <p:nvPr/>
+        </p:nvSpPr>
+        <p:spPr>
+          <a:xfrm>
+            <a:off x="594360" y="6007608"/>
+            <a:ext cx="10972800" cy="274320"/>
+          </a:xfrm>
+          <a:prstGeom prst="rect">
+            <a:avLst/>
+          </a:prstGeom>
+          <a:noFill/>
+          <a:ln/>
+        </p:spPr>
+        <p:txBody>
+          <a:bodyPr wrap="square" lIns="0" tIns="0" rIns="0" bIns="0" rtlCol="0" anchor="t"/>
+          <a:lstStyle/>
+          <a:p>
+            <a:pPr indent="0" marL="0">
+              <a:lnSpc>
+                <a:spcPct val="100000"/>
+              </a:lnSpc>
+              <a:buNone/>
+            </a:pPr>
+            <a:r>
+              <a:rPr lang="en-US" sz="900" dirty="0">
                 <a:solidFill>
                   <a:srgbClr val="586874"/>
                 </a:solidFill>
               </a:rPr>
-              <a:t>资金负责人及信用分析师</a:t>
-            </a:r>
-            <a:endParaRPr lang="en-US" sz="1200" dirty="0"/>
-          </a:p>
-        </p:txBody>
-      </p:sp>
-      <p:sp>
-        <p:nvSpPr>
-          <p:cNvPr id="9" name="Text 6"/>
-          <p:cNvSpPr/>
-          <p:nvPr/>
-        </p:nvSpPr>
-        <p:spPr>
-          <a:xfrm>
-            <a:off x="594360" y="2880360"/>
-            <a:ext cx="914400" cy="365760"/>
-          </a:xfrm>
-          <a:prstGeom prst="rect">
-            <a:avLst/>
-          </a:prstGeom>
-          <a:noFill/>
-          <a:ln/>
-        </p:spPr>
-        <p:txBody>
-          <a:bodyPr wrap="square" lIns="0" tIns="0" rIns="0" bIns="0" rtlCol="0" anchor="ctr"/>
-          <a:lstStyle/>
-          <a:p>
-            <a:pPr indent="0" marL="0">
-              <a:buNone/>
-            </a:pPr>
-            <a:r>
-              <a:rPr lang="en-US" sz="2000" b="1" dirty="0">
-                <a:solidFill>
-                  <a:srgbClr val="237F72"/>
-                </a:solidFill>
-              </a:rPr>
-              <a:t>02</a:t>
-            </a:r>
-            <a:endParaRPr lang="en-US" sz="2000" dirty="0"/>
-          </a:p>
-        </p:txBody>
-      </p:sp>
-      <p:sp>
-        <p:nvSpPr>
-          <p:cNvPr id="10" name="Text 7"/>
-          <p:cNvSpPr/>
-          <p:nvPr/>
-        </p:nvSpPr>
-        <p:spPr>
-          <a:xfrm>
-            <a:off x="1645920" y="2880360"/>
-            <a:ext cx="9692640" cy="777240"/>
-          </a:xfrm>
-          <a:prstGeom prst="rect">
-            <a:avLst/>
-          </a:prstGeom>
-          <a:noFill/>
-          <a:ln/>
-        </p:spPr>
-        <p:txBody>
-          <a:bodyPr wrap="square" lIns="0" tIns="0" rIns="0" bIns="0" rtlCol="0" anchor="ctr">
-            <a:normAutofit/>
-          </a:bodyPr>
-          <a:lstStyle/>
-          <a:p>
-            <a:pPr indent="0" marL="0">
-              <a:buNone/>
-            </a:pPr>
-            <a:r>
-              <a:rPr lang="en-US" sz="1800" dirty="0">
-                <a:solidFill>
-                  <a:srgbClr val="1F2933"/>
-                </a:solidFill>
-              </a:rPr>
-              <a:t>取得资产组范围与完整减值预测、折现率依据、历史预算兑现，以及售后准备新增/使用/冲回和质保批次数据。</a:t>
-            </a:r>
-            <a:endParaRPr lang="en-US" sz="1800" dirty="0"/>
-          </a:p>
-        </p:txBody>
-      </p:sp>
-      <p:sp>
-        <p:nvSpPr>
-          <p:cNvPr id="11" name="Text 8"/>
-          <p:cNvSpPr/>
-          <p:nvPr/>
-        </p:nvSpPr>
-        <p:spPr>
-          <a:xfrm>
-            <a:off x="1645920" y="3675888"/>
-            <a:ext cx="9692640" cy="274320"/>
-          </a:xfrm>
-          <a:prstGeom prst="rect">
-            <a:avLst/>
-          </a:prstGeom>
-          <a:noFill/>
-          <a:ln/>
-        </p:spPr>
-        <p:txBody>
-          <a:bodyPr wrap="square" lIns="0" tIns="0" rIns="0" bIns="0" rtlCol="0" anchor="ctr"/>
-          <a:lstStyle/>
-          <a:p>
-            <a:pPr indent="0" marL="0">
-              <a:buNone/>
-            </a:pPr>
-            <a:r>
-              <a:rPr lang="en-US" sz="1200" dirty="0">
-                <a:solidFill>
-                  <a:srgbClr val="586874"/>
-                </a:solidFill>
-              </a:rPr>
-              <a:t>资产/售后财务负责人及审计估计负责人</a:t>
-            </a:r>
-            <a:endParaRPr lang="en-US" sz="1200" dirty="0"/>
+              <a:t>来源记录 E_AUDIT / E_POLICY / E_PPE；全部来源及位置见报告、底稿与备注</a:t>
+            </a:r>
+            <a:endParaRPr lang="en-US" sz="900" dirty="0"/>
           </a:p>
         </p:txBody>
       </p:sp>
